--- a/BarangayConnect_Presentation.pptx
+++ b/BarangayConnect_Presentation.pptx
@@ -13,7 +13,6 @@
     <p:sldId id="261" r:id="rId12"/>
     <p:sldId id="262" r:id="rId13"/>
     <p:sldId id="263" r:id="rId14"/>
-    <p:sldId id="264" r:id="rId15"/>
   </p:sldIdLst>
   <p:sldSz cx="12191695" cy="6858000" type="screen4x3"/>
   <p:notesSz cx="6858000" cy="9144000"/>
@@ -3098,25 +3097,288 @@
       <p:grpSpPr/>
       <p:sp>
         <p:nvSpPr>
-          <p:cNvPr id="2" name="Title 1"/>
-          <p:cNvSpPr>
-            <a:spLocks noGrp="1"/>
-          </p:cNvSpPr>
-          <p:nvPr>
-            <p:ph type="ctrTitle"/>
-          </p:nvPr>
-        </p:nvSpPr>
-        <p:spPr/>
-        <p:txBody>
-          <a:bodyPr/>
+          <p:cNvPr id="2" name="Rectangle 1"/>
+          <p:cNvSpPr/>
+          <p:nvPr/>
+        </p:nvSpPr>
+        <p:spPr>
+          <a:xfrm>
+            <a:off x="0" y="0"/>
+            <a:ext cx="12191695" cy="6858000"/>
+          </a:xfrm>
+          <a:prstGeom prst="rect">
+            <a:avLst/>
+          </a:prstGeom>
+          <a:solidFill>
+            <a:srgbClr val="0F2A4C"/>
+          </a:solidFill>
+          <a:ln>
+            <a:noFill/>
+          </a:ln>
+          <a:effectLst/>
+        </p:spPr>
+        <p:style>
+          <a:lnRef idx="1">
+            <a:schemeClr val="accent1"/>
+          </a:lnRef>
+          <a:fillRef idx="3">
+            <a:schemeClr val="accent1"/>
+          </a:fillRef>
+          <a:effectRef idx="2">
+            <a:schemeClr val="accent1"/>
+          </a:effectRef>
+          <a:fontRef idx="minor">
+            <a:schemeClr val="lt1"/>
+          </a:fontRef>
+        </p:style>
+        <p:txBody>
+          <a:bodyPr rtlCol="0" anchor="ctr"/>
           <a:lstStyle/>
           <a:p>
             <a:pPr algn="ctr"/>
-            <a:r>
-              <a:rPr>
-                <a:solidFill>
-                  <a:srgbClr val="1E293B"/>
-                </a:solidFill>
+          </a:p>
+        </p:txBody>
+      </p:sp>
+      <p:sp>
+        <p:nvSpPr>
+          <p:cNvPr id="3" name="Rectangle 2"/>
+          <p:cNvSpPr/>
+          <p:nvPr/>
+        </p:nvSpPr>
+        <p:spPr>
+          <a:xfrm>
+            <a:off x="0" y="0"/>
+            <a:ext cx="256032" cy="6858000"/>
+          </a:xfrm>
+          <a:prstGeom prst="rect">
+            <a:avLst/>
+          </a:prstGeom>
+          <a:solidFill>
+            <a:srgbClr val="F2B418"/>
+          </a:solidFill>
+          <a:ln>
+            <a:noFill/>
+          </a:ln>
+          <a:effectLst/>
+        </p:spPr>
+        <p:style>
+          <a:lnRef idx="1">
+            <a:schemeClr val="accent1"/>
+          </a:lnRef>
+          <a:fillRef idx="3">
+            <a:schemeClr val="accent1"/>
+          </a:fillRef>
+          <a:effectRef idx="2">
+            <a:schemeClr val="accent1"/>
+          </a:effectRef>
+          <a:fontRef idx="minor">
+            <a:schemeClr val="lt1"/>
+          </a:fontRef>
+        </p:style>
+        <p:txBody>
+          <a:bodyPr rtlCol="0" anchor="ctr"/>
+          <a:lstStyle/>
+          <a:p>
+            <a:pPr algn="ctr"/>
+          </a:p>
+        </p:txBody>
+      </p:sp>
+      <p:sp>
+        <p:nvSpPr>
+          <p:cNvPr id="4" name="Rectangle 3"/>
+          <p:cNvSpPr/>
+          <p:nvPr/>
+        </p:nvSpPr>
+        <p:spPr>
+          <a:xfrm>
+            <a:off x="11935663" y="0"/>
+            <a:ext cx="256032" cy="6858000"/>
+          </a:xfrm>
+          <a:prstGeom prst="rect">
+            <a:avLst/>
+          </a:prstGeom>
+          <a:solidFill>
+            <a:srgbClr val="F2B418"/>
+          </a:solidFill>
+          <a:ln>
+            <a:noFill/>
+          </a:ln>
+          <a:effectLst/>
+        </p:spPr>
+        <p:style>
+          <a:lnRef idx="1">
+            <a:schemeClr val="accent1"/>
+          </a:lnRef>
+          <a:fillRef idx="3">
+            <a:schemeClr val="accent1"/>
+          </a:fillRef>
+          <a:effectRef idx="2">
+            <a:schemeClr val="accent1"/>
+          </a:effectRef>
+          <a:fontRef idx="minor">
+            <a:schemeClr val="lt1"/>
+          </a:fontRef>
+        </p:style>
+        <p:txBody>
+          <a:bodyPr rtlCol="0" anchor="ctr"/>
+          <a:lstStyle/>
+          <a:p>
+            <a:pPr algn="ctr"/>
+          </a:p>
+        </p:txBody>
+      </p:sp>
+      <p:sp>
+        <p:nvSpPr>
+          <p:cNvPr id="5" name="Oval 4"/>
+          <p:cNvSpPr/>
+          <p:nvPr/>
+        </p:nvSpPr>
+        <p:spPr>
+          <a:xfrm>
+            <a:off x="5458968" y="1005840"/>
+            <a:ext cx="1280160" cy="1280160"/>
+          </a:xfrm>
+          <a:prstGeom prst="ellipse">
+            <a:avLst/>
+          </a:prstGeom>
+          <a:solidFill>
+            <a:srgbClr val="163A63"/>
+          </a:solidFill>
+          <a:ln>
+            <a:noFill/>
+          </a:ln>
+          <a:effectLst/>
+        </p:spPr>
+        <p:style>
+          <a:lnRef idx="1">
+            <a:schemeClr val="accent1"/>
+          </a:lnRef>
+          <a:fillRef idx="3">
+            <a:schemeClr val="accent1"/>
+          </a:fillRef>
+          <a:effectRef idx="2">
+            <a:schemeClr val="accent1"/>
+          </a:effectRef>
+          <a:fontRef idx="minor">
+            <a:schemeClr val="lt1"/>
+          </a:fontRef>
+        </p:style>
+        <p:txBody>
+          <a:bodyPr rtlCol="0" anchor="ctr"/>
+          <a:lstStyle/>
+          <a:p>
+            <a:pPr algn="ctr"/>
+          </a:p>
+        </p:txBody>
+      </p:sp>
+      <p:sp>
+        <p:nvSpPr>
+          <p:cNvPr id="6" name="Rectangle 5"/>
+          <p:cNvSpPr/>
+          <p:nvPr/>
+        </p:nvSpPr>
+        <p:spPr>
+          <a:xfrm>
+            <a:off x="5779008" y="1325880"/>
+            <a:ext cx="640080" cy="640080"/>
+          </a:xfrm>
+          <a:prstGeom prst="rect">
+            <a:avLst/>
+          </a:prstGeom>
+          <a:solidFill>
+            <a:srgbClr val="F2B418"/>
+          </a:solidFill>
+          <a:ln>
+            <a:noFill/>
+          </a:ln>
+          <a:effectLst/>
+        </p:spPr>
+        <p:style>
+          <a:lnRef idx="1">
+            <a:schemeClr val="accent1"/>
+          </a:lnRef>
+          <a:fillRef idx="3">
+            <a:schemeClr val="accent1"/>
+          </a:fillRef>
+          <a:effectRef idx="2">
+            <a:schemeClr val="accent1"/>
+          </a:effectRef>
+          <a:fontRef idx="minor">
+            <a:schemeClr val="lt1"/>
+          </a:fontRef>
+        </p:style>
+        <p:txBody>
+          <a:bodyPr rtlCol="0" anchor="ctr"/>
+          <a:lstStyle/>
+          <a:p>
+            <a:pPr algn="ctr"/>
+          </a:p>
+        </p:txBody>
+      </p:sp>
+      <p:sp>
+        <p:nvSpPr>
+          <p:cNvPr id="7" name="TextBox 6"/>
+          <p:cNvSpPr txBox="1"/>
+          <p:nvPr/>
+        </p:nvSpPr>
+        <p:spPr>
+          <a:xfrm>
+            <a:off x="5458968" y="1005840"/>
+            <a:ext cx="1280160" cy="1280160"/>
+          </a:xfrm>
+          <a:prstGeom prst="rect">
+            <a:avLst/>
+          </a:prstGeom>
+          <a:noFill/>
+        </p:spPr>
+        <p:txBody>
+          <a:bodyPr wrap="square" anchor="ctr" lIns="0" rIns="0" tIns="0" bIns="0">
+            <a:spAutoFit/>
+          </a:bodyPr>
+          <a:lstStyle/>
+          <a:p>
+            <a:pPr algn="ctr"/>
+            <a:r>
+              <a:rPr sz="2200" b="1">
+                <a:solidFill>
+                  <a:srgbClr val="0F2A4C"/>
+                </a:solidFill>
+                <a:latin typeface="Calibri"/>
+              </a:rPr>
+              <a:t>BC</a:t>
+            </a:r>
+          </a:p>
+        </p:txBody>
+      </p:sp>
+      <p:sp>
+        <p:nvSpPr>
+          <p:cNvPr id="8" name="TextBox 7"/>
+          <p:cNvSpPr txBox="1"/>
+          <p:nvPr/>
+        </p:nvSpPr>
+        <p:spPr>
+          <a:xfrm>
+            <a:off x="0" y="2651760"/>
+            <a:ext cx="12191695" cy="914400"/>
+          </a:xfrm>
+          <a:prstGeom prst="rect">
+            <a:avLst/>
+          </a:prstGeom>
+          <a:noFill/>
+        </p:spPr>
+        <p:txBody>
+          <a:bodyPr wrap="square" anchor="ctr" lIns="0" rIns="0" tIns="0" bIns="0">
+            <a:spAutoFit/>
+          </a:bodyPr>
+          <a:lstStyle/>
+          <a:p>
+            <a:pPr algn="ctr"/>
+            <a:r>
+              <a:rPr sz="5200" b="1">
+                <a:solidFill>
+                  <a:srgbClr val="FFFFFF"/>
+                </a:solidFill>
+                <a:latin typeface="Calibri"/>
               </a:rPr>
               <a:t>BarangayConnect</a:t>
             </a:r>
@@ -3125,38 +3387,119 @@
       </p:sp>
       <p:sp>
         <p:nvSpPr>
-          <p:cNvPr id="3" name="Subtitle 2"/>
-          <p:cNvSpPr>
-            <a:spLocks noGrp="1"/>
-          </p:cNvSpPr>
-          <p:nvPr>
-            <p:ph type="subTitle" idx="1"/>
-          </p:nvPr>
-        </p:nvSpPr>
-        <p:spPr/>
-        <p:txBody>
-          <a:bodyPr/>
+          <p:cNvPr id="9" name="Rectangle 8"/>
+          <p:cNvSpPr/>
+          <p:nvPr/>
+        </p:nvSpPr>
+        <p:spPr>
+          <a:xfrm>
+            <a:off x="4754880" y="3675887"/>
+            <a:ext cx="2679192" cy="38100"/>
+          </a:xfrm>
+          <a:prstGeom prst="rect">
+            <a:avLst/>
+          </a:prstGeom>
+          <a:solidFill>
+            <a:srgbClr val="F2B418"/>
+          </a:solidFill>
+          <a:ln>
+            <a:noFill/>
+          </a:ln>
+          <a:effectLst/>
+        </p:spPr>
+        <p:style>
+          <a:lnRef idx="1">
+            <a:schemeClr val="accent1"/>
+          </a:lnRef>
+          <a:fillRef idx="3">
+            <a:schemeClr val="accent1"/>
+          </a:fillRef>
+          <a:effectRef idx="2">
+            <a:schemeClr val="accent1"/>
+          </a:effectRef>
+          <a:fontRef idx="minor">
+            <a:schemeClr val="lt1"/>
+          </a:fontRef>
+        </p:style>
+        <p:txBody>
+          <a:bodyPr rtlCol="0" anchor="ctr"/>
           <a:lstStyle/>
           <a:p>
             <a:pPr algn="ctr"/>
-            <a:r>
-              <a:rPr>
-                <a:solidFill>
-                  <a:srgbClr val="1E293B"/>
-                </a:solidFill>
+          </a:p>
+        </p:txBody>
+      </p:sp>
+      <p:sp>
+        <p:nvSpPr>
+          <p:cNvPr id="10" name="TextBox 9"/>
+          <p:cNvSpPr txBox="1"/>
+          <p:nvPr/>
+        </p:nvSpPr>
+        <p:spPr>
+          <a:xfrm>
+            <a:off x="1280160" y="3977639"/>
+            <a:ext cx="9601200" cy="1097280"/>
+          </a:xfrm>
+          <a:prstGeom prst="rect">
+            <a:avLst/>
+          </a:prstGeom>
+          <a:noFill/>
+        </p:spPr>
+        <p:txBody>
+          <a:bodyPr wrap="square" anchor="ctr" lIns="0" rIns="0" tIns="0" bIns="0">
+            <a:spAutoFit/>
+          </a:bodyPr>
+          <a:lstStyle/>
+          <a:p>
+            <a:pPr algn="ctr">
+              <a:lnSpc>
+                <a:spcPct val="120000"/>
+              </a:lnSpc>
+            </a:pPr>
+            <a:r>
+              <a:rPr sz="2000" b="0">
+                <a:solidFill>
+                  <a:srgbClr val="D5E0EE"/>
+                </a:solidFill>
+                <a:latin typeface="Calibri"/>
               </a:rPr>
-              <a:t>A Digital Barangay Management System</a:t>
-            </a:r>
-          </a:p>
+              <a:t>A Digital Barangay Management System
+Transforming Community Governance</a:t>
+            </a:r>
+          </a:p>
+        </p:txBody>
+      </p:sp>
+      <p:sp>
+        <p:nvSpPr>
+          <p:cNvPr id="11" name="TextBox 10"/>
+          <p:cNvSpPr txBox="1"/>
+          <p:nvPr/>
+        </p:nvSpPr>
+        <p:spPr>
+          <a:xfrm>
+            <a:off x="0" y="6172200"/>
+            <a:ext cx="12191695" cy="457200"/>
+          </a:xfrm>
+          <a:prstGeom prst="rect">
+            <a:avLst/>
+          </a:prstGeom>
+          <a:noFill/>
+        </p:spPr>
+        <p:txBody>
+          <a:bodyPr wrap="square" anchor="ctr" lIns="0" rIns="0" tIns="0" bIns="0">
+            <a:spAutoFit/>
+          </a:bodyPr>
+          <a:lstStyle/>
           <a:p>
             <a:pPr algn="ctr"/>
             <a:r>
-              <a:rPr>
-                <a:solidFill>
-                  <a:srgbClr val="1E293B"/>
-                </a:solidFill>
+              <a:rPr sz="1300" b="0">
+                <a:solidFill>
+                  <a:srgbClr val="9AAFC6"/>
+                </a:solidFill>
+                <a:latin typeface="Calibri"/>
               </a:rPr>
-              <a:t>Transforming Community Governance</a:t>
+              <a:t>Barangay Operations · Resident Services · Smart Governance</a:t>
             </a:r>
           </a:p>
         </p:txBody>
@@ -3181,40 +3524,90 @@
       <p:grpSpPr/>
       <p:sp>
         <p:nvSpPr>
-          <p:cNvPr id="2" name="Title 1"/>
-          <p:cNvSpPr>
-            <a:spLocks noGrp="1"/>
-          </p:cNvSpPr>
-          <p:nvPr>
-            <p:ph type="title"/>
-          </p:nvPr>
-        </p:nvSpPr>
-        <p:spPr/>
-        <p:txBody>
-          <a:bodyPr/>
-          <a:lstStyle/>
-          <a:p>
-            <a:r>
-              <a:t>The Problem</a:t>
-            </a:r>
-          </a:p>
-        </p:txBody>
-      </p:sp>
-      <p:sp>
-        <p:nvSpPr>
-          <p:cNvPr id="3" name="Content Placeholder 2"/>
-          <p:cNvSpPr>
-            <a:spLocks noGrp="1"/>
-          </p:cNvSpPr>
-          <p:nvPr>
-            <p:ph idx="1"/>
-          </p:nvPr>
-        </p:nvSpPr>
-        <p:spPr/>
-        <p:txBody>
-          <a:bodyPr/>
-          <a:lstStyle/>
-          <a:p/>
+          <p:cNvPr id="2" name="Rectangle 1"/>
+          <p:cNvSpPr/>
+          <p:nvPr/>
+        </p:nvSpPr>
+        <p:spPr>
+          <a:xfrm>
+            <a:off x="0" y="0"/>
+            <a:ext cx="12191695" cy="1234440"/>
+          </a:xfrm>
+          <a:prstGeom prst="rect">
+            <a:avLst/>
+          </a:prstGeom>
+          <a:solidFill>
+            <a:srgbClr val="0F2A4C"/>
+          </a:solidFill>
+          <a:ln>
+            <a:noFill/>
+          </a:ln>
+          <a:effectLst/>
+        </p:spPr>
+        <p:style>
+          <a:lnRef idx="1">
+            <a:schemeClr val="accent1"/>
+          </a:lnRef>
+          <a:fillRef idx="3">
+            <a:schemeClr val="accent1"/>
+          </a:fillRef>
+          <a:effectRef idx="2">
+            <a:schemeClr val="accent1"/>
+          </a:effectRef>
+          <a:fontRef idx="minor">
+            <a:schemeClr val="lt1"/>
+          </a:fontRef>
+        </p:style>
+        <p:txBody>
+          <a:bodyPr rtlCol="0" anchor="ctr"/>
+          <a:lstStyle/>
+          <a:p>
+            <a:pPr algn="ctr"/>
+          </a:p>
+        </p:txBody>
+      </p:sp>
+      <p:sp>
+        <p:nvSpPr>
+          <p:cNvPr id="3" name="Rectangle 2"/>
+          <p:cNvSpPr/>
+          <p:nvPr/>
+        </p:nvSpPr>
+        <p:spPr>
+          <a:xfrm>
+            <a:off x="0" y="1234440"/>
+            <a:ext cx="12191695" cy="50800"/>
+          </a:xfrm>
+          <a:prstGeom prst="rect">
+            <a:avLst/>
+          </a:prstGeom>
+          <a:solidFill>
+            <a:srgbClr val="F2B418"/>
+          </a:solidFill>
+          <a:ln>
+            <a:noFill/>
+          </a:ln>
+          <a:effectLst/>
+        </p:spPr>
+        <p:style>
+          <a:lnRef idx="1">
+            <a:schemeClr val="accent1"/>
+          </a:lnRef>
+          <a:fillRef idx="3">
+            <a:schemeClr val="accent1"/>
+          </a:fillRef>
+          <a:effectRef idx="2">
+            <a:schemeClr val="accent1"/>
+          </a:effectRef>
+          <a:fontRef idx="minor">
+            <a:schemeClr val="lt1"/>
+          </a:fontRef>
+        </p:style>
+        <p:txBody>
+          <a:bodyPr rtlCol="0" anchor="ctr"/>
+          <a:lstStyle/>
+          <a:p>
+            <a:pPr algn="ctr"/>
+          </a:p>
         </p:txBody>
       </p:sp>
       <p:sp>
@@ -3225,8 +3618,8 @@
         </p:nvSpPr>
         <p:spPr>
           <a:xfrm>
-            <a:off x="914400" y="1371600"/>
-            <a:ext cx="10058400" cy="4572000"/>
+            <a:off x="640080" y="0"/>
+            <a:ext cx="8686800" cy="1234440"/>
           </a:xfrm>
           <a:prstGeom prst="rect">
             <a:avLst/>
@@ -3234,63 +3627,297 @@
           <a:noFill/>
         </p:spPr>
         <p:txBody>
-          <a:bodyPr wrap="square">
+          <a:bodyPr wrap="square" anchor="ctr" lIns="0" rIns="0" tIns="0" bIns="0">
             <a:spAutoFit/>
           </a:bodyPr>
           <a:lstStyle/>
           <a:p>
+            <a:pPr algn="l"/>
+            <a:r>
+              <a:rPr sz="3000" b="1">
+                <a:solidFill>
+                  <a:srgbClr val="FFFFFF"/>
+                </a:solidFill>
+                <a:latin typeface="Calibri"/>
+              </a:rPr>
+              <a:t>The Problem</a:t>
+            </a:r>
+          </a:p>
+        </p:txBody>
+      </p:sp>
+      <p:sp>
+        <p:nvSpPr>
+          <p:cNvPr id="5" name="TextBox 4"/>
+          <p:cNvSpPr txBox="1"/>
+          <p:nvPr/>
+        </p:nvSpPr>
+        <p:spPr>
+          <a:xfrm>
+            <a:off x="8778240" y="0"/>
+            <a:ext cx="2834640" cy="1234440"/>
+          </a:xfrm>
+          <a:prstGeom prst="rect">
+            <a:avLst/>
+          </a:prstGeom>
+          <a:noFill/>
+        </p:spPr>
+        <p:txBody>
+          <a:bodyPr wrap="square" anchor="ctr" lIns="0" rIns="0" tIns="0" bIns="0">
+            <a:spAutoFit/>
+          </a:bodyPr>
+          <a:lstStyle/>
+          <a:p>
+            <a:pPr algn="r"/>
+            <a:r>
+              <a:rPr sz="1200" b="0">
+                <a:solidFill>
+                  <a:srgbClr val="C9D6E8"/>
+                </a:solidFill>
+                <a:latin typeface="Calibri"/>
+              </a:rPr>
+              <a:t>Why change is needed</a:t>
+            </a:r>
+          </a:p>
+        </p:txBody>
+      </p:sp>
+      <p:sp>
+        <p:nvSpPr>
+          <p:cNvPr id="6" name="Rectangle 5"/>
+          <p:cNvSpPr/>
+          <p:nvPr/>
+        </p:nvSpPr>
+        <p:spPr>
+          <a:xfrm>
+            <a:off x="11231575" y="0"/>
+            <a:ext cx="960120" cy="384048"/>
+          </a:xfrm>
+          <a:prstGeom prst="rect">
+            <a:avLst/>
+          </a:prstGeom>
+          <a:solidFill>
+            <a:srgbClr val="F2B418"/>
+          </a:solidFill>
+          <a:ln>
+            <a:noFill/>
+          </a:ln>
+          <a:effectLst/>
+        </p:spPr>
+        <p:style>
+          <a:lnRef idx="1">
+            <a:schemeClr val="accent1"/>
+          </a:lnRef>
+          <a:fillRef idx="3">
+            <a:schemeClr val="accent1"/>
+          </a:fillRef>
+          <a:effectRef idx="2">
+            <a:schemeClr val="accent1"/>
+          </a:effectRef>
+          <a:fontRef idx="minor">
+            <a:schemeClr val="lt1"/>
+          </a:fontRef>
+        </p:style>
+        <p:txBody>
+          <a:bodyPr rtlCol="0" anchor="ctr"/>
+          <a:lstStyle/>
+          <a:p>
+            <a:pPr algn="ctr"/>
+          </a:p>
+        </p:txBody>
+      </p:sp>
+      <p:sp>
+        <p:nvSpPr>
+          <p:cNvPr id="7" name="TextBox 6"/>
+          <p:cNvSpPr txBox="1"/>
+          <p:nvPr/>
+        </p:nvSpPr>
+        <p:spPr>
+          <a:xfrm>
+            <a:off x="11231575" y="0"/>
+            <a:ext cx="960120" cy="384048"/>
+          </a:xfrm>
+          <a:prstGeom prst="rect">
+            <a:avLst/>
+          </a:prstGeom>
+          <a:noFill/>
+        </p:spPr>
+        <p:txBody>
+          <a:bodyPr wrap="square" anchor="ctr" lIns="0" rIns="0" tIns="0" bIns="0">
+            <a:spAutoFit/>
+          </a:bodyPr>
+          <a:lstStyle/>
+          <a:p>
+            <a:pPr algn="ctr"/>
+            <a:r>
+              <a:rPr sz="1400" b="1">
+                <a:solidFill>
+                  <a:srgbClr val="0F2A4C"/>
+                </a:solidFill>
+                <a:latin typeface="Calibri"/>
+              </a:rPr>
+              <a:t>BC</a:t>
+            </a:r>
+          </a:p>
+        </p:txBody>
+      </p:sp>
+      <p:sp>
+        <p:nvSpPr>
+          <p:cNvPr id="8" name="TextBox 7"/>
+          <p:cNvSpPr txBox="1"/>
+          <p:nvPr/>
+        </p:nvSpPr>
+        <p:spPr>
+          <a:xfrm>
+            <a:off x="731520" y="1783080"/>
+            <a:ext cx="10698480" cy="4572000"/>
+          </a:xfrm>
+          <a:prstGeom prst="rect">
+            <a:avLst/>
+          </a:prstGeom>
+          <a:noFill/>
+        </p:spPr>
+        <p:txBody>
+          <a:bodyPr wrap="square" anchor="t" lIns="0" rIns="0" tIns="0" bIns="0">
+            <a:spAutoFit/>
+          </a:bodyPr>
+          <a:lstStyle/>
+          <a:p>
             <a:pPr>
+              <a:lnSpc>
+                <a:spcPct val="105000"/>
+              </a:lnSpc>
               <a:spcAft>
-                <a:spcPts val="1200"/>
+                <a:spcPts val="2200"/>
               </a:spcAft>
-              <a:defRPr sz="1800"/>
             </a:pPr>
             <a:r>
-              <a:t>Manual, paper-based processes</a:t>
+              <a:rPr sz="1600">
+                <a:solidFill>
+                  <a:srgbClr val="F2B418"/>
+                </a:solidFill>
+                <a:latin typeface="Calibri"/>
+              </a:rPr>
+              <a:t>▶ </a:t>
+            </a:r>
+            <a:r>
+              <a:rPr sz="2000" b="1">
+                <a:solidFill>
+                  <a:srgbClr val="243244"/>
+                </a:solidFill>
+                <a:latin typeface="Calibri"/>
+              </a:rPr>
+              <a:t>Manual, paper-based processes slow down everyday barangay work</a:t>
             </a:r>
           </a:p>
           <a:p>
             <a:pPr>
+              <a:lnSpc>
+                <a:spcPct val="105000"/>
+              </a:lnSpc>
               <a:spcAft>
-                <a:spcPts val="1200"/>
+                <a:spcPts val="2200"/>
               </a:spcAft>
-              <a:defRPr sz="1800"/>
             </a:pPr>
             <a:r>
-              <a:t>Slow document processing and tracking</a:t>
+              <a:rPr sz="1600">
+                <a:solidFill>
+                  <a:srgbClr val="F2B418"/>
+                </a:solidFill>
+                <a:latin typeface="Calibri"/>
+              </a:rPr>
+              <a:t>▶ </a:t>
+            </a:r>
+            <a:r>
+              <a:rPr sz="2000" b="0">
+                <a:solidFill>
+                  <a:srgbClr val="243244"/>
+                </a:solidFill>
+                <a:latin typeface="Calibri"/>
+              </a:rPr>
+              <a:t>Document requests are hard to track and take days to process</a:t>
             </a:r>
           </a:p>
           <a:p>
             <a:pPr>
+              <a:lnSpc>
+                <a:spcPct val="105000"/>
+              </a:lnSpc>
               <a:spcAft>
-                <a:spcPts val="1200"/>
+                <a:spcPts val="2200"/>
               </a:spcAft>
-              <a:defRPr sz="1800"/>
             </a:pPr>
             <a:r>
-              <a:t>Lack of centralized resident records</a:t>
+              <a:rPr sz="1600">
+                <a:solidFill>
+                  <a:srgbClr val="F2B418"/>
+                </a:solidFill>
+                <a:latin typeface="Calibri"/>
+              </a:rPr>
+              <a:t>▶ </a:t>
+            </a:r>
+            <a:r>
+              <a:rPr sz="2000" b="0">
+                <a:solidFill>
+                  <a:srgbClr val="243244"/>
+                </a:solidFill>
+                <a:latin typeface="Calibri"/>
+              </a:rPr>
+              <a:t>Resident records are scattered across notebooks, logs, and files</a:t>
             </a:r>
           </a:p>
           <a:p>
             <a:pPr>
+              <a:lnSpc>
+                <a:spcPct val="105000"/>
+              </a:lnSpc>
               <a:spcAft>
-                <a:spcPts val="1200"/>
+                <a:spcPts val="2200"/>
               </a:spcAft>
-              <a:defRPr sz="1800"/>
             </a:pPr>
             <a:r>
-              <a:t>Difficulty in monitoring complaints &amp; incidents</a:t>
+              <a:rPr sz="1600">
+                <a:solidFill>
+                  <a:srgbClr val="F2B418"/>
+                </a:solidFill>
+                <a:latin typeface="Calibri"/>
+              </a:rPr>
+              <a:t>▶ </a:t>
+            </a:r>
+            <a:r>
+              <a:rPr sz="2000" b="0">
+                <a:solidFill>
+                  <a:srgbClr val="243244"/>
+                </a:solidFill>
+                <a:latin typeface="Calibri"/>
+              </a:rPr>
+              <a:t>Complaints and incidents are hard to monitor and resolve on time</a:t>
             </a:r>
           </a:p>
           <a:p>
             <a:pPr>
+              <a:lnSpc>
+                <a:spcPct val="105000"/>
+              </a:lnSpc>
               <a:spcAft>
-                <a:spcPts val="1200"/>
+                <a:spcPts val="2200"/>
               </a:spcAft>
-              <a:defRPr sz="1800"/>
             </a:pPr>
             <a:r>
-              <a:t>Limited transparency for residents</a:t>
+              <a:rPr sz="1600">
+                <a:solidFill>
+                  <a:srgbClr val="F2B418"/>
+                </a:solidFill>
+                <a:latin typeface="Calibri"/>
+              </a:rPr>
+              <a:t>▶ </a:t>
+            </a:r>
+            <a:r>
+              <a:rPr sz="2000" b="0">
+                <a:solidFill>
+                  <a:srgbClr val="243244"/>
+                </a:solidFill>
+                <a:latin typeface="Calibri"/>
+              </a:rPr>
+              <a:t>Residents have limited visibility into barangay services</a:t>
             </a:r>
           </a:p>
         </p:txBody>
@@ -3315,40 +3942,90 @@
       <p:grpSpPr/>
       <p:sp>
         <p:nvSpPr>
-          <p:cNvPr id="2" name="Title 1"/>
-          <p:cNvSpPr>
-            <a:spLocks noGrp="1"/>
-          </p:cNvSpPr>
-          <p:nvPr>
-            <p:ph type="title"/>
-          </p:nvPr>
-        </p:nvSpPr>
-        <p:spPr/>
-        <p:txBody>
-          <a:bodyPr/>
-          <a:lstStyle/>
-          <a:p>
-            <a:r>
-              <a:t>The Solution</a:t>
-            </a:r>
-          </a:p>
-        </p:txBody>
-      </p:sp>
-      <p:sp>
-        <p:nvSpPr>
-          <p:cNvPr id="3" name="Content Placeholder 2"/>
-          <p:cNvSpPr>
-            <a:spLocks noGrp="1"/>
-          </p:cNvSpPr>
-          <p:nvPr>
-            <p:ph idx="1"/>
-          </p:nvPr>
-        </p:nvSpPr>
-        <p:spPr/>
-        <p:txBody>
-          <a:bodyPr/>
-          <a:lstStyle/>
-          <a:p/>
+          <p:cNvPr id="2" name="Rectangle 1"/>
+          <p:cNvSpPr/>
+          <p:nvPr/>
+        </p:nvSpPr>
+        <p:spPr>
+          <a:xfrm>
+            <a:off x="0" y="0"/>
+            <a:ext cx="12191695" cy="1234440"/>
+          </a:xfrm>
+          <a:prstGeom prst="rect">
+            <a:avLst/>
+          </a:prstGeom>
+          <a:solidFill>
+            <a:srgbClr val="0F2A4C"/>
+          </a:solidFill>
+          <a:ln>
+            <a:noFill/>
+          </a:ln>
+          <a:effectLst/>
+        </p:spPr>
+        <p:style>
+          <a:lnRef idx="1">
+            <a:schemeClr val="accent1"/>
+          </a:lnRef>
+          <a:fillRef idx="3">
+            <a:schemeClr val="accent1"/>
+          </a:fillRef>
+          <a:effectRef idx="2">
+            <a:schemeClr val="accent1"/>
+          </a:effectRef>
+          <a:fontRef idx="minor">
+            <a:schemeClr val="lt1"/>
+          </a:fontRef>
+        </p:style>
+        <p:txBody>
+          <a:bodyPr rtlCol="0" anchor="ctr"/>
+          <a:lstStyle/>
+          <a:p>
+            <a:pPr algn="ctr"/>
+          </a:p>
+        </p:txBody>
+      </p:sp>
+      <p:sp>
+        <p:nvSpPr>
+          <p:cNvPr id="3" name="Rectangle 2"/>
+          <p:cNvSpPr/>
+          <p:nvPr/>
+        </p:nvSpPr>
+        <p:spPr>
+          <a:xfrm>
+            <a:off x="0" y="1234440"/>
+            <a:ext cx="12191695" cy="50800"/>
+          </a:xfrm>
+          <a:prstGeom prst="rect">
+            <a:avLst/>
+          </a:prstGeom>
+          <a:solidFill>
+            <a:srgbClr val="F2B418"/>
+          </a:solidFill>
+          <a:ln>
+            <a:noFill/>
+          </a:ln>
+          <a:effectLst/>
+        </p:spPr>
+        <p:style>
+          <a:lnRef idx="1">
+            <a:schemeClr val="accent1"/>
+          </a:lnRef>
+          <a:fillRef idx="3">
+            <a:schemeClr val="accent1"/>
+          </a:fillRef>
+          <a:effectRef idx="2">
+            <a:schemeClr val="accent1"/>
+          </a:effectRef>
+          <a:fontRef idx="minor">
+            <a:schemeClr val="lt1"/>
+          </a:fontRef>
+        </p:style>
+        <p:txBody>
+          <a:bodyPr rtlCol="0" anchor="ctr"/>
+          <a:lstStyle/>
+          <a:p>
+            <a:pPr algn="ctr"/>
+          </a:p>
         </p:txBody>
       </p:sp>
       <p:sp>
@@ -3359,8 +4036,8 @@
         </p:nvSpPr>
         <p:spPr>
           <a:xfrm>
-            <a:off x="914400" y="1371600"/>
-            <a:ext cx="10058400" cy="4572000"/>
+            <a:off x="640080" y="0"/>
+            <a:ext cx="8686800" cy="1234440"/>
           </a:xfrm>
           <a:prstGeom prst="rect">
             <a:avLst/>
@@ -3368,52 +4045,782 @@
           <a:noFill/>
         </p:spPr>
         <p:txBody>
-          <a:bodyPr wrap="square">
+          <a:bodyPr wrap="square" anchor="ctr" lIns="0" rIns="0" tIns="0" bIns="0">
             <a:spAutoFit/>
           </a:bodyPr>
           <a:lstStyle/>
           <a:p>
-            <a:pPr>
-              <a:spcAft>
-                <a:spcPts val="1200"/>
-              </a:spcAft>
-              <a:defRPr sz="1800"/>
+            <a:pPr algn="l"/>
+            <a:r>
+              <a:rPr sz="3000" b="1">
+                <a:solidFill>
+                  <a:srgbClr val="FFFFFF"/>
+                </a:solidFill>
+                <a:latin typeface="Calibri"/>
+              </a:rPr>
+              <a:t>The Solution</a:t>
+            </a:r>
+          </a:p>
+        </p:txBody>
+      </p:sp>
+      <p:sp>
+        <p:nvSpPr>
+          <p:cNvPr id="5" name="TextBox 4"/>
+          <p:cNvSpPr txBox="1"/>
+          <p:nvPr/>
+        </p:nvSpPr>
+        <p:spPr>
+          <a:xfrm>
+            <a:off x="8778240" y="0"/>
+            <a:ext cx="2834640" cy="1234440"/>
+          </a:xfrm>
+          <a:prstGeom prst="rect">
+            <a:avLst/>
+          </a:prstGeom>
+          <a:noFill/>
+        </p:spPr>
+        <p:txBody>
+          <a:bodyPr wrap="square" anchor="ctr" lIns="0" rIns="0" tIns="0" bIns="0">
+            <a:spAutoFit/>
+          </a:bodyPr>
+          <a:lstStyle/>
+          <a:p>
+            <a:pPr algn="r"/>
+            <a:r>
+              <a:rPr sz="1200" b="0">
+                <a:solidFill>
+                  <a:srgbClr val="C9D6E8"/>
+                </a:solidFill>
+                <a:latin typeface="Calibri"/>
+              </a:rPr>
+              <a:t>What BarangayConnect delivers</a:t>
+            </a:r>
+          </a:p>
+        </p:txBody>
+      </p:sp>
+      <p:sp>
+        <p:nvSpPr>
+          <p:cNvPr id="6" name="Rectangle 5"/>
+          <p:cNvSpPr/>
+          <p:nvPr/>
+        </p:nvSpPr>
+        <p:spPr>
+          <a:xfrm>
+            <a:off x="11231575" y="0"/>
+            <a:ext cx="960120" cy="384048"/>
+          </a:xfrm>
+          <a:prstGeom prst="rect">
+            <a:avLst/>
+          </a:prstGeom>
+          <a:solidFill>
+            <a:srgbClr val="F2B418"/>
+          </a:solidFill>
+          <a:ln>
+            <a:noFill/>
+          </a:ln>
+          <a:effectLst/>
+        </p:spPr>
+        <p:style>
+          <a:lnRef idx="1">
+            <a:schemeClr val="accent1"/>
+          </a:lnRef>
+          <a:fillRef idx="3">
+            <a:schemeClr val="accent1"/>
+          </a:fillRef>
+          <a:effectRef idx="2">
+            <a:schemeClr val="accent1"/>
+          </a:effectRef>
+          <a:fontRef idx="minor">
+            <a:schemeClr val="lt1"/>
+          </a:fontRef>
+        </p:style>
+        <p:txBody>
+          <a:bodyPr rtlCol="0" anchor="ctr"/>
+          <a:lstStyle/>
+          <a:p>
+            <a:pPr algn="ctr"/>
+          </a:p>
+        </p:txBody>
+      </p:sp>
+      <p:sp>
+        <p:nvSpPr>
+          <p:cNvPr id="7" name="TextBox 6"/>
+          <p:cNvSpPr txBox="1"/>
+          <p:nvPr/>
+        </p:nvSpPr>
+        <p:spPr>
+          <a:xfrm>
+            <a:off x="11231575" y="0"/>
+            <a:ext cx="960120" cy="384048"/>
+          </a:xfrm>
+          <a:prstGeom prst="rect">
+            <a:avLst/>
+          </a:prstGeom>
+          <a:noFill/>
+        </p:spPr>
+        <p:txBody>
+          <a:bodyPr wrap="square" anchor="ctr" lIns="0" rIns="0" tIns="0" bIns="0">
+            <a:spAutoFit/>
+          </a:bodyPr>
+          <a:lstStyle/>
+          <a:p>
+            <a:pPr algn="ctr"/>
+            <a:r>
+              <a:rPr sz="1400" b="1">
+                <a:solidFill>
+                  <a:srgbClr val="0F2A4C"/>
+                </a:solidFill>
+                <a:latin typeface="Calibri"/>
+              </a:rPr>
+              <a:t>BC</a:t>
+            </a:r>
+          </a:p>
+        </p:txBody>
+      </p:sp>
+      <p:sp>
+        <p:nvSpPr>
+          <p:cNvPr id="8" name="Rounded Rectangle 7"/>
+          <p:cNvSpPr/>
+          <p:nvPr/>
+        </p:nvSpPr>
+        <p:spPr>
+          <a:xfrm>
+            <a:off x="731520" y="1828800"/>
+            <a:ext cx="5074920" cy="1965960"/>
+          </a:xfrm>
+          <a:prstGeom prst="roundRect">
+            <a:avLst/>
+          </a:prstGeom>
+          <a:solidFill>
+            <a:srgbClr val="FFFFFF"/>
+          </a:solidFill>
+          <a:ln>
+            <a:noFill/>
+          </a:ln>
+          <a:effectLst/>
+        </p:spPr>
+        <p:style>
+          <a:lnRef idx="1">
+            <a:schemeClr val="accent1"/>
+          </a:lnRef>
+          <a:fillRef idx="3">
+            <a:schemeClr val="accent1"/>
+          </a:fillRef>
+          <a:effectRef idx="2">
+            <a:schemeClr val="accent1"/>
+          </a:effectRef>
+          <a:fontRef idx="minor">
+            <a:schemeClr val="lt1"/>
+          </a:fontRef>
+        </p:style>
+        <p:txBody>
+          <a:bodyPr rtlCol="0" anchor="ctr"/>
+          <a:lstStyle/>
+          <a:p>
+            <a:pPr algn="ctr"/>
+          </a:p>
+        </p:txBody>
+      </p:sp>
+      <p:sp>
+        <p:nvSpPr>
+          <p:cNvPr id="9" name="Rectangle 8"/>
+          <p:cNvSpPr/>
+          <p:nvPr/>
+        </p:nvSpPr>
+        <p:spPr>
+          <a:xfrm>
+            <a:off x="731520" y="1828800"/>
+            <a:ext cx="82296" cy="1965960"/>
+          </a:xfrm>
+          <a:prstGeom prst="rect">
+            <a:avLst/>
+          </a:prstGeom>
+          <a:solidFill>
+            <a:srgbClr val="F2B418"/>
+          </a:solidFill>
+          <a:ln>
+            <a:noFill/>
+          </a:ln>
+          <a:effectLst/>
+        </p:spPr>
+        <p:style>
+          <a:lnRef idx="1">
+            <a:schemeClr val="accent1"/>
+          </a:lnRef>
+          <a:fillRef idx="3">
+            <a:schemeClr val="accent1"/>
+          </a:fillRef>
+          <a:effectRef idx="2">
+            <a:schemeClr val="accent1"/>
+          </a:effectRef>
+          <a:fontRef idx="minor">
+            <a:schemeClr val="lt1"/>
+          </a:fontRef>
+        </p:style>
+        <p:txBody>
+          <a:bodyPr rtlCol="0" anchor="ctr"/>
+          <a:lstStyle/>
+          <a:p>
+            <a:pPr algn="ctr"/>
+          </a:p>
+        </p:txBody>
+      </p:sp>
+      <p:sp>
+        <p:nvSpPr>
+          <p:cNvPr id="10" name="TextBox 9"/>
+          <p:cNvSpPr txBox="1"/>
+          <p:nvPr/>
+        </p:nvSpPr>
+        <p:spPr>
+          <a:xfrm>
+            <a:off x="1005840" y="1938528"/>
+            <a:ext cx="4617720" cy="411480"/>
+          </a:xfrm>
+          <a:prstGeom prst="rect">
+            <a:avLst/>
+          </a:prstGeom>
+          <a:noFill/>
+        </p:spPr>
+        <p:txBody>
+          <a:bodyPr wrap="square" anchor="ctr" lIns="0" rIns="0" tIns="0" bIns="0">
+            <a:spAutoFit/>
+          </a:bodyPr>
+          <a:lstStyle/>
+          <a:p>
+            <a:pPr algn="l"/>
+            <a:r>
+              <a:rPr sz="1500" b="1">
+                <a:solidFill>
+                  <a:srgbClr val="0F2A4C"/>
+                </a:solidFill>
+                <a:latin typeface="Calibri"/>
+              </a:rPr>
+              <a:t>One Platform</a:t>
+            </a:r>
+          </a:p>
+        </p:txBody>
+      </p:sp>
+      <p:sp>
+        <p:nvSpPr>
+          <p:cNvPr id="11" name="TextBox 10"/>
+          <p:cNvSpPr txBox="1"/>
+          <p:nvPr/>
+        </p:nvSpPr>
+        <p:spPr>
+          <a:xfrm>
+            <a:off x="1005840" y="2304288"/>
+            <a:ext cx="4617720" cy="1417320"/>
+          </a:xfrm>
+          <a:prstGeom prst="rect">
+            <a:avLst/>
+          </a:prstGeom>
+          <a:noFill/>
+        </p:spPr>
+        <p:txBody>
+          <a:bodyPr wrap="square" anchor="t" lIns="0" rIns="0" tIns="0" bIns="0">
+            <a:spAutoFit/>
+          </a:bodyPr>
+          <a:lstStyle/>
+          <a:p>
+            <a:pPr algn="l">
+              <a:lnSpc>
+                <a:spcPct val="110000"/>
+              </a:lnSpc>
             </a:pPr>
             <a:r>
-              <a:t>BarangayConnect: A full-stack web platform</a:t>
-            </a:r>
-          </a:p>
-          <a:p>
-            <a:pPr>
-              <a:spcAft>
-                <a:spcPts val="1200"/>
-              </a:spcAft>
-              <a:defRPr sz="1800"/>
+              <a:rPr sz="1500" b="0">
+                <a:solidFill>
+                  <a:srgbClr val="243244"/>
+                </a:solidFill>
+                <a:latin typeface="Calibri"/>
+              </a:rPr>
+              <a:t>Full-stack web system built end-to-end for barangay operations.</a:t>
+            </a:r>
+          </a:p>
+        </p:txBody>
+      </p:sp>
+      <p:sp>
+        <p:nvSpPr>
+          <p:cNvPr id="12" name="Rounded Rectangle 11"/>
+          <p:cNvSpPr/>
+          <p:nvPr/>
+        </p:nvSpPr>
+        <p:spPr>
+          <a:xfrm>
+            <a:off x="6355080" y="1828800"/>
+            <a:ext cx="5074920" cy="1965960"/>
+          </a:xfrm>
+          <a:prstGeom prst="roundRect">
+            <a:avLst/>
+          </a:prstGeom>
+          <a:solidFill>
+            <a:srgbClr val="FFFFFF"/>
+          </a:solidFill>
+          <a:ln>
+            <a:noFill/>
+          </a:ln>
+          <a:effectLst/>
+        </p:spPr>
+        <p:style>
+          <a:lnRef idx="1">
+            <a:schemeClr val="accent1"/>
+          </a:lnRef>
+          <a:fillRef idx="3">
+            <a:schemeClr val="accent1"/>
+          </a:fillRef>
+          <a:effectRef idx="2">
+            <a:schemeClr val="accent1"/>
+          </a:effectRef>
+          <a:fontRef idx="minor">
+            <a:schemeClr val="lt1"/>
+          </a:fontRef>
+        </p:style>
+        <p:txBody>
+          <a:bodyPr rtlCol="0" anchor="ctr"/>
+          <a:lstStyle/>
+          <a:p>
+            <a:pPr algn="ctr"/>
+          </a:p>
+        </p:txBody>
+      </p:sp>
+      <p:sp>
+        <p:nvSpPr>
+          <p:cNvPr id="13" name="Rectangle 12"/>
+          <p:cNvSpPr/>
+          <p:nvPr/>
+        </p:nvSpPr>
+        <p:spPr>
+          <a:xfrm>
+            <a:off x="6355080" y="1828800"/>
+            <a:ext cx="82296" cy="1965960"/>
+          </a:xfrm>
+          <a:prstGeom prst="rect">
+            <a:avLst/>
+          </a:prstGeom>
+          <a:solidFill>
+            <a:srgbClr val="F2B418"/>
+          </a:solidFill>
+          <a:ln>
+            <a:noFill/>
+          </a:ln>
+          <a:effectLst/>
+        </p:spPr>
+        <p:style>
+          <a:lnRef idx="1">
+            <a:schemeClr val="accent1"/>
+          </a:lnRef>
+          <a:fillRef idx="3">
+            <a:schemeClr val="accent1"/>
+          </a:fillRef>
+          <a:effectRef idx="2">
+            <a:schemeClr val="accent1"/>
+          </a:effectRef>
+          <a:fontRef idx="minor">
+            <a:schemeClr val="lt1"/>
+          </a:fontRef>
+        </p:style>
+        <p:txBody>
+          <a:bodyPr rtlCol="0" anchor="ctr"/>
+          <a:lstStyle/>
+          <a:p>
+            <a:pPr algn="ctr"/>
+          </a:p>
+        </p:txBody>
+      </p:sp>
+      <p:sp>
+        <p:nvSpPr>
+          <p:cNvPr id="14" name="TextBox 13"/>
+          <p:cNvSpPr txBox="1"/>
+          <p:nvPr/>
+        </p:nvSpPr>
+        <p:spPr>
+          <a:xfrm>
+            <a:off x="6629400" y="1938528"/>
+            <a:ext cx="4617720" cy="411480"/>
+          </a:xfrm>
+          <a:prstGeom prst="rect">
+            <a:avLst/>
+          </a:prstGeom>
+          <a:noFill/>
+        </p:spPr>
+        <p:txBody>
+          <a:bodyPr wrap="square" anchor="ctr" lIns="0" rIns="0" tIns="0" bIns="0">
+            <a:spAutoFit/>
+          </a:bodyPr>
+          <a:lstStyle/>
+          <a:p>
+            <a:pPr algn="l"/>
+            <a:r>
+              <a:rPr sz="1500" b="1">
+                <a:solidFill>
+                  <a:srgbClr val="0F2A4C"/>
+                </a:solidFill>
+                <a:latin typeface="Calibri"/>
+              </a:rPr>
+              <a:t>All Operations</a:t>
+            </a:r>
+          </a:p>
+        </p:txBody>
+      </p:sp>
+      <p:sp>
+        <p:nvSpPr>
+          <p:cNvPr id="15" name="TextBox 14"/>
+          <p:cNvSpPr txBox="1"/>
+          <p:nvPr/>
+        </p:nvSpPr>
+        <p:spPr>
+          <a:xfrm>
+            <a:off x="6629400" y="2304288"/>
+            <a:ext cx="4617720" cy="1417320"/>
+          </a:xfrm>
+          <a:prstGeom prst="rect">
+            <a:avLst/>
+          </a:prstGeom>
+          <a:noFill/>
+        </p:spPr>
+        <p:txBody>
+          <a:bodyPr wrap="square" anchor="t" lIns="0" rIns="0" tIns="0" bIns="0">
+            <a:spAutoFit/>
+          </a:bodyPr>
+          <a:lstStyle/>
+          <a:p>
+            <a:pPr algn="l">
+              <a:lnSpc>
+                <a:spcPct val="110000"/>
+              </a:lnSpc>
             </a:pPr>
             <a:r>
-              <a:t>Digitizes day-to-day barangay operations</a:t>
-            </a:r>
-          </a:p>
-          <a:p>
-            <a:pPr>
-              <a:spcAft>
-                <a:spcPts val="1200"/>
-              </a:spcAft>
-              <a:defRPr sz="1800"/>
+              <a:rPr sz="1500" b="0">
+                <a:solidFill>
+                  <a:srgbClr val="243244"/>
+                </a:solidFill>
+                <a:latin typeface="Calibri"/>
+              </a:rPr>
+              <a:t>Residents, documents, appointments, complaints, incidents, payments and announcements in one place.</a:t>
+            </a:r>
+          </a:p>
+        </p:txBody>
+      </p:sp>
+      <p:sp>
+        <p:nvSpPr>
+          <p:cNvPr id="16" name="Rounded Rectangle 15"/>
+          <p:cNvSpPr/>
+          <p:nvPr/>
+        </p:nvSpPr>
+        <p:spPr>
+          <a:xfrm>
+            <a:off x="731520" y="4251960"/>
+            <a:ext cx="5074920" cy="1965960"/>
+          </a:xfrm>
+          <a:prstGeom prst="roundRect">
+            <a:avLst/>
+          </a:prstGeom>
+          <a:solidFill>
+            <a:srgbClr val="FFFFFF"/>
+          </a:solidFill>
+          <a:ln>
+            <a:noFill/>
+          </a:ln>
+          <a:effectLst/>
+        </p:spPr>
+        <p:style>
+          <a:lnRef idx="1">
+            <a:schemeClr val="accent1"/>
+          </a:lnRef>
+          <a:fillRef idx="3">
+            <a:schemeClr val="accent1"/>
+          </a:fillRef>
+          <a:effectRef idx="2">
+            <a:schemeClr val="accent1"/>
+          </a:effectRef>
+          <a:fontRef idx="minor">
+            <a:schemeClr val="lt1"/>
+          </a:fontRef>
+        </p:style>
+        <p:txBody>
+          <a:bodyPr rtlCol="0" anchor="ctr"/>
+          <a:lstStyle/>
+          <a:p>
+            <a:pPr algn="ctr"/>
+          </a:p>
+        </p:txBody>
+      </p:sp>
+      <p:sp>
+        <p:nvSpPr>
+          <p:cNvPr id="17" name="Rectangle 16"/>
+          <p:cNvSpPr/>
+          <p:nvPr/>
+        </p:nvSpPr>
+        <p:spPr>
+          <a:xfrm>
+            <a:off x="731520" y="4251960"/>
+            <a:ext cx="82296" cy="1965960"/>
+          </a:xfrm>
+          <a:prstGeom prst="rect">
+            <a:avLst/>
+          </a:prstGeom>
+          <a:solidFill>
+            <a:srgbClr val="F2B418"/>
+          </a:solidFill>
+          <a:ln>
+            <a:noFill/>
+          </a:ln>
+          <a:effectLst/>
+        </p:spPr>
+        <p:style>
+          <a:lnRef idx="1">
+            <a:schemeClr val="accent1"/>
+          </a:lnRef>
+          <a:fillRef idx="3">
+            <a:schemeClr val="accent1"/>
+          </a:fillRef>
+          <a:effectRef idx="2">
+            <a:schemeClr val="accent1"/>
+          </a:effectRef>
+          <a:fontRef idx="minor">
+            <a:schemeClr val="lt1"/>
+          </a:fontRef>
+        </p:style>
+        <p:txBody>
+          <a:bodyPr rtlCol="0" anchor="ctr"/>
+          <a:lstStyle/>
+          <a:p>
+            <a:pPr algn="ctr"/>
+          </a:p>
+        </p:txBody>
+      </p:sp>
+      <p:sp>
+        <p:nvSpPr>
+          <p:cNvPr id="18" name="TextBox 17"/>
+          <p:cNvSpPr txBox="1"/>
+          <p:nvPr/>
+        </p:nvSpPr>
+        <p:spPr>
+          <a:xfrm>
+            <a:off x="1005840" y="4361688"/>
+            <a:ext cx="4617720" cy="411480"/>
+          </a:xfrm>
+          <a:prstGeom prst="rect">
+            <a:avLst/>
+          </a:prstGeom>
+          <a:noFill/>
+        </p:spPr>
+        <p:txBody>
+          <a:bodyPr wrap="square" anchor="ctr" lIns="0" rIns="0" tIns="0" bIns="0">
+            <a:spAutoFit/>
+          </a:bodyPr>
+          <a:lstStyle/>
+          <a:p>
+            <a:pPr algn="l"/>
+            <a:r>
+              <a:rPr sz="1500" b="1">
+                <a:solidFill>
+                  <a:srgbClr val="0F2A4C"/>
+                </a:solidFill>
+                <a:latin typeface="Calibri"/>
+              </a:rPr>
+              <a:t>White-Label Ready</a:t>
+            </a:r>
+          </a:p>
+        </p:txBody>
+      </p:sp>
+      <p:sp>
+        <p:nvSpPr>
+          <p:cNvPr id="19" name="TextBox 18"/>
+          <p:cNvSpPr txBox="1"/>
+          <p:nvPr/>
+        </p:nvSpPr>
+        <p:spPr>
+          <a:xfrm>
+            <a:off x="1005840" y="4727448"/>
+            <a:ext cx="4617720" cy="1417320"/>
+          </a:xfrm>
+          <a:prstGeom prst="rect">
+            <a:avLst/>
+          </a:prstGeom>
+          <a:noFill/>
+        </p:spPr>
+        <p:txBody>
+          <a:bodyPr wrap="square" anchor="t" lIns="0" rIns="0" tIns="0" bIns="0">
+            <a:spAutoFit/>
+          </a:bodyPr>
+          <a:lstStyle/>
+          <a:p>
+            <a:pPr algn="l">
+              <a:lnSpc>
+                <a:spcPct val="110000"/>
+              </a:lnSpc>
             </a:pPr>
             <a:r>
-              <a:t>Built for white-label, client-presentable use</a:t>
-            </a:r>
-          </a:p>
-          <a:p>
-            <a:pPr>
-              <a:spcAft>
-                <a:spcPts val="1200"/>
-              </a:spcAft>
-              <a:defRPr sz="1800"/>
+              <a:rPr sz="1500" b="0">
+                <a:solidFill>
+                  <a:srgbClr val="243244"/>
+                </a:solidFill>
+                <a:latin typeface="Calibri"/>
+              </a:rPr>
+              <a:t>Client-presentable, customizable per-barangay branding.</a:t>
+            </a:r>
+          </a:p>
+        </p:txBody>
+      </p:sp>
+      <p:sp>
+        <p:nvSpPr>
+          <p:cNvPr id="20" name="Rounded Rectangle 19"/>
+          <p:cNvSpPr/>
+          <p:nvPr/>
+        </p:nvSpPr>
+        <p:spPr>
+          <a:xfrm>
+            <a:off x="6355080" y="4251960"/>
+            <a:ext cx="5074920" cy="1965960"/>
+          </a:xfrm>
+          <a:prstGeom prst="roundRect">
+            <a:avLst/>
+          </a:prstGeom>
+          <a:solidFill>
+            <a:srgbClr val="FFFFFF"/>
+          </a:solidFill>
+          <a:ln>
+            <a:noFill/>
+          </a:ln>
+          <a:effectLst/>
+        </p:spPr>
+        <p:style>
+          <a:lnRef idx="1">
+            <a:schemeClr val="accent1"/>
+          </a:lnRef>
+          <a:fillRef idx="3">
+            <a:schemeClr val="accent1"/>
+          </a:fillRef>
+          <a:effectRef idx="2">
+            <a:schemeClr val="accent1"/>
+          </a:effectRef>
+          <a:fontRef idx="minor">
+            <a:schemeClr val="lt1"/>
+          </a:fontRef>
+        </p:style>
+        <p:txBody>
+          <a:bodyPr rtlCol="0" anchor="ctr"/>
+          <a:lstStyle/>
+          <a:p>
+            <a:pPr algn="ctr"/>
+          </a:p>
+        </p:txBody>
+      </p:sp>
+      <p:sp>
+        <p:nvSpPr>
+          <p:cNvPr id="21" name="Rectangle 20"/>
+          <p:cNvSpPr/>
+          <p:nvPr/>
+        </p:nvSpPr>
+        <p:spPr>
+          <a:xfrm>
+            <a:off x="6355080" y="4251960"/>
+            <a:ext cx="82296" cy="1965960"/>
+          </a:xfrm>
+          <a:prstGeom prst="rect">
+            <a:avLst/>
+          </a:prstGeom>
+          <a:solidFill>
+            <a:srgbClr val="F2B418"/>
+          </a:solidFill>
+          <a:ln>
+            <a:noFill/>
+          </a:ln>
+          <a:effectLst/>
+        </p:spPr>
+        <p:style>
+          <a:lnRef idx="1">
+            <a:schemeClr val="accent1"/>
+          </a:lnRef>
+          <a:fillRef idx="3">
+            <a:schemeClr val="accent1"/>
+          </a:fillRef>
+          <a:effectRef idx="2">
+            <a:schemeClr val="accent1"/>
+          </a:effectRef>
+          <a:fontRef idx="minor">
+            <a:schemeClr val="lt1"/>
+          </a:fontRef>
+        </p:style>
+        <p:txBody>
+          <a:bodyPr rtlCol="0" anchor="ctr"/>
+          <a:lstStyle/>
+          <a:p>
+            <a:pPr algn="ctr"/>
+          </a:p>
+        </p:txBody>
+      </p:sp>
+      <p:sp>
+        <p:nvSpPr>
+          <p:cNvPr id="22" name="TextBox 21"/>
+          <p:cNvSpPr txBox="1"/>
+          <p:nvPr/>
+        </p:nvSpPr>
+        <p:spPr>
+          <a:xfrm>
+            <a:off x="6629400" y="4361688"/>
+            <a:ext cx="4617720" cy="411480"/>
+          </a:xfrm>
+          <a:prstGeom prst="rect">
+            <a:avLst/>
+          </a:prstGeom>
+          <a:noFill/>
+        </p:spPr>
+        <p:txBody>
+          <a:bodyPr wrap="square" anchor="ctr" lIns="0" rIns="0" tIns="0" bIns="0">
+            <a:spAutoFit/>
+          </a:bodyPr>
+          <a:lstStyle/>
+          <a:p>
+            <a:pPr algn="l"/>
+            <a:r>
+              <a:rPr sz="1500" b="1">
+                <a:solidFill>
+                  <a:srgbClr val="0F2A4C"/>
+                </a:solidFill>
+                <a:latin typeface="Calibri"/>
+              </a:rPr>
+              <a:t>Secure by Design</a:t>
+            </a:r>
+          </a:p>
+        </p:txBody>
+      </p:sp>
+      <p:sp>
+        <p:nvSpPr>
+          <p:cNvPr id="23" name="TextBox 22"/>
+          <p:cNvSpPr txBox="1"/>
+          <p:nvPr/>
+        </p:nvSpPr>
+        <p:spPr>
+          <a:xfrm>
+            <a:off x="6629400" y="4727448"/>
+            <a:ext cx="4617720" cy="1417320"/>
+          </a:xfrm>
+          <a:prstGeom prst="rect">
+            <a:avLst/>
+          </a:prstGeom>
+          <a:noFill/>
+        </p:spPr>
+        <p:txBody>
+          <a:bodyPr wrap="square" anchor="t" lIns="0" rIns="0" tIns="0" bIns="0">
+            <a:spAutoFit/>
+          </a:bodyPr>
+          <a:lstStyle/>
+          <a:p>
+            <a:pPr algn="l">
+              <a:lnSpc>
+                <a:spcPct val="110000"/>
+              </a:lnSpc>
             </a:pPr>
             <a:r>
-              <a:t>Secure, scalable, and accessible via web</a:t>
+              <a:rPr sz="1500" b="0">
+                <a:solidFill>
+                  <a:srgbClr val="243244"/>
+                </a:solidFill>
+                <a:latin typeface="Calibri"/>
+              </a:rPr>
+              <a:t>Role-based access, row-level security and full audit trails.</a:t>
             </a:r>
           </a:p>
         </p:txBody>
@@ -3438,40 +4845,90 @@
       <p:grpSpPr/>
       <p:sp>
         <p:nvSpPr>
-          <p:cNvPr id="2" name="Title 1"/>
-          <p:cNvSpPr>
-            <a:spLocks noGrp="1"/>
-          </p:cNvSpPr>
-          <p:nvPr>
-            <p:ph type="title"/>
-          </p:nvPr>
-        </p:nvSpPr>
-        <p:spPr/>
-        <p:txBody>
-          <a:bodyPr/>
-          <a:lstStyle/>
-          <a:p>
-            <a:r>
-              <a:t>Admin Portal Features</a:t>
-            </a:r>
-          </a:p>
-        </p:txBody>
-      </p:sp>
-      <p:sp>
-        <p:nvSpPr>
-          <p:cNvPr id="3" name="Content Placeholder 2"/>
-          <p:cNvSpPr>
-            <a:spLocks noGrp="1"/>
-          </p:cNvSpPr>
-          <p:nvPr>
-            <p:ph idx="1"/>
-          </p:nvPr>
-        </p:nvSpPr>
-        <p:spPr/>
-        <p:txBody>
-          <a:bodyPr/>
-          <a:lstStyle/>
-          <a:p/>
+          <p:cNvPr id="2" name="Rectangle 1"/>
+          <p:cNvSpPr/>
+          <p:nvPr/>
+        </p:nvSpPr>
+        <p:spPr>
+          <a:xfrm>
+            <a:off x="0" y="0"/>
+            <a:ext cx="12191695" cy="1234440"/>
+          </a:xfrm>
+          <a:prstGeom prst="rect">
+            <a:avLst/>
+          </a:prstGeom>
+          <a:solidFill>
+            <a:srgbClr val="0F2A4C"/>
+          </a:solidFill>
+          <a:ln>
+            <a:noFill/>
+          </a:ln>
+          <a:effectLst/>
+        </p:spPr>
+        <p:style>
+          <a:lnRef idx="1">
+            <a:schemeClr val="accent1"/>
+          </a:lnRef>
+          <a:fillRef idx="3">
+            <a:schemeClr val="accent1"/>
+          </a:fillRef>
+          <a:effectRef idx="2">
+            <a:schemeClr val="accent1"/>
+          </a:effectRef>
+          <a:fontRef idx="minor">
+            <a:schemeClr val="lt1"/>
+          </a:fontRef>
+        </p:style>
+        <p:txBody>
+          <a:bodyPr rtlCol="0" anchor="ctr"/>
+          <a:lstStyle/>
+          <a:p>
+            <a:pPr algn="ctr"/>
+          </a:p>
+        </p:txBody>
+      </p:sp>
+      <p:sp>
+        <p:nvSpPr>
+          <p:cNvPr id="3" name="Rectangle 2"/>
+          <p:cNvSpPr/>
+          <p:nvPr/>
+        </p:nvSpPr>
+        <p:spPr>
+          <a:xfrm>
+            <a:off x="0" y="1234440"/>
+            <a:ext cx="12191695" cy="50800"/>
+          </a:xfrm>
+          <a:prstGeom prst="rect">
+            <a:avLst/>
+          </a:prstGeom>
+          <a:solidFill>
+            <a:srgbClr val="F2B418"/>
+          </a:solidFill>
+          <a:ln>
+            <a:noFill/>
+          </a:ln>
+          <a:effectLst/>
+        </p:spPr>
+        <p:style>
+          <a:lnRef idx="1">
+            <a:schemeClr val="accent1"/>
+          </a:lnRef>
+          <a:fillRef idx="3">
+            <a:schemeClr val="accent1"/>
+          </a:fillRef>
+          <a:effectRef idx="2">
+            <a:schemeClr val="accent1"/>
+          </a:effectRef>
+          <a:fontRef idx="minor">
+            <a:schemeClr val="lt1"/>
+          </a:fontRef>
+        </p:style>
+        <p:txBody>
+          <a:bodyPr rtlCol="0" anchor="ctr"/>
+          <a:lstStyle/>
+          <a:p>
+            <a:pPr algn="ctr"/>
+          </a:p>
         </p:txBody>
       </p:sp>
       <p:sp>
@@ -3482,8 +4939,8 @@
         </p:nvSpPr>
         <p:spPr>
           <a:xfrm>
-            <a:off x="914400" y="1371600"/>
-            <a:ext cx="10058400" cy="4572000"/>
+            <a:off x="640080" y="0"/>
+            <a:ext cx="8686800" cy="1234440"/>
           </a:xfrm>
           <a:prstGeom prst="rect">
             <a:avLst/>
@@ -3491,52 +4948,20 @@
           <a:noFill/>
         </p:spPr>
         <p:txBody>
-          <a:bodyPr wrap="square">
+          <a:bodyPr wrap="square" anchor="ctr" lIns="0" rIns="0" tIns="0" bIns="0">
             <a:spAutoFit/>
           </a:bodyPr>
           <a:lstStyle/>
           <a:p>
-            <a:pPr>
-              <a:spcAft>
-                <a:spcPts val="1200"/>
-              </a:spcAft>
-              <a:defRPr sz="1800"/>
-            </a:pPr>
-            <a:r>
-              <a:t>Real-time Dashboard &amp; Analytics</a:t>
-            </a:r>
-          </a:p>
-          <a:p>
-            <a:pPr>
-              <a:spcAft>
-                <a:spcPts val="1200"/>
-              </a:spcAft>
-              <a:defRPr sz="1800"/>
-            </a:pPr>
-            <a:r>
-              <a:t>Resident &amp; Household Management</a:t>
-            </a:r>
-          </a:p>
-          <a:p>
-            <a:pPr>
-              <a:spcAft>
-                <a:spcPts val="1200"/>
-              </a:spcAft>
-              <a:defRPr sz="1800"/>
-            </a:pPr>
-            <a:r>
-              <a:t>Document Request Workflow (Approve → Generate → Release)</a:t>
-            </a:r>
-          </a:p>
-          <a:p>
-            <a:pPr>
-              <a:spcAft>
-                <a:spcPts val="1200"/>
-              </a:spcAft>
-              <a:defRPr sz="1800"/>
-            </a:pPr>
-            <a:r>
-              <a:t>Complaints &amp; Incidents Tracking</a:t>
+            <a:pPr algn="l"/>
+            <a:r>
+              <a:rPr sz="3000" b="1">
+                <a:solidFill>
+                  <a:srgbClr val="FFFFFF"/>
+                </a:solidFill>
+                <a:latin typeface="Calibri"/>
+              </a:rPr>
+              <a:t>Admin Portal Features</a:t>
             </a:r>
           </a:p>
         </p:txBody>
@@ -3549,8 +4974,8 @@
         </p:nvSpPr>
         <p:spPr>
           <a:xfrm>
-            <a:off x="6400800" y="1371600"/>
-            <a:ext cx="4572000" cy="4572000"/>
+            <a:off x="8778240" y="0"/>
+            <a:ext cx="2834640" cy="1234440"/>
           </a:xfrm>
           <a:prstGeom prst="rect">
             <a:avLst/>
@@ -3558,52 +4983,1395 @@
           <a:noFill/>
         </p:spPr>
         <p:txBody>
-          <a:bodyPr wrap="square">
+          <a:bodyPr wrap="square" anchor="ctr" lIns="0" rIns="0" tIns="0" bIns="0">
             <a:spAutoFit/>
           </a:bodyPr>
           <a:lstStyle/>
           <a:p>
-            <a:pPr>
-              <a:spcAft>
-                <a:spcPts val="1200"/>
-              </a:spcAft>
-              <a:defRPr sz="1800"/>
+            <a:pPr algn="r"/>
+            <a:r>
+              <a:rPr sz="1200" b="0">
+                <a:solidFill>
+                  <a:srgbClr val="C9D6E8"/>
+                </a:solidFill>
+                <a:latin typeface="Calibri"/>
+              </a:rPr>
+              <a:t>Governance tools for Barangay officials</a:t>
+            </a:r>
+          </a:p>
+        </p:txBody>
+      </p:sp>
+      <p:sp>
+        <p:nvSpPr>
+          <p:cNvPr id="6" name="Rectangle 5"/>
+          <p:cNvSpPr/>
+          <p:nvPr/>
+        </p:nvSpPr>
+        <p:spPr>
+          <a:xfrm>
+            <a:off x="11231575" y="0"/>
+            <a:ext cx="960120" cy="384048"/>
+          </a:xfrm>
+          <a:prstGeom prst="rect">
+            <a:avLst/>
+          </a:prstGeom>
+          <a:solidFill>
+            <a:srgbClr val="F2B418"/>
+          </a:solidFill>
+          <a:ln>
+            <a:noFill/>
+          </a:ln>
+          <a:effectLst/>
+        </p:spPr>
+        <p:style>
+          <a:lnRef idx="1">
+            <a:schemeClr val="accent1"/>
+          </a:lnRef>
+          <a:fillRef idx="3">
+            <a:schemeClr val="accent1"/>
+          </a:fillRef>
+          <a:effectRef idx="2">
+            <a:schemeClr val="accent1"/>
+          </a:effectRef>
+          <a:fontRef idx="minor">
+            <a:schemeClr val="lt1"/>
+          </a:fontRef>
+        </p:style>
+        <p:txBody>
+          <a:bodyPr rtlCol="0" anchor="ctr"/>
+          <a:lstStyle/>
+          <a:p>
+            <a:pPr algn="ctr"/>
+          </a:p>
+        </p:txBody>
+      </p:sp>
+      <p:sp>
+        <p:nvSpPr>
+          <p:cNvPr id="7" name="TextBox 6"/>
+          <p:cNvSpPr txBox="1"/>
+          <p:nvPr/>
+        </p:nvSpPr>
+        <p:spPr>
+          <a:xfrm>
+            <a:off x="11231575" y="0"/>
+            <a:ext cx="960120" cy="384048"/>
+          </a:xfrm>
+          <a:prstGeom prst="rect">
+            <a:avLst/>
+          </a:prstGeom>
+          <a:noFill/>
+        </p:spPr>
+        <p:txBody>
+          <a:bodyPr wrap="square" anchor="ctr" lIns="0" rIns="0" tIns="0" bIns="0">
+            <a:spAutoFit/>
+          </a:bodyPr>
+          <a:lstStyle/>
+          <a:p>
+            <a:pPr algn="ctr"/>
+            <a:r>
+              <a:rPr sz="1400" b="1">
+                <a:solidFill>
+                  <a:srgbClr val="0F2A4C"/>
+                </a:solidFill>
+                <a:latin typeface="Calibri"/>
+              </a:rPr>
+              <a:t>BC</a:t>
+            </a:r>
+          </a:p>
+        </p:txBody>
+      </p:sp>
+      <p:sp>
+        <p:nvSpPr>
+          <p:cNvPr id="8" name="Rounded Rectangle 7"/>
+          <p:cNvSpPr/>
+          <p:nvPr/>
+        </p:nvSpPr>
+        <p:spPr>
+          <a:xfrm>
+            <a:off x="594360" y="1554480"/>
+            <a:ext cx="5303520" cy="914400"/>
+          </a:xfrm>
+          <a:prstGeom prst="roundRect">
+            <a:avLst/>
+          </a:prstGeom>
+          <a:solidFill>
+            <a:srgbClr val="FFFFFF"/>
+          </a:solidFill>
+          <a:ln>
+            <a:noFill/>
+          </a:ln>
+          <a:effectLst/>
+        </p:spPr>
+        <p:style>
+          <a:lnRef idx="1">
+            <a:schemeClr val="accent1"/>
+          </a:lnRef>
+          <a:fillRef idx="3">
+            <a:schemeClr val="accent1"/>
+          </a:fillRef>
+          <a:effectRef idx="2">
+            <a:schemeClr val="accent1"/>
+          </a:effectRef>
+          <a:fontRef idx="minor">
+            <a:schemeClr val="lt1"/>
+          </a:fontRef>
+        </p:style>
+        <p:txBody>
+          <a:bodyPr rtlCol="0" anchor="ctr"/>
+          <a:lstStyle/>
+          <a:p>
+            <a:pPr algn="ctr"/>
+          </a:p>
+        </p:txBody>
+      </p:sp>
+      <p:sp>
+        <p:nvSpPr>
+          <p:cNvPr id="9" name="Rectangle 8"/>
+          <p:cNvSpPr/>
+          <p:nvPr/>
+        </p:nvSpPr>
+        <p:spPr>
+          <a:xfrm>
+            <a:off x="594360" y="1554480"/>
+            <a:ext cx="82296" cy="914400"/>
+          </a:xfrm>
+          <a:prstGeom prst="rect">
+            <a:avLst/>
+          </a:prstGeom>
+          <a:solidFill>
+            <a:srgbClr val="F2B418"/>
+          </a:solidFill>
+          <a:ln>
+            <a:noFill/>
+          </a:ln>
+          <a:effectLst/>
+        </p:spPr>
+        <p:style>
+          <a:lnRef idx="1">
+            <a:schemeClr val="accent1"/>
+          </a:lnRef>
+          <a:fillRef idx="3">
+            <a:schemeClr val="accent1"/>
+          </a:fillRef>
+          <a:effectRef idx="2">
+            <a:schemeClr val="accent1"/>
+          </a:effectRef>
+          <a:fontRef idx="minor">
+            <a:schemeClr val="lt1"/>
+          </a:fontRef>
+        </p:style>
+        <p:txBody>
+          <a:bodyPr rtlCol="0" anchor="ctr"/>
+          <a:lstStyle/>
+          <a:p>
+            <a:pPr algn="ctr"/>
+          </a:p>
+        </p:txBody>
+      </p:sp>
+      <p:sp>
+        <p:nvSpPr>
+          <p:cNvPr id="10" name="TextBox 9"/>
+          <p:cNvSpPr txBox="1"/>
+          <p:nvPr/>
+        </p:nvSpPr>
+        <p:spPr>
+          <a:xfrm>
+            <a:off x="868680" y="1664208"/>
+            <a:ext cx="4846320" cy="411480"/>
+          </a:xfrm>
+          <a:prstGeom prst="rect">
+            <a:avLst/>
+          </a:prstGeom>
+          <a:noFill/>
+        </p:spPr>
+        <p:txBody>
+          <a:bodyPr wrap="square" anchor="ctr" lIns="0" rIns="0" tIns="0" bIns="0">
+            <a:spAutoFit/>
+          </a:bodyPr>
+          <a:lstStyle/>
+          <a:p>
+            <a:pPr algn="l"/>
+            <a:r>
+              <a:rPr sz="1500" b="1">
+                <a:solidFill>
+                  <a:srgbClr val="0F2A4C"/>
+                </a:solidFill>
+                <a:latin typeface="Calibri"/>
+              </a:rPr>
+              <a:t>Dashboard &amp; Analytics</a:t>
+            </a:r>
+          </a:p>
+        </p:txBody>
+      </p:sp>
+      <p:sp>
+        <p:nvSpPr>
+          <p:cNvPr id="11" name="TextBox 10"/>
+          <p:cNvSpPr txBox="1"/>
+          <p:nvPr/>
+        </p:nvSpPr>
+        <p:spPr>
+          <a:xfrm>
+            <a:off x="868680" y="2029968"/>
+            <a:ext cx="4846320" cy="365760"/>
+          </a:xfrm>
+          <a:prstGeom prst="rect">
+            <a:avLst/>
+          </a:prstGeom>
+          <a:noFill/>
+        </p:spPr>
+        <p:txBody>
+          <a:bodyPr wrap="square" anchor="t" lIns="0" rIns="0" tIns="0" bIns="0">
+            <a:spAutoFit/>
+          </a:bodyPr>
+          <a:lstStyle/>
+          <a:p>
+            <a:pPr algn="l">
+              <a:lnSpc>
+                <a:spcPct val="110000"/>
+              </a:lnSpc>
             </a:pPr>
             <a:r>
-              <a:t>Appointments &amp; Payments Monitoring</a:t>
-            </a:r>
-          </a:p>
-          <a:p>
-            <a:pPr>
-              <a:spcAft>
-                <a:spcPts val="1200"/>
-              </a:spcAft>
-              <a:defRPr sz="1800"/>
+              <a:rPr sz="1500" b="0">
+                <a:solidFill>
+                  <a:srgbClr val="243244"/>
+                </a:solidFill>
+                <a:latin typeface="Calibri"/>
+              </a:rPr>
+              <a:t>Population stats: age group, sex, purok. Recent requests at a glance.</a:t>
+            </a:r>
+          </a:p>
+        </p:txBody>
+      </p:sp>
+      <p:sp>
+        <p:nvSpPr>
+          <p:cNvPr id="12" name="Rounded Rectangle 11"/>
+          <p:cNvSpPr/>
+          <p:nvPr/>
+        </p:nvSpPr>
+        <p:spPr>
+          <a:xfrm>
+            <a:off x="6309360" y="1554480"/>
+            <a:ext cx="5303520" cy="914400"/>
+          </a:xfrm>
+          <a:prstGeom prst="roundRect">
+            <a:avLst/>
+          </a:prstGeom>
+          <a:solidFill>
+            <a:srgbClr val="FFFFFF"/>
+          </a:solidFill>
+          <a:ln>
+            <a:noFill/>
+          </a:ln>
+          <a:effectLst/>
+        </p:spPr>
+        <p:style>
+          <a:lnRef idx="1">
+            <a:schemeClr val="accent1"/>
+          </a:lnRef>
+          <a:fillRef idx="3">
+            <a:schemeClr val="accent1"/>
+          </a:fillRef>
+          <a:effectRef idx="2">
+            <a:schemeClr val="accent1"/>
+          </a:effectRef>
+          <a:fontRef idx="minor">
+            <a:schemeClr val="lt1"/>
+          </a:fontRef>
+        </p:style>
+        <p:txBody>
+          <a:bodyPr rtlCol="0" anchor="ctr"/>
+          <a:lstStyle/>
+          <a:p>
+            <a:pPr algn="ctr"/>
+          </a:p>
+        </p:txBody>
+      </p:sp>
+      <p:sp>
+        <p:nvSpPr>
+          <p:cNvPr id="13" name="Rectangle 12"/>
+          <p:cNvSpPr/>
+          <p:nvPr/>
+        </p:nvSpPr>
+        <p:spPr>
+          <a:xfrm>
+            <a:off x="6309360" y="1554480"/>
+            <a:ext cx="82296" cy="914400"/>
+          </a:xfrm>
+          <a:prstGeom prst="rect">
+            <a:avLst/>
+          </a:prstGeom>
+          <a:solidFill>
+            <a:srgbClr val="F2B418"/>
+          </a:solidFill>
+          <a:ln>
+            <a:noFill/>
+          </a:ln>
+          <a:effectLst/>
+        </p:spPr>
+        <p:style>
+          <a:lnRef idx="1">
+            <a:schemeClr val="accent1"/>
+          </a:lnRef>
+          <a:fillRef idx="3">
+            <a:schemeClr val="accent1"/>
+          </a:fillRef>
+          <a:effectRef idx="2">
+            <a:schemeClr val="accent1"/>
+          </a:effectRef>
+          <a:fontRef idx="minor">
+            <a:schemeClr val="lt1"/>
+          </a:fontRef>
+        </p:style>
+        <p:txBody>
+          <a:bodyPr rtlCol="0" anchor="ctr"/>
+          <a:lstStyle/>
+          <a:p>
+            <a:pPr algn="ctr"/>
+          </a:p>
+        </p:txBody>
+      </p:sp>
+      <p:sp>
+        <p:nvSpPr>
+          <p:cNvPr id="14" name="TextBox 13"/>
+          <p:cNvSpPr txBox="1"/>
+          <p:nvPr/>
+        </p:nvSpPr>
+        <p:spPr>
+          <a:xfrm>
+            <a:off x="6583680" y="1664208"/>
+            <a:ext cx="4846320" cy="411480"/>
+          </a:xfrm>
+          <a:prstGeom prst="rect">
+            <a:avLst/>
+          </a:prstGeom>
+          <a:noFill/>
+        </p:spPr>
+        <p:txBody>
+          <a:bodyPr wrap="square" anchor="ctr" lIns="0" rIns="0" tIns="0" bIns="0">
+            <a:spAutoFit/>
+          </a:bodyPr>
+          <a:lstStyle/>
+          <a:p>
+            <a:pPr algn="l"/>
+            <a:r>
+              <a:rPr sz="1500" b="1">
+                <a:solidFill>
+                  <a:srgbClr val="0F2A4C"/>
+                </a:solidFill>
+                <a:latin typeface="Calibri"/>
+              </a:rPr>
+              <a:t>Residents &amp; Households</a:t>
+            </a:r>
+          </a:p>
+        </p:txBody>
+      </p:sp>
+      <p:sp>
+        <p:nvSpPr>
+          <p:cNvPr id="15" name="TextBox 14"/>
+          <p:cNvSpPr txBox="1"/>
+          <p:nvPr/>
+        </p:nvSpPr>
+        <p:spPr>
+          <a:xfrm>
+            <a:off x="6583680" y="2029968"/>
+            <a:ext cx="4846320" cy="365760"/>
+          </a:xfrm>
+          <a:prstGeom prst="rect">
+            <a:avLst/>
+          </a:prstGeom>
+          <a:noFill/>
+        </p:spPr>
+        <p:txBody>
+          <a:bodyPr wrap="square" anchor="t" lIns="0" rIns="0" tIns="0" bIns="0">
+            <a:spAutoFit/>
+          </a:bodyPr>
+          <a:lstStyle/>
+          <a:p>
+            <a:pPr algn="l">
+              <a:lnSpc>
+                <a:spcPct val="110000"/>
+              </a:lnSpc>
             </a:pPr>
             <a:r>
-              <a:t>Announcements &amp; Notifications</a:t>
-            </a:r>
-          </a:p>
-          <a:p>
-            <a:pPr>
-              <a:spcAft>
-                <a:spcPts val="1200"/>
-              </a:spcAft>
-              <a:defRPr sz="1800"/>
+              <a:rPr sz="1500" b="0">
+                <a:solidFill>
+                  <a:srgbClr val="243244"/>
+                </a:solidFill>
+                <a:latin typeface="Calibri"/>
+              </a:rPr>
+              <a:t>Full CRUD, search, filter, deactivate. Scan &amp; attach documents and photos.</a:t>
+            </a:r>
+          </a:p>
+        </p:txBody>
+      </p:sp>
+      <p:sp>
+        <p:nvSpPr>
+          <p:cNvPr id="16" name="Rounded Rectangle 15"/>
+          <p:cNvSpPr/>
+          <p:nvPr/>
+        </p:nvSpPr>
+        <p:spPr>
+          <a:xfrm>
+            <a:off x="594360" y="3063240"/>
+            <a:ext cx="5303520" cy="914400"/>
+          </a:xfrm>
+          <a:prstGeom prst="roundRect">
+            <a:avLst/>
+          </a:prstGeom>
+          <a:solidFill>
+            <a:srgbClr val="FFFFFF"/>
+          </a:solidFill>
+          <a:ln>
+            <a:noFill/>
+          </a:ln>
+          <a:effectLst/>
+        </p:spPr>
+        <p:style>
+          <a:lnRef idx="1">
+            <a:schemeClr val="accent1"/>
+          </a:lnRef>
+          <a:fillRef idx="3">
+            <a:schemeClr val="accent1"/>
+          </a:fillRef>
+          <a:effectRef idx="2">
+            <a:schemeClr val="accent1"/>
+          </a:effectRef>
+          <a:fontRef idx="minor">
+            <a:schemeClr val="lt1"/>
+          </a:fontRef>
+        </p:style>
+        <p:txBody>
+          <a:bodyPr rtlCol="0" anchor="ctr"/>
+          <a:lstStyle/>
+          <a:p>
+            <a:pPr algn="ctr"/>
+          </a:p>
+        </p:txBody>
+      </p:sp>
+      <p:sp>
+        <p:nvSpPr>
+          <p:cNvPr id="17" name="Rectangle 16"/>
+          <p:cNvSpPr/>
+          <p:nvPr/>
+        </p:nvSpPr>
+        <p:spPr>
+          <a:xfrm>
+            <a:off x="594360" y="3063240"/>
+            <a:ext cx="82296" cy="914400"/>
+          </a:xfrm>
+          <a:prstGeom prst="rect">
+            <a:avLst/>
+          </a:prstGeom>
+          <a:solidFill>
+            <a:srgbClr val="F2B418"/>
+          </a:solidFill>
+          <a:ln>
+            <a:noFill/>
+          </a:ln>
+          <a:effectLst/>
+        </p:spPr>
+        <p:style>
+          <a:lnRef idx="1">
+            <a:schemeClr val="accent1"/>
+          </a:lnRef>
+          <a:fillRef idx="3">
+            <a:schemeClr val="accent1"/>
+          </a:fillRef>
+          <a:effectRef idx="2">
+            <a:schemeClr val="accent1"/>
+          </a:effectRef>
+          <a:fontRef idx="minor">
+            <a:schemeClr val="lt1"/>
+          </a:fontRef>
+        </p:style>
+        <p:txBody>
+          <a:bodyPr rtlCol="0" anchor="ctr"/>
+          <a:lstStyle/>
+          <a:p>
+            <a:pPr algn="ctr"/>
+          </a:p>
+        </p:txBody>
+      </p:sp>
+      <p:sp>
+        <p:nvSpPr>
+          <p:cNvPr id="18" name="TextBox 17"/>
+          <p:cNvSpPr txBox="1"/>
+          <p:nvPr/>
+        </p:nvSpPr>
+        <p:spPr>
+          <a:xfrm>
+            <a:off x="868680" y="3172968"/>
+            <a:ext cx="4846320" cy="411480"/>
+          </a:xfrm>
+          <a:prstGeom prst="rect">
+            <a:avLst/>
+          </a:prstGeom>
+          <a:noFill/>
+        </p:spPr>
+        <p:txBody>
+          <a:bodyPr wrap="square" anchor="ctr" lIns="0" rIns="0" tIns="0" bIns="0">
+            <a:spAutoFit/>
+          </a:bodyPr>
+          <a:lstStyle/>
+          <a:p>
+            <a:pPr algn="l"/>
+            <a:r>
+              <a:rPr sz="1500" b="1">
+                <a:solidFill>
+                  <a:srgbClr val="0F2A4C"/>
+                </a:solidFill>
+                <a:latin typeface="Calibri"/>
+              </a:rPr>
+              <a:t>Document Workflow</a:t>
+            </a:r>
+          </a:p>
+        </p:txBody>
+      </p:sp>
+      <p:sp>
+        <p:nvSpPr>
+          <p:cNvPr id="19" name="TextBox 18"/>
+          <p:cNvSpPr txBox="1"/>
+          <p:nvPr/>
+        </p:nvSpPr>
+        <p:spPr>
+          <a:xfrm>
+            <a:off x="868680" y="3538728"/>
+            <a:ext cx="4846320" cy="365760"/>
+          </a:xfrm>
+          <a:prstGeom prst="rect">
+            <a:avLst/>
+          </a:prstGeom>
+          <a:noFill/>
+        </p:spPr>
+        <p:txBody>
+          <a:bodyPr wrap="square" anchor="t" lIns="0" rIns="0" tIns="0" bIns="0">
+            <a:spAutoFit/>
+          </a:bodyPr>
+          <a:lstStyle/>
+          <a:p>
+            <a:pPr algn="l">
+              <a:lnSpc>
+                <a:spcPct val="110000"/>
+              </a:lnSpc>
             </a:pPr>
             <a:r>
-              <a:t>Audit Logs &amp; Official Records</a:t>
-            </a:r>
-          </a:p>
-          <a:p>
-            <a:pPr>
-              <a:spcAft>
-                <a:spcPts val="1200"/>
-              </a:spcAft>
-              <a:defRPr sz="1800"/>
+              <a:rPr sz="1500" b="0">
+                <a:solidFill>
+                  <a:srgbClr val="243244"/>
+                </a:solidFill>
+                <a:latin typeface="Calibri"/>
+              </a:rPr>
+              <a:t>Approve → Certificate Generation → Release with print-ready PDFs.</a:t>
+            </a:r>
+          </a:p>
+        </p:txBody>
+      </p:sp>
+      <p:sp>
+        <p:nvSpPr>
+          <p:cNvPr id="20" name="Rounded Rectangle 19"/>
+          <p:cNvSpPr/>
+          <p:nvPr/>
+        </p:nvSpPr>
+        <p:spPr>
+          <a:xfrm>
+            <a:off x="6309360" y="3063240"/>
+            <a:ext cx="5303520" cy="914400"/>
+          </a:xfrm>
+          <a:prstGeom prst="roundRect">
+            <a:avLst/>
+          </a:prstGeom>
+          <a:solidFill>
+            <a:srgbClr val="FFFFFF"/>
+          </a:solidFill>
+          <a:ln>
+            <a:noFill/>
+          </a:ln>
+          <a:effectLst/>
+        </p:spPr>
+        <p:style>
+          <a:lnRef idx="1">
+            <a:schemeClr val="accent1"/>
+          </a:lnRef>
+          <a:fillRef idx="3">
+            <a:schemeClr val="accent1"/>
+          </a:fillRef>
+          <a:effectRef idx="2">
+            <a:schemeClr val="accent1"/>
+          </a:effectRef>
+          <a:fontRef idx="minor">
+            <a:schemeClr val="lt1"/>
+          </a:fontRef>
+        </p:style>
+        <p:txBody>
+          <a:bodyPr rtlCol="0" anchor="ctr"/>
+          <a:lstStyle/>
+          <a:p>
+            <a:pPr algn="ctr"/>
+          </a:p>
+        </p:txBody>
+      </p:sp>
+      <p:sp>
+        <p:nvSpPr>
+          <p:cNvPr id="21" name="Rectangle 20"/>
+          <p:cNvSpPr/>
+          <p:nvPr/>
+        </p:nvSpPr>
+        <p:spPr>
+          <a:xfrm>
+            <a:off x="6309360" y="3063240"/>
+            <a:ext cx="82296" cy="914400"/>
+          </a:xfrm>
+          <a:prstGeom prst="rect">
+            <a:avLst/>
+          </a:prstGeom>
+          <a:solidFill>
+            <a:srgbClr val="F2B418"/>
+          </a:solidFill>
+          <a:ln>
+            <a:noFill/>
+          </a:ln>
+          <a:effectLst/>
+        </p:spPr>
+        <p:style>
+          <a:lnRef idx="1">
+            <a:schemeClr val="accent1"/>
+          </a:lnRef>
+          <a:fillRef idx="3">
+            <a:schemeClr val="accent1"/>
+          </a:fillRef>
+          <a:effectRef idx="2">
+            <a:schemeClr val="accent1"/>
+          </a:effectRef>
+          <a:fontRef idx="minor">
+            <a:schemeClr val="lt1"/>
+          </a:fontRef>
+        </p:style>
+        <p:txBody>
+          <a:bodyPr rtlCol="0" anchor="ctr"/>
+          <a:lstStyle/>
+          <a:p>
+            <a:pPr algn="ctr"/>
+          </a:p>
+        </p:txBody>
+      </p:sp>
+      <p:sp>
+        <p:nvSpPr>
+          <p:cNvPr id="22" name="TextBox 21"/>
+          <p:cNvSpPr txBox="1"/>
+          <p:nvPr/>
+        </p:nvSpPr>
+        <p:spPr>
+          <a:xfrm>
+            <a:off x="6583680" y="3172968"/>
+            <a:ext cx="4846320" cy="411480"/>
+          </a:xfrm>
+          <a:prstGeom prst="rect">
+            <a:avLst/>
+          </a:prstGeom>
+          <a:noFill/>
+        </p:spPr>
+        <p:txBody>
+          <a:bodyPr wrap="square" anchor="ctr" lIns="0" rIns="0" tIns="0" bIns="0">
+            <a:spAutoFit/>
+          </a:bodyPr>
+          <a:lstStyle/>
+          <a:p>
+            <a:pPr algn="l"/>
+            <a:r>
+              <a:rPr sz="1500" b="1">
+                <a:solidFill>
+                  <a:srgbClr val="0F2A4C"/>
+                </a:solidFill>
+                <a:latin typeface="Calibri"/>
+              </a:rPr>
+              <a:t>Complaints &amp; Incidents</a:t>
+            </a:r>
+          </a:p>
+        </p:txBody>
+      </p:sp>
+      <p:sp>
+        <p:nvSpPr>
+          <p:cNvPr id="23" name="TextBox 22"/>
+          <p:cNvSpPr txBox="1"/>
+          <p:nvPr/>
+        </p:nvSpPr>
+        <p:spPr>
+          <a:xfrm>
+            <a:off x="6583680" y="3538728"/>
+            <a:ext cx="4846320" cy="365760"/>
+          </a:xfrm>
+          <a:prstGeom prst="rect">
+            <a:avLst/>
+          </a:prstGeom>
+          <a:noFill/>
+        </p:spPr>
+        <p:txBody>
+          <a:bodyPr wrap="square" anchor="t" lIns="0" rIns="0" tIns="0" bIns="0">
+            <a:spAutoFit/>
+          </a:bodyPr>
+          <a:lstStyle/>
+          <a:p>
+            <a:pPr algn="l">
+              <a:lnSpc>
+                <a:spcPct val="110000"/>
+              </a:lnSpc>
             </a:pPr>
             <a:r>
-              <a:t>Excel &amp; PDF Export for all modules</a:t>
+              <a:rPr sz="1500" b="0">
+                <a:solidFill>
+                  <a:srgbClr val="243244"/>
+                </a:solidFill>
+                <a:latin typeface="Calibri"/>
+              </a:rPr>
+              <a:t>Status workflows with photo/scan evidence and resolution tracking.</a:t>
+            </a:r>
+          </a:p>
+        </p:txBody>
+      </p:sp>
+      <p:sp>
+        <p:nvSpPr>
+          <p:cNvPr id="24" name="Rounded Rectangle 23"/>
+          <p:cNvSpPr/>
+          <p:nvPr/>
+        </p:nvSpPr>
+        <p:spPr>
+          <a:xfrm>
+            <a:off x="594360" y="4572000"/>
+            <a:ext cx="5303520" cy="914400"/>
+          </a:xfrm>
+          <a:prstGeom prst="roundRect">
+            <a:avLst/>
+          </a:prstGeom>
+          <a:solidFill>
+            <a:srgbClr val="FFFFFF"/>
+          </a:solidFill>
+          <a:ln>
+            <a:noFill/>
+          </a:ln>
+          <a:effectLst/>
+        </p:spPr>
+        <p:style>
+          <a:lnRef idx="1">
+            <a:schemeClr val="accent1"/>
+          </a:lnRef>
+          <a:fillRef idx="3">
+            <a:schemeClr val="accent1"/>
+          </a:fillRef>
+          <a:effectRef idx="2">
+            <a:schemeClr val="accent1"/>
+          </a:effectRef>
+          <a:fontRef idx="minor">
+            <a:schemeClr val="lt1"/>
+          </a:fontRef>
+        </p:style>
+        <p:txBody>
+          <a:bodyPr rtlCol="0" anchor="ctr"/>
+          <a:lstStyle/>
+          <a:p>
+            <a:pPr algn="ctr"/>
+          </a:p>
+        </p:txBody>
+      </p:sp>
+      <p:sp>
+        <p:nvSpPr>
+          <p:cNvPr id="25" name="Rectangle 24"/>
+          <p:cNvSpPr/>
+          <p:nvPr/>
+        </p:nvSpPr>
+        <p:spPr>
+          <a:xfrm>
+            <a:off x="594360" y="4572000"/>
+            <a:ext cx="82296" cy="914400"/>
+          </a:xfrm>
+          <a:prstGeom prst="rect">
+            <a:avLst/>
+          </a:prstGeom>
+          <a:solidFill>
+            <a:srgbClr val="F2B418"/>
+          </a:solidFill>
+          <a:ln>
+            <a:noFill/>
+          </a:ln>
+          <a:effectLst/>
+        </p:spPr>
+        <p:style>
+          <a:lnRef idx="1">
+            <a:schemeClr val="accent1"/>
+          </a:lnRef>
+          <a:fillRef idx="3">
+            <a:schemeClr val="accent1"/>
+          </a:fillRef>
+          <a:effectRef idx="2">
+            <a:schemeClr val="accent1"/>
+          </a:effectRef>
+          <a:fontRef idx="minor">
+            <a:schemeClr val="lt1"/>
+          </a:fontRef>
+        </p:style>
+        <p:txBody>
+          <a:bodyPr rtlCol="0" anchor="ctr"/>
+          <a:lstStyle/>
+          <a:p>
+            <a:pPr algn="ctr"/>
+          </a:p>
+        </p:txBody>
+      </p:sp>
+      <p:sp>
+        <p:nvSpPr>
+          <p:cNvPr id="26" name="TextBox 25"/>
+          <p:cNvSpPr txBox="1"/>
+          <p:nvPr/>
+        </p:nvSpPr>
+        <p:spPr>
+          <a:xfrm>
+            <a:off x="868680" y="4681728"/>
+            <a:ext cx="4846320" cy="411480"/>
+          </a:xfrm>
+          <a:prstGeom prst="rect">
+            <a:avLst/>
+          </a:prstGeom>
+          <a:noFill/>
+        </p:spPr>
+        <p:txBody>
+          <a:bodyPr wrap="square" anchor="ctr" lIns="0" rIns="0" tIns="0" bIns="0">
+            <a:spAutoFit/>
+          </a:bodyPr>
+          <a:lstStyle/>
+          <a:p>
+            <a:pPr algn="l"/>
+            <a:r>
+              <a:rPr sz="1500" b="1">
+                <a:solidFill>
+                  <a:srgbClr val="0F2A4C"/>
+                </a:solidFill>
+                <a:latin typeface="Calibri"/>
+              </a:rPr>
+              <a:t>Appointments &amp; Payments</a:t>
+            </a:r>
+          </a:p>
+        </p:txBody>
+      </p:sp>
+      <p:sp>
+        <p:nvSpPr>
+          <p:cNvPr id="27" name="TextBox 26"/>
+          <p:cNvSpPr txBox="1"/>
+          <p:nvPr/>
+        </p:nvSpPr>
+        <p:spPr>
+          <a:xfrm>
+            <a:off x="868680" y="5047488"/>
+            <a:ext cx="4846320" cy="365760"/>
+          </a:xfrm>
+          <a:prstGeom prst="rect">
+            <a:avLst/>
+          </a:prstGeom>
+          <a:noFill/>
+        </p:spPr>
+        <p:txBody>
+          <a:bodyPr wrap="square" anchor="t" lIns="0" rIns="0" tIns="0" bIns="0">
+            <a:spAutoFit/>
+          </a:bodyPr>
+          <a:lstStyle/>
+          <a:p>
+            <a:pPr algn="l">
+              <a:lnSpc>
+                <a:spcPct val="110000"/>
+              </a:lnSpc>
+            </a:pPr>
+            <a:r>
+              <a:rPr sz="1500" b="0">
+                <a:solidFill>
+                  <a:srgbClr val="243244"/>
+                </a:solidFill>
+                <a:latin typeface="Calibri"/>
+              </a:rPr>
+              <a:t>Confirm, complete, cancel or no-show. Track barangay transactions.</a:t>
+            </a:r>
+          </a:p>
+        </p:txBody>
+      </p:sp>
+      <p:sp>
+        <p:nvSpPr>
+          <p:cNvPr id="28" name="Rounded Rectangle 27"/>
+          <p:cNvSpPr/>
+          <p:nvPr/>
+        </p:nvSpPr>
+        <p:spPr>
+          <a:xfrm>
+            <a:off x="6309360" y="4572000"/>
+            <a:ext cx="5303520" cy="914400"/>
+          </a:xfrm>
+          <a:prstGeom prst="roundRect">
+            <a:avLst/>
+          </a:prstGeom>
+          <a:solidFill>
+            <a:srgbClr val="FFFFFF"/>
+          </a:solidFill>
+          <a:ln>
+            <a:noFill/>
+          </a:ln>
+          <a:effectLst/>
+        </p:spPr>
+        <p:style>
+          <a:lnRef idx="1">
+            <a:schemeClr val="accent1"/>
+          </a:lnRef>
+          <a:fillRef idx="3">
+            <a:schemeClr val="accent1"/>
+          </a:fillRef>
+          <a:effectRef idx="2">
+            <a:schemeClr val="accent1"/>
+          </a:effectRef>
+          <a:fontRef idx="minor">
+            <a:schemeClr val="lt1"/>
+          </a:fontRef>
+        </p:style>
+        <p:txBody>
+          <a:bodyPr rtlCol="0" anchor="ctr"/>
+          <a:lstStyle/>
+          <a:p>
+            <a:pPr algn="ctr"/>
+          </a:p>
+        </p:txBody>
+      </p:sp>
+      <p:sp>
+        <p:nvSpPr>
+          <p:cNvPr id="29" name="Rectangle 28"/>
+          <p:cNvSpPr/>
+          <p:nvPr/>
+        </p:nvSpPr>
+        <p:spPr>
+          <a:xfrm>
+            <a:off x="6309360" y="4572000"/>
+            <a:ext cx="82296" cy="914400"/>
+          </a:xfrm>
+          <a:prstGeom prst="rect">
+            <a:avLst/>
+          </a:prstGeom>
+          <a:solidFill>
+            <a:srgbClr val="F2B418"/>
+          </a:solidFill>
+          <a:ln>
+            <a:noFill/>
+          </a:ln>
+          <a:effectLst/>
+        </p:spPr>
+        <p:style>
+          <a:lnRef idx="1">
+            <a:schemeClr val="accent1"/>
+          </a:lnRef>
+          <a:fillRef idx="3">
+            <a:schemeClr val="accent1"/>
+          </a:fillRef>
+          <a:effectRef idx="2">
+            <a:schemeClr val="accent1"/>
+          </a:effectRef>
+          <a:fontRef idx="minor">
+            <a:schemeClr val="lt1"/>
+          </a:fontRef>
+        </p:style>
+        <p:txBody>
+          <a:bodyPr rtlCol="0" anchor="ctr"/>
+          <a:lstStyle/>
+          <a:p>
+            <a:pPr algn="ctr"/>
+          </a:p>
+        </p:txBody>
+      </p:sp>
+      <p:sp>
+        <p:nvSpPr>
+          <p:cNvPr id="30" name="TextBox 29"/>
+          <p:cNvSpPr txBox="1"/>
+          <p:nvPr/>
+        </p:nvSpPr>
+        <p:spPr>
+          <a:xfrm>
+            <a:off x="6583680" y="4681728"/>
+            <a:ext cx="4846320" cy="411480"/>
+          </a:xfrm>
+          <a:prstGeom prst="rect">
+            <a:avLst/>
+          </a:prstGeom>
+          <a:noFill/>
+        </p:spPr>
+        <p:txBody>
+          <a:bodyPr wrap="square" anchor="ctr" lIns="0" rIns="0" tIns="0" bIns="0">
+            <a:spAutoFit/>
+          </a:bodyPr>
+          <a:lstStyle/>
+          <a:p>
+            <a:pPr algn="l"/>
+            <a:r>
+              <a:rPr sz="1500" b="1">
+                <a:solidFill>
+                  <a:srgbClr val="0F2A4C"/>
+                </a:solidFill>
+                <a:latin typeface="Calibri"/>
+              </a:rPr>
+              <a:t>Announcements &amp; Alerts</a:t>
+            </a:r>
+          </a:p>
+        </p:txBody>
+      </p:sp>
+      <p:sp>
+        <p:nvSpPr>
+          <p:cNvPr id="31" name="TextBox 30"/>
+          <p:cNvSpPr txBox="1"/>
+          <p:nvPr/>
+        </p:nvSpPr>
+        <p:spPr>
+          <a:xfrm>
+            <a:off x="6583680" y="5047488"/>
+            <a:ext cx="4846320" cy="365760"/>
+          </a:xfrm>
+          <a:prstGeom prst="rect">
+            <a:avLst/>
+          </a:prstGeom>
+          <a:noFill/>
+        </p:spPr>
+        <p:txBody>
+          <a:bodyPr wrap="square" anchor="t" lIns="0" rIns="0" tIns="0" bIns="0">
+            <a:spAutoFit/>
+          </a:bodyPr>
+          <a:lstStyle/>
+          <a:p>
+            <a:pPr algn="l">
+              <a:lnSpc>
+                <a:spcPct val="110000"/>
+              </a:lnSpc>
+            </a:pPr>
+            <a:r>
+              <a:rPr sz="1500" b="0">
+                <a:solidFill>
+                  <a:srgbClr val="243244"/>
+                </a:solidFill>
+                <a:latin typeface="Calibri"/>
+              </a:rPr>
+              <a:t>Publish announcements with attachments and notify residents.</a:t>
+            </a:r>
+          </a:p>
+        </p:txBody>
+      </p:sp>
+      <p:sp>
+        <p:nvSpPr>
+          <p:cNvPr id="32" name="Rounded Rectangle 31"/>
+          <p:cNvSpPr/>
+          <p:nvPr/>
+        </p:nvSpPr>
+        <p:spPr>
+          <a:xfrm>
+            <a:off x="594360" y="5623560"/>
+            <a:ext cx="5303520" cy="914400"/>
+          </a:xfrm>
+          <a:prstGeom prst="roundRect">
+            <a:avLst/>
+          </a:prstGeom>
+          <a:solidFill>
+            <a:srgbClr val="FFFFFF"/>
+          </a:solidFill>
+          <a:ln>
+            <a:noFill/>
+          </a:ln>
+          <a:effectLst/>
+        </p:spPr>
+        <p:style>
+          <a:lnRef idx="1">
+            <a:schemeClr val="accent1"/>
+          </a:lnRef>
+          <a:fillRef idx="3">
+            <a:schemeClr val="accent1"/>
+          </a:fillRef>
+          <a:effectRef idx="2">
+            <a:schemeClr val="accent1"/>
+          </a:effectRef>
+          <a:fontRef idx="minor">
+            <a:schemeClr val="lt1"/>
+          </a:fontRef>
+        </p:style>
+        <p:txBody>
+          <a:bodyPr rtlCol="0" anchor="ctr"/>
+          <a:lstStyle/>
+          <a:p>
+            <a:pPr algn="ctr"/>
+          </a:p>
+        </p:txBody>
+      </p:sp>
+      <p:sp>
+        <p:nvSpPr>
+          <p:cNvPr id="33" name="Rectangle 32"/>
+          <p:cNvSpPr/>
+          <p:nvPr/>
+        </p:nvSpPr>
+        <p:spPr>
+          <a:xfrm>
+            <a:off x="594360" y="5623560"/>
+            <a:ext cx="82296" cy="914400"/>
+          </a:xfrm>
+          <a:prstGeom prst="rect">
+            <a:avLst/>
+          </a:prstGeom>
+          <a:solidFill>
+            <a:srgbClr val="F2B418"/>
+          </a:solidFill>
+          <a:ln>
+            <a:noFill/>
+          </a:ln>
+          <a:effectLst/>
+        </p:spPr>
+        <p:style>
+          <a:lnRef idx="1">
+            <a:schemeClr val="accent1"/>
+          </a:lnRef>
+          <a:fillRef idx="3">
+            <a:schemeClr val="accent1"/>
+          </a:fillRef>
+          <a:effectRef idx="2">
+            <a:schemeClr val="accent1"/>
+          </a:effectRef>
+          <a:fontRef idx="minor">
+            <a:schemeClr val="lt1"/>
+          </a:fontRef>
+        </p:style>
+        <p:txBody>
+          <a:bodyPr rtlCol="0" anchor="ctr"/>
+          <a:lstStyle/>
+          <a:p>
+            <a:pPr algn="ctr"/>
+          </a:p>
+        </p:txBody>
+      </p:sp>
+      <p:sp>
+        <p:nvSpPr>
+          <p:cNvPr id="34" name="TextBox 33"/>
+          <p:cNvSpPr txBox="1"/>
+          <p:nvPr/>
+        </p:nvSpPr>
+        <p:spPr>
+          <a:xfrm>
+            <a:off x="868680" y="5733288"/>
+            <a:ext cx="4846320" cy="411480"/>
+          </a:xfrm>
+          <a:prstGeom prst="rect">
+            <a:avLst/>
+          </a:prstGeom>
+          <a:noFill/>
+        </p:spPr>
+        <p:txBody>
+          <a:bodyPr wrap="square" anchor="ctr" lIns="0" rIns="0" tIns="0" bIns="0">
+            <a:spAutoFit/>
+          </a:bodyPr>
+          <a:lstStyle/>
+          <a:p>
+            <a:pPr algn="l"/>
+            <a:r>
+              <a:rPr sz="1500" b="1">
+                <a:solidFill>
+                  <a:srgbClr val="0F2A4C"/>
+                </a:solidFill>
+                <a:latin typeface="Calibri"/>
+              </a:rPr>
+              <a:t>Reports &amp; Exports</a:t>
+            </a:r>
+          </a:p>
+        </p:txBody>
+      </p:sp>
+      <p:sp>
+        <p:nvSpPr>
+          <p:cNvPr id="35" name="TextBox 34"/>
+          <p:cNvSpPr txBox="1"/>
+          <p:nvPr/>
+        </p:nvSpPr>
+        <p:spPr>
+          <a:xfrm>
+            <a:off x="868680" y="6099048"/>
+            <a:ext cx="4846320" cy="365760"/>
+          </a:xfrm>
+          <a:prstGeom prst="rect">
+            <a:avLst/>
+          </a:prstGeom>
+          <a:noFill/>
+        </p:spPr>
+        <p:txBody>
+          <a:bodyPr wrap="square" anchor="t" lIns="0" rIns="0" tIns="0" bIns="0">
+            <a:spAutoFit/>
+          </a:bodyPr>
+          <a:lstStyle/>
+          <a:p>
+            <a:pPr algn="l">
+              <a:lnSpc>
+                <a:spcPct val="110000"/>
+              </a:lnSpc>
+            </a:pPr>
+            <a:r>
+              <a:rPr sz="1500" b="0">
+                <a:solidFill>
+                  <a:srgbClr val="243244"/>
+                </a:solidFill>
+                <a:latin typeface="Calibri"/>
+              </a:rPr>
+              <a:t>Analytics, revenue summary and Excel export (one sheet per module).</a:t>
+            </a:r>
+          </a:p>
+        </p:txBody>
+      </p:sp>
+      <p:sp>
+        <p:nvSpPr>
+          <p:cNvPr id="36" name="Rounded Rectangle 35"/>
+          <p:cNvSpPr/>
+          <p:nvPr/>
+        </p:nvSpPr>
+        <p:spPr>
+          <a:xfrm>
+            <a:off x="6309360" y="5623560"/>
+            <a:ext cx="5303520" cy="914400"/>
+          </a:xfrm>
+          <a:prstGeom prst="roundRect">
+            <a:avLst/>
+          </a:prstGeom>
+          <a:solidFill>
+            <a:srgbClr val="FFFFFF"/>
+          </a:solidFill>
+          <a:ln>
+            <a:noFill/>
+          </a:ln>
+          <a:effectLst/>
+        </p:spPr>
+        <p:style>
+          <a:lnRef idx="1">
+            <a:schemeClr val="accent1"/>
+          </a:lnRef>
+          <a:fillRef idx="3">
+            <a:schemeClr val="accent1"/>
+          </a:fillRef>
+          <a:effectRef idx="2">
+            <a:schemeClr val="accent1"/>
+          </a:effectRef>
+          <a:fontRef idx="minor">
+            <a:schemeClr val="lt1"/>
+          </a:fontRef>
+        </p:style>
+        <p:txBody>
+          <a:bodyPr rtlCol="0" anchor="ctr"/>
+          <a:lstStyle/>
+          <a:p>
+            <a:pPr algn="ctr"/>
+          </a:p>
+        </p:txBody>
+      </p:sp>
+      <p:sp>
+        <p:nvSpPr>
+          <p:cNvPr id="37" name="Rectangle 36"/>
+          <p:cNvSpPr/>
+          <p:nvPr/>
+        </p:nvSpPr>
+        <p:spPr>
+          <a:xfrm>
+            <a:off x="6309360" y="5623560"/>
+            <a:ext cx="82296" cy="914400"/>
+          </a:xfrm>
+          <a:prstGeom prst="rect">
+            <a:avLst/>
+          </a:prstGeom>
+          <a:solidFill>
+            <a:srgbClr val="F2B418"/>
+          </a:solidFill>
+          <a:ln>
+            <a:noFill/>
+          </a:ln>
+          <a:effectLst/>
+        </p:spPr>
+        <p:style>
+          <a:lnRef idx="1">
+            <a:schemeClr val="accent1"/>
+          </a:lnRef>
+          <a:fillRef idx="3">
+            <a:schemeClr val="accent1"/>
+          </a:fillRef>
+          <a:effectRef idx="2">
+            <a:schemeClr val="accent1"/>
+          </a:effectRef>
+          <a:fontRef idx="minor">
+            <a:schemeClr val="lt1"/>
+          </a:fontRef>
+        </p:style>
+        <p:txBody>
+          <a:bodyPr rtlCol="0" anchor="ctr"/>
+          <a:lstStyle/>
+          <a:p>
+            <a:pPr algn="ctr"/>
+          </a:p>
+        </p:txBody>
+      </p:sp>
+      <p:sp>
+        <p:nvSpPr>
+          <p:cNvPr id="38" name="TextBox 37"/>
+          <p:cNvSpPr txBox="1"/>
+          <p:nvPr/>
+        </p:nvSpPr>
+        <p:spPr>
+          <a:xfrm>
+            <a:off x="6583680" y="5733288"/>
+            <a:ext cx="4846320" cy="411480"/>
+          </a:xfrm>
+          <a:prstGeom prst="rect">
+            <a:avLst/>
+          </a:prstGeom>
+          <a:noFill/>
+        </p:spPr>
+        <p:txBody>
+          <a:bodyPr wrap="square" anchor="ctr" lIns="0" rIns="0" tIns="0" bIns="0">
+            <a:spAutoFit/>
+          </a:bodyPr>
+          <a:lstStyle/>
+          <a:p>
+            <a:pPr algn="l"/>
+            <a:r>
+              <a:rPr sz="1500" b="1">
+                <a:solidFill>
+                  <a:srgbClr val="0F2A4C"/>
+                </a:solidFill>
+                <a:latin typeface="Calibri"/>
+              </a:rPr>
+              <a:t>Audit &amp; Officials</a:t>
+            </a:r>
+          </a:p>
+        </p:txBody>
+      </p:sp>
+      <p:sp>
+        <p:nvSpPr>
+          <p:cNvPr id="39" name="TextBox 38"/>
+          <p:cNvSpPr txBox="1"/>
+          <p:nvPr/>
+        </p:nvSpPr>
+        <p:spPr>
+          <a:xfrm>
+            <a:off x="6583680" y="6099048"/>
+            <a:ext cx="4846320" cy="365760"/>
+          </a:xfrm>
+          <a:prstGeom prst="rect">
+            <a:avLst/>
+          </a:prstGeom>
+          <a:noFill/>
+        </p:spPr>
+        <p:txBody>
+          <a:bodyPr wrap="square" anchor="t" lIns="0" rIns="0" tIns="0" bIns="0">
+            <a:spAutoFit/>
+          </a:bodyPr>
+          <a:lstStyle/>
+          <a:p>
+            <a:pPr algn="l">
+              <a:lnSpc>
+                <a:spcPct val="110000"/>
+              </a:lnSpc>
+            </a:pPr>
+            <a:r>
+              <a:rPr sz="1500" b="0">
+                <a:solidFill>
+                  <a:srgbClr val="243244"/>
+                </a:solidFill>
+                <a:latin typeface="Calibri"/>
+              </a:rPr>
+              <a:t>Full administrative trail and records for elected officials.</a:t>
             </a:r>
           </a:p>
         </p:txBody>
@@ -3628,40 +6396,90 @@
       <p:grpSpPr/>
       <p:sp>
         <p:nvSpPr>
-          <p:cNvPr id="2" name="Title 1"/>
-          <p:cNvSpPr>
-            <a:spLocks noGrp="1"/>
-          </p:cNvSpPr>
-          <p:nvPr>
-            <p:ph type="title"/>
-          </p:nvPr>
-        </p:nvSpPr>
-        <p:spPr/>
-        <p:txBody>
-          <a:bodyPr/>
-          <a:lstStyle/>
-          <a:p>
-            <a:r>
-              <a:t>Resident Portal Features</a:t>
-            </a:r>
-          </a:p>
-        </p:txBody>
-      </p:sp>
-      <p:sp>
-        <p:nvSpPr>
-          <p:cNvPr id="3" name="Content Placeholder 2"/>
-          <p:cNvSpPr>
-            <a:spLocks noGrp="1"/>
-          </p:cNvSpPr>
-          <p:nvPr>
-            <p:ph idx="1"/>
-          </p:nvPr>
-        </p:nvSpPr>
-        <p:spPr/>
-        <p:txBody>
-          <a:bodyPr/>
-          <a:lstStyle/>
-          <a:p/>
+          <p:cNvPr id="2" name="Rectangle 1"/>
+          <p:cNvSpPr/>
+          <p:nvPr/>
+        </p:nvSpPr>
+        <p:spPr>
+          <a:xfrm>
+            <a:off x="0" y="0"/>
+            <a:ext cx="12191695" cy="1234440"/>
+          </a:xfrm>
+          <a:prstGeom prst="rect">
+            <a:avLst/>
+          </a:prstGeom>
+          <a:solidFill>
+            <a:srgbClr val="0F2A4C"/>
+          </a:solidFill>
+          <a:ln>
+            <a:noFill/>
+          </a:ln>
+          <a:effectLst/>
+        </p:spPr>
+        <p:style>
+          <a:lnRef idx="1">
+            <a:schemeClr val="accent1"/>
+          </a:lnRef>
+          <a:fillRef idx="3">
+            <a:schemeClr val="accent1"/>
+          </a:fillRef>
+          <a:effectRef idx="2">
+            <a:schemeClr val="accent1"/>
+          </a:effectRef>
+          <a:fontRef idx="minor">
+            <a:schemeClr val="lt1"/>
+          </a:fontRef>
+        </p:style>
+        <p:txBody>
+          <a:bodyPr rtlCol="0" anchor="ctr"/>
+          <a:lstStyle/>
+          <a:p>
+            <a:pPr algn="ctr"/>
+          </a:p>
+        </p:txBody>
+      </p:sp>
+      <p:sp>
+        <p:nvSpPr>
+          <p:cNvPr id="3" name="Rectangle 2"/>
+          <p:cNvSpPr/>
+          <p:nvPr/>
+        </p:nvSpPr>
+        <p:spPr>
+          <a:xfrm>
+            <a:off x="0" y="1234440"/>
+            <a:ext cx="12191695" cy="50800"/>
+          </a:xfrm>
+          <a:prstGeom prst="rect">
+            <a:avLst/>
+          </a:prstGeom>
+          <a:solidFill>
+            <a:srgbClr val="F2B418"/>
+          </a:solidFill>
+          <a:ln>
+            <a:noFill/>
+          </a:ln>
+          <a:effectLst/>
+        </p:spPr>
+        <p:style>
+          <a:lnRef idx="1">
+            <a:schemeClr val="accent1"/>
+          </a:lnRef>
+          <a:fillRef idx="3">
+            <a:schemeClr val="accent1"/>
+          </a:fillRef>
+          <a:effectRef idx="2">
+            <a:schemeClr val="accent1"/>
+          </a:effectRef>
+          <a:fontRef idx="minor">
+            <a:schemeClr val="lt1"/>
+          </a:fontRef>
+        </p:style>
+        <p:txBody>
+          <a:bodyPr rtlCol="0" anchor="ctr"/>
+          <a:lstStyle/>
+          <a:p>
+            <a:pPr algn="ctr"/>
+          </a:p>
         </p:txBody>
       </p:sp>
       <p:sp>
@@ -3672,8 +6490,8 @@
         </p:nvSpPr>
         <p:spPr>
           <a:xfrm>
-            <a:off x="914400" y="1371600"/>
-            <a:ext cx="10058400" cy="4572000"/>
+            <a:off x="640080" y="0"/>
+            <a:ext cx="8686800" cy="1234440"/>
           </a:xfrm>
           <a:prstGeom prst="rect">
             <a:avLst/>
@@ -3681,74 +6499,1106 @@
           <a:noFill/>
         </p:spPr>
         <p:txBody>
-          <a:bodyPr wrap="square">
+          <a:bodyPr wrap="square" anchor="ctr" lIns="0" rIns="0" tIns="0" bIns="0">
             <a:spAutoFit/>
           </a:bodyPr>
           <a:lstStyle/>
           <a:p>
-            <a:pPr>
-              <a:spcAft>
-                <a:spcPts val="1200"/>
-              </a:spcAft>
-              <a:defRPr sz="1800"/>
+            <a:pPr algn="l"/>
+            <a:r>
+              <a:rPr sz="3000" b="1">
+                <a:solidFill>
+                  <a:srgbClr val="FFFFFF"/>
+                </a:solidFill>
+                <a:latin typeface="Calibri"/>
+              </a:rPr>
+              <a:t>Resident Portal</a:t>
+            </a:r>
+          </a:p>
+        </p:txBody>
+      </p:sp>
+      <p:sp>
+        <p:nvSpPr>
+          <p:cNvPr id="5" name="TextBox 4"/>
+          <p:cNvSpPr txBox="1"/>
+          <p:nvPr/>
+        </p:nvSpPr>
+        <p:spPr>
+          <a:xfrm>
+            <a:off x="8778240" y="0"/>
+            <a:ext cx="2834640" cy="1234440"/>
+          </a:xfrm>
+          <a:prstGeom prst="rect">
+            <a:avLst/>
+          </a:prstGeom>
+          <a:noFill/>
+        </p:spPr>
+        <p:txBody>
+          <a:bodyPr wrap="square" anchor="ctr" lIns="0" rIns="0" tIns="0" bIns="0">
+            <a:spAutoFit/>
+          </a:bodyPr>
+          <a:lstStyle/>
+          <a:p>
+            <a:pPr algn="r"/>
+            <a:r>
+              <a:rPr sz="1200" b="0">
+                <a:solidFill>
+                  <a:srgbClr val="C9D6E8"/>
+                </a:solidFill>
+                <a:latin typeface="Calibri"/>
+              </a:rPr>
+              <a:t>Self-service for every resident</a:t>
+            </a:r>
+          </a:p>
+        </p:txBody>
+      </p:sp>
+      <p:sp>
+        <p:nvSpPr>
+          <p:cNvPr id="6" name="Rectangle 5"/>
+          <p:cNvSpPr/>
+          <p:nvPr/>
+        </p:nvSpPr>
+        <p:spPr>
+          <a:xfrm>
+            <a:off x="11231575" y="0"/>
+            <a:ext cx="960120" cy="384048"/>
+          </a:xfrm>
+          <a:prstGeom prst="rect">
+            <a:avLst/>
+          </a:prstGeom>
+          <a:solidFill>
+            <a:srgbClr val="F2B418"/>
+          </a:solidFill>
+          <a:ln>
+            <a:noFill/>
+          </a:ln>
+          <a:effectLst/>
+        </p:spPr>
+        <p:style>
+          <a:lnRef idx="1">
+            <a:schemeClr val="accent1"/>
+          </a:lnRef>
+          <a:fillRef idx="3">
+            <a:schemeClr val="accent1"/>
+          </a:fillRef>
+          <a:effectRef idx="2">
+            <a:schemeClr val="accent1"/>
+          </a:effectRef>
+          <a:fontRef idx="minor">
+            <a:schemeClr val="lt1"/>
+          </a:fontRef>
+        </p:style>
+        <p:txBody>
+          <a:bodyPr rtlCol="0" anchor="ctr"/>
+          <a:lstStyle/>
+          <a:p>
+            <a:pPr algn="ctr"/>
+          </a:p>
+        </p:txBody>
+      </p:sp>
+      <p:sp>
+        <p:nvSpPr>
+          <p:cNvPr id="7" name="TextBox 6"/>
+          <p:cNvSpPr txBox="1"/>
+          <p:nvPr/>
+        </p:nvSpPr>
+        <p:spPr>
+          <a:xfrm>
+            <a:off x="11231575" y="0"/>
+            <a:ext cx="960120" cy="384048"/>
+          </a:xfrm>
+          <a:prstGeom prst="rect">
+            <a:avLst/>
+          </a:prstGeom>
+          <a:noFill/>
+        </p:spPr>
+        <p:txBody>
+          <a:bodyPr wrap="square" anchor="ctr" lIns="0" rIns="0" tIns="0" bIns="0">
+            <a:spAutoFit/>
+          </a:bodyPr>
+          <a:lstStyle/>
+          <a:p>
+            <a:pPr algn="ctr"/>
+            <a:r>
+              <a:rPr sz="1400" b="1">
+                <a:solidFill>
+                  <a:srgbClr val="0F2A4C"/>
+                </a:solidFill>
+                <a:latin typeface="Calibri"/>
+              </a:rPr>
+              <a:t>BC</a:t>
+            </a:r>
+          </a:p>
+        </p:txBody>
+      </p:sp>
+      <p:sp>
+        <p:nvSpPr>
+          <p:cNvPr id="8" name="Rounded Rectangle 7"/>
+          <p:cNvSpPr/>
+          <p:nvPr/>
+        </p:nvSpPr>
+        <p:spPr>
+          <a:xfrm>
+            <a:off x="731520" y="1645920"/>
+            <a:ext cx="3291840" cy="1920240"/>
+          </a:xfrm>
+          <a:prstGeom prst="roundRect">
+            <a:avLst/>
+          </a:prstGeom>
+          <a:solidFill>
+            <a:srgbClr val="FFFFFF"/>
+          </a:solidFill>
+          <a:ln>
+            <a:noFill/>
+          </a:ln>
+          <a:effectLst/>
+        </p:spPr>
+        <p:style>
+          <a:lnRef idx="1">
+            <a:schemeClr val="accent1"/>
+          </a:lnRef>
+          <a:fillRef idx="3">
+            <a:schemeClr val="accent1"/>
+          </a:fillRef>
+          <a:effectRef idx="2">
+            <a:schemeClr val="accent1"/>
+          </a:effectRef>
+          <a:fontRef idx="minor">
+            <a:schemeClr val="lt1"/>
+          </a:fontRef>
+        </p:style>
+        <p:txBody>
+          <a:bodyPr rtlCol="0" anchor="ctr"/>
+          <a:lstStyle/>
+          <a:p>
+            <a:pPr algn="ctr"/>
+          </a:p>
+        </p:txBody>
+      </p:sp>
+      <p:sp>
+        <p:nvSpPr>
+          <p:cNvPr id="9" name="Rectangle 8"/>
+          <p:cNvSpPr/>
+          <p:nvPr/>
+        </p:nvSpPr>
+        <p:spPr>
+          <a:xfrm>
+            <a:off x="731520" y="1645920"/>
+            <a:ext cx="82296" cy="1920240"/>
+          </a:xfrm>
+          <a:prstGeom prst="rect">
+            <a:avLst/>
+          </a:prstGeom>
+          <a:solidFill>
+            <a:srgbClr val="F2B418"/>
+          </a:solidFill>
+          <a:ln>
+            <a:noFill/>
+          </a:ln>
+          <a:effectLst/>
+        </p:spPr>
+        <p:style>
+          <a:lnRef idx="1">
+            <a:schemeClr val="accent1"/>
+          </a:lnRef>
+          <a:fillRef idx="3">
+            <a:schemeClr val="accent1"/>
+          </a:fillRef>
+          <a:effectRef idx="2">
+            <a:schemeClr val="accent1"/>
+          </a:effectRef>
+          <a:fontRef idx="minor">
+            <a:schemeClr val="lt1"/>
+          </a:fontRef>
+        </p:style>
+        <p:txBody>
+          <a:bodyPr rtlCol="0" anchor="ctr"/>
+          <a:lstStyle/>
+          <a:p>
+            <a:pPr algn="ctr"/>
+          </a:p>
+        </p:txBody>
+      </p:sp>
+      <p:sp>
+        <p:nvSpPr>
+          <p:cNvPr id="10" name="TextBox 9"/>
+          <p:cNvSpPr txBox="1"/>
+          <p:nvPr/>
+        </p:nvSpPr>
+        <p:spPr>
+          <a:xfrm>
+            <a:off x="1005840" y="1755648"/>
+            <a:ext cx="2834640" cy="411480"/>
+          </a:xfrm>
+          <a:prstGeom prst="rect">
+            <a:avLst/>
+          </a:prstGeom>
+          <a:noFill/>
+        </p:spPr>
+        <p:txBody>
+          <a:bodyPr wrap="square" anchor="ctr" lIns="0" rIns="0" tIns="0" bIns="0">
+            <a:spAutoFit/>
+          </a:bodyPr>
+          <a:lstStyle/>
+          <a:p>
+            <a:pPr algn="l"/>
+            <a:r>
+              <a:rPr sz="1500" b="1">
+                <a:solidFill>
+                  <a:srgbClr val="0F2A4C"/>
+                </a:solidFill>
+                <a:latin typeface="Calibri"/>
+              </a:rPr>
+              <a:t>Profile</a:t>
+            </a:r>
+          </a:p>
+        </p:txBody>
+      </p:sp>
+      <p:sp>
+        <p:nvSpPr>
+          <p:cNvPr id="11" name="TextBox 10"/>
+          <p:cNvSpPr txBox="1"/>
+          <p:nvPr/>
+        </p:nvSpPr>
+        <p:spPr>
+          <a:xfrm>
+            <a:off x="1005840" y="2121408"/>
+            <a:ext cx="2834640" cy="1371600"/>
+          </a:xfrm>
+          <a:prstGeom prst="rect">
+            <a:avLst/>
+          </a:prstGeom>
+          <a:noFill/>
+        </p:spPr>
+        <p:txBody>
+          <a:bodyPr wrap="square" anchor="t" lIns="0" rIns="0" tIns="0" bIns="0">
+            <a:spAutoFit/>
+          </a:bodyPr>
+          <a:lstStyle/>
+          <a:p>
+            <a:pPr algn="l">
+              <a:lnSpc>
+                <a:spcPct val="110000"/>
+              </a:lnSpc>
             </a:pPr>
             <a:r>
-              <a:t>Self-service Profile Management</a:t>
-            </a:r>
-          </a:p>
-          <a:p>
-            <a:pPr>
-              <a:spcAft>
-                <a:spcPts val="1200"/>
-              </a:spcAft>
-              <a:defRPr sz="1800"/>
+              <a:rPr sz="1500" b="0">
+                <a:solidFill>
+                  <a:srgbClr val="243244"/>
+                </a:solidFill>
+                <a:latin typeface="Calibri"/>
+              </a:rPr>
+              <a:t>Self-service personal information management.</a:t>
+            </a:r>
+          </a:p>
+        </p:txBody>
+      </p:sp>
+      <p:sp>
+        <p:nvSpPr>
+          <p:cNvPr id="12" name="Rounded Rectangle 11"/>
+          <p:cNvSpPr/>
+          <p:nvPr/>
+        </p:nvSpPr>
+        <p:spPr>
+          <a:xfrm>
+            <a:off x="4343400" y="1645920"/>
+            <a:ext cx="3291840" cy="1920240"/>
+          </a:xfrm>
+          <a:prstGeom prst="roundRect">
+            <a:avLst/>
+          </a:prstGeom>
+          <a:solidFill>
+            <a:srgbClr val="FFFFFF"/>
+          </a:solidFill>
+          <a:ln>
+            <a:noFill/>
+          </a:ln>
+          <a:effectLst/>
+        </p:spPr>
+        <p:style>
+          <a:lnRef idx="1">
+            <a:schemeClr val="accent1"/>
+          </a:lnRef>
+          <a:fillRef idx="3">
+            <a:schemeClr val="accent1"/>
+          </a:fillRef>
+          <a:effectRef idx="2">
+            <a:schemeClr val="accent1"/>
+          </a:effectRef>
+          <a:fontRef idx="minor">
+            <a:schemeClr val="lt1"/>
+          </a:fontRef>
+        </p:style>
+        <p:txBody>
+          <a:bodyPr rtlCol="0" anchor="ctr"/>
+          <a:lstStyle/>
+          <a:p>
+            <a:pPr algn="ctr"/>
+          </a:p>
+        </p:txBody>
+      </p:sp>
+      <p:sp>
+        <p:nvSpPr>
+          <p:cNvPr id="13" name="Rectangle 12"/>
+          <p:cNvSpPr/>
+          <p:nvPr/>
+        </p:nvSpPr>
+        <p:spPr>
+          <a:xfrm>
+            <a:off x="4343400" y="1645920"/>
+            <a:ext cx="82296" cy="1920240"/>
+          </a:xfrm>
+          <a:prstGeom prst="rect">
+            <a:avLst/>
+          </a:prstGeom>
+          <a:solidFill>
+            <a:srgbClr val="F2B418"/>
+          </a:solidFill>
+          <a:ln>
+            <a:noFill/>
+          </a:ln>
+          <a:effectLst/>
+        </p:spPr>
+        <p:style>
+          <a:lnRef idx="1">
+            <a:schemeClr val="accent1"/>
+          </a:lnRef>
+          <a:fillRef idx="3">
+            <a:schemeClr val="accent1"/>
+          </a:fillRef>
+          <a:effectRef idx="2">
+            <a:schemeClr val="accent1"/>
+          </a:effectRef>
+          <a:fontRef idx="minor">
+            <a:schemeClr val="lt1"/>
+          </a:fontRef>
+        </p:style>
+        <p:txBody>
+          <a:bodyPr rtlCol="0" anchor="ctr"/>
+          <a:lstStyle/>
+          <a:p>
+            <a:pPr algn="ctr"/>
+          </a:p>
+        </p:txBody>
+      </p:sp>
+      <p:sp>
+        <p:nvSpPr>
+          <p:cNvPr id="14" name="TextBox 13"/>
+          <p:cNvSpPr txBox="1"/>
+          <p:nvPr/>
+        </p:nvSpPr>
+        <p:spPr>
+          <a:xfrm>
+            <a:off x="4617720" y="1755648"/>
+            <a:ext cx="2834640" cy="411480"/>
+          </a:xfrm>
+          <a:prstGeom prst="rect">
+            <a:avLst/>
+          </a:prstGeom>
+          <a:noFill/>
+        </p:spPr>
+        <p:txBody>
+          <a:bodyPr wrap="square" anchor="ctr" lIns="0" rIns="0" tIns="0" bIns="0">
+            <a:spAutoFit/>
+          </a:bodyPr>
+          <a:lstStyle/>
+          <a:p>
+            <a:pPr algn="l"/>
+            <a:r>
+              <a:rPr sz="1500" b="1">
+                <a:solidFill>
+                  <a:srgbClr val="0F2A4C"/>
+                </a:solidFill>
+                <a:latin typeface="Calibri"/>
+              </a:rPr>
+              <a:t>Documents</a:t>
+            </a:r>
+          </a:p>
+        </p:txBody>
+      </p:sp>
+      <p:sp>
+        <p:nvSpPr>
+          <p:cNvPr id="15" name="TextBox 14"/>
+          <p:cNvSpPr txBox="1"/>
+          <p:nvPr/>
+        </p:nvSpPr>
+        <p:spPr>
+          <a:xfrm>
+            <a:off x="4617720" y="2121408"/>
+            <a:ext cx="2834640" cy="1371600"/>
+          </a:xfrm>
+          <a:prstGeom prst="rect">
+            <a:avLst/>
+          </a:prstGeom>
+          <a:noFill/>
+        </p:spPr>
+        <p:txBody>
+          <a:bodyPr wrap="square" anchor="t" lIns="0" rIns="0" tIns="0" bIns="0">
+            <a:spAutoFit/>
+          </a:bodyPr>
+          <a:lstStyle/>
+          <a:p>
+            <a:pPr algn="l">
+              <a:lnSpc>
+                <a:spcPct val="110000"/>
+              </a:lnSpc>
             </a:pPr>
             <a:r>
-              <a:t>Online Document Requests</a:t>
-            </a:r>
-          </a:p>
-          <a:p>
-            <a:pPr>
-              <a:spcAft>
-                <a:spcPts val="1200"/>
-              </a:spcAft>
-              <a:defRPr sz="1800"/>
+              <a:rPr sz="1500" b="0">
+                <a:solidFill>
+                  <a:srgbClr val="243244"/>
+                </a:solidFill>
+                <a:latin typeface="Calibri"/>
+              </a:rPr>
+              <a:t>Request &amp; track barangay certificates online.</a:t>
+            </a:r>
+          </a:p>
+        </p:txBody>
+      </p:sp>
+      <p:sp>
+        <p:nvSpPr>
+          <p:cNvPr id="16" name="Rounded Rectangle 15"/>
+          <p:cNvSpPr/>
+          <p:nvPr/>
+        </p:nvSpPr>
+        <p:spPr>
+          <a:xfrm>
+            <a:off x="7955279" y="1645920"/>
+            <a:ext cx="3291840" cy="1920240"/>
+          </a:xfrm>
+          <a:prstGeom prst="roundRect">
+            <a:avLst/>
+          </a:prstGeom>
+          <a:solidFill>
+            <a:srgbClr val="FFFFFF"/>
+          </a:solidFill>
+          <a:ln>
+            <a:noFill/>
+          </a:ln>
+          <a:effectLst/>
+        </p:spPr>
+        <p:style>
+          <a:lnRef idx="1">
+            <a:schemeClr val="accent1"/>
+          </a:lnRef>
+          <a:fillRef idx="3">
+            <a:schemeClr val="accent1"/>
+          </a:fillRef>
+          <a:effectRef idx="2">
+            <a:schemeClr val="accent1"/>
+          </a:effectRef>
+          <a:fontRef idx="minor">
+            <a:schemeClr val="lt1"/>
+          </a:fontRef>
+        </p:style>
+        <p:txBody>
+          <a:bodyPr rtlCol="0" anchor="ctr"/>
+          <a:lstStyle/>
+          <a:p>
+            <a:pPr algn="ctr"/>
+          </a:p>
+        </p:txBody>
+      </p:sp>
+      <p:sp>
+        <p:nvSpPr>
+          <p:cNvPr id="17" name="Rectangle 16"/>
+          <p:cNvSpPr/>
+          <p:nvPr/>
+        </p:nvSpPr>
+        <p:spPr>
+          <a:xfrm>
+            <a:off x="7955279" y="1645920"/>
+            <a:ext cx="82296" cy="1920240"/>
+          </a:xfrm>
+          <a:prstGeom prst="rect">
+            <a:avLst/>
+          </a:prstGeom>
+          <a:solidFill>
+            <a:srgbClr val="F2B418"/>
+          </a:solidFill>
+          <a:ln>
+            <a:noFill/>
+          </a:ln>
+          <a:effectLst/>
+        </p:spPr>
+        <p:style>
+          <a:lnRef idx="1">
+            <a:schemeClr val="accent1"/>
+          </a:lnRef>
+          <a:fillRef idx="3">
+            <a:schemeClr val="accent1"/>
+          </a:fillRef>
+          <a:effectRef idx="2">
+            <a:schemeClr val="accent1"/>
+          </a:effectRef>
+          <a:fontRef idx="minor">
+            <a:schemeClr val="lt1"/>
+          </a:fontRef>
+        </p:style>
+        <p:txBody>
+          <a:bodyPr rtlCol="0" anchor="ctr"/>
+          <a:lstStyle/>
+          <a:p>
+            <a:pPr algn="ctr"/>
+          </a:p>
+        </p:txBody>
+      </p:sp>
+      <p:sp>
+        <p:nvSpPr>
+          <p:cNvPr id="18" name="TextBox 17"/>
+          <p:cNvSpPr txBox="1"/>
+          <p:nvPr/>
+        </p:nvSpPr>
+        <p:spPr>
+          <a:xfrm>
+            <a:off x="8229599" y="1755648"/>
+            <a:ext cx="2834640" cy="411480"/>
+          </a:xfrm>
+          <a:prstGeom prst="rect">
+            <a:avLst/>
+          </a:prstGeom>
+          <a:noFill/>
+        </p:spPr>
+        <p:txBody>
+          <a:bodyPr wrap="square" anchor="ctr" lIns="0" rIns="0" tIns="0" bIns="0">
+            <a:spAutoFit/>
+          </a:bodyPr>
+          <a:lstStyle/>
+          <a:p>
+            <a:pPr algn="l"/>
+            <a:r>
+              <a:rPr sz="1500" b="1">
+                <a:solidFill>
+                  <a:srgbClr val="0F2A4C"/>
+                </a:solidFill>
+                <a:latin typeface="Calibri"/>
+              </a:rPr>
+              <a:t>Appointments</a:t>
+            </a:r>
+          </a:p>
+        </p:txBody>
+      </p:sp>
+      <p:sp>
+        <p:nvSpPr>
+          <p:cNvPr id="19" name="TextBox 18"/>
+          <p:cNvSpPr txBox="1"/>
+          <p:nvPr/>
+        </p:nvSpPr>
+        <p:spPr>
+          <a:xfrm>
+            <a:off x="8229599" y="2121408"/>
+            <a:ext cx="2834640" cy="1371600"/>
+          </a:xfrm>
+          <a:prstGeom prst="rect">
+            <a:avLst/>
+          </a:prstGeom>
+          <a:noFill/>
+        </p:spPr>
+        <p:txBody>
+          <a:bodyPr wrap="square" anchor="t" lIns="0" rIns="0" tIns="0" bIns="0">
+            <a:spAutoFit/>
+          </a:bodyPr>
+          <a:lstStyle/>
+          <a:p>
+            <a:pPr algn="l">
+              <a:lnSpc>
+                <a:spcPct val="110000"/>
+              </a:lnSpc>
             </a:pPr>
             <a:r>
-              <a:t>Appointment Booking</a:t>
-            </a:r>
-          </a:p>
-          <a:p>
-            <a:pPr>
-              <a:spcAft>
-                <a:spcPts val="1200"/>
-              </a:spcAft>
-              <a:defRPr sz="1800"/>
+              <a:rPr sz="1500" b="0">
+                <a:solidFill>
+                  <a:srgbClr val="243244"/>
+                </a:solidFill>
+                <a:latin typeface="Calibri"/>
+              </a:rPr>
+              <a:t>Book and manage visits conveniently.</a:t>
+            </a:r>
+          </a:p>
+        </p:txBody>
+      </p:sp>
+      <p:sp>
+        <p:nvSpPr>
+          <p:cNvPr id="20" name="Rounded Rectangle 19"/>
+          <p:cNvSpPr/>
+          <p:nvPr/>
+        </p:nvSpPr>
+        <p:spPr>
+          <a:xfrm>
+            <a:off x="731520" y="4206240"/>
+            <a:ext cx="3291840" cy="1920240"/>
+          </a:xfrm>
+          <a:prstGeom prst="roundRect">
+            <a:avLst/>
+          </a:prstGeom>
+          <a:solidFill>
+            <a:srgbClr val="FFFFFF"/>
+          </a:solidFill>
+          <a:ln>
+            <a:noFill/>
+          </a:ln>
+          <a:effectLst/>
+        </p:spPr>
+        <p:style>
+          <a:lnRef idx="1">
+            <a:schemeClr val="accent1"/>
+          </a:lnRef>
+          <a:fillRef idx="3">
+            <a:schemeClr val="accent1"/>
+          </a:fillRef>
+          <a:effectRef idx="2">
+            <a:schemeClr val="accent1"/>
+          </a:effectRef>
+          <a:fontRef idx="minor">
+            <a:schemeClr val="lt1"/>
+          </a:fontRef>
+        </p:style>
+        <p:txBody>
+          <a:bodyPr rtlCol="0" anchor="ctr"/>
+          <a:lstStyle/>
+          <a:p>
+            <a:pPr algn="ctr"/>
+          </a:p>
+        </p:txBody>
+      </p:sp>
+      <p:sp>
+        <p:nvSpPr>
+          <p:cNvPr id="21" name="Rectangle 20"/>
+          <p:cNvSpPr/>
+          <p:nvPr/>
+        </p:nvSpPr>
+        <p:spPr>
+          <a:xfrm>
+            <a:off x="731520" y="4206240"/>
+            <a:ext cx="82296" cy="1920240"/>
+          </a:xfrm>
+          <a:prstGeom prst="rect">
+            <a:avLst/>
+          </a:prstGeom>
+          <a:solidFill>
+            <a:srgbClr val="F2B418"/>
+          </a:solidFill>
+          <a:ln>
+            <a:noFill/>
+          </a:ln>
+          <a:effectLst/>
+        </p:spPr>
+        <p:style>
+          <a:lnRef idx="1">
+            <a:schemeClr val="accent1"/>
+          </a:lnRef>
+          <a:fillRef idx="3">
+            <a:schemeClr val="accent1"/>
+          </a:fillRef>
+          <a:effectRef idx="2">
+            <a:schemeClr val="accent1"/>
+          </a:effectRef>
+          <a:fontRef idx="minor">
+            <a:schemeClr val="lt1"/>
+          </a:fontRef>
+        </p:style>
+        <p:txBody>
+          <a:bodyPr rtlCol="0" anchor="ctr"/>
+          <a:lstStyle/>
+          <a:p>
+            <a:pPr algn="ctr"/>
+          </a:p>
+        </p:txBody>
+      </p:sp>
+      <p:sp>
+        <p:nvSpPr>
+          <p:cNvPr id="22" name="TextBox 21"/>
+          <p:cNvSpPr txBox="1"/>
+          <p:nvPr/>
+        </p:nvSpPr>
+        <p:spPr>
+          <a:xfrm>
+            <a:off x="1005840" y="4315968"/>
+            <a:ext cx="2834640" cy="411480"/>
+          </a:xfrm>
+          <a:prstGeom prst="rect">
+            <a:avLst/>
+          </a:prstGeom>
+          <a:noFill/>
+        </p:spPr>
+        <p:txBody>
+          <a:bodyPr wrap="square" anchor="ctr" lIns="0" rIns="0" tIns="0" bIns="0">
+            <a:spAutoFit/>
+          </a:bodyPr>
+          <a:lstStyle/>
+          <a:p>
+            <a:pPr algn="l"/>
+            <a:r>
+              <a:rPr sz="1500" b="1">
+                <a:solidFill>
+                  <a:srgbClr val="0F2A4C"/>
+                </a:solidFill>
+                <a:latin typeface="Calibri"/>
+              </a:rPr>
+              <a:t>Complaints</a:t>
+            </a:r>
+          </a:p>
+        </p:txBody>
+      </p:sp>
+      <p:sp>
+        <p:nvSpPr>
+          <p:cNvPr id="23" name="TextBox 22"/>
+          <p:cNvSpPr txBox="1"/>
+          <p:nvPr/>
+        </p:nvSpPr>
+        <p:spPr>
+          <a:xfrm>
+            <a:off x="1005840" y="4681728"/>
+            <a:ext cx="2834640" cy="1371600"/>
+          </a:xfrm>
+          <a:prstGeom prst="rect">
+            <a:avLst/>
+          </a:prstGeom>
+          <a:noFill/>
+        </p:spPr>
+        <p:txBody>
+          <a:bodyPr wrap="square" anchor="t" lIns="0" rIns="0" tIns="0" bIns="0">
+            <a:spAutoFit/>
+          </a:bodyPr>
+          <a:lstStyle/>
+          <a:p>
+            <a:pPr algn="l">
+              <a:lnSpc>
+                <a:spcPct val="110000"/>
+              </a:lnSpc>
             </a:pPr>
             <a:r>
-              <a:t>Filing Complaints with Photo Evidence</a:t>
-            </a:r>
-          </a:p>
-          <a:p>
-            <a:pPr>
-              <a:spcAft>
-                <a:spcPts val="1200"/>
-              </a:spcAft>
-              <a:defRPr sz="1800"/>
+              <a:rPr sz="1500" b="0">
+                <a:solidFill>
+                  <a:srgbClr val="243244"/>
+                </a:solidFill>
+                <a:latin typeface="Calibri"/>
+              </a:rPr>
+              <a:t>File complaints with photo evidence.</a:t>
+            </a:r>
+          </a:p>
+        </p:txBody>
+      </p:sp>
+      <p:sp>
+        <p:nvSpPr>
+          <p:cNvPr id="24" name="Rounded Rectangle 23"/>
+          <p:cNvSpPr/>
+          <p:nvPr/>
+        </p:nvSpPr>
+        <p:spPr>
+          <a:xfrm>
+            <a:off x="4343400" y="4206240"/>
+            <a:ext cx="3291840" cy="1920240"/>
+          </a:xfrm>
+          <a:prstGeom prst="roundRect">
+            <a:avLst/>
+          </a:prstGeom>
+          <a:solidFill>
+            <a:srgbClr val="FFFFFF"/>
+          </a:solidFill>
+          <a:ln>
+            <a:noFill/>
+          </a:ln>
+          <a:effectLst/>
+        </p:spPr>
+        <p:style>
+          <a:lnRef idx="1">
+            <a:schemeClr val="accent1"/>
+          </a:lnRef>
+          <a:fillRef idx="3">
+            <a:schemeClr val="accent1"/>
+          </a:fillRef>
+          <a:effectRef idx="2">
+            <a:schemeClr val="accent1"/>
+          </a:effectRef>
+          <a:fontRef idx="minor">
+            <a:schemeClr val="lt1"/>
+          </a:fontRef>
+        </p:style>
+        <p:txBody>
+          <a:bodyPr rtlCol="0" anchor="ctr"/>
+          <a:lstStyle/>
+          <a:p>
+            <a:pPr algn="ctr"/>
+          </a:p>
+        </p:txBody>
+      </p:sp>
+      <p:sp>
+        <p:nvSpPr>
+          <p:cNvPr id="25" name="Rectangle 24"/>
+          <p:cNvSpPr/>
+          <p:nvPr/>
+        </p:nvSpPr>
+        <p:spPr>
+          <a:xfrm>
+            <a:off x="4343400" y="4206240"/>
+            <a:ext cx="82296" cy="1920240"/>
+          </a:xfrm>
+          <a:prstGeom prst="rect">
+            <a:avLst/>
+          </a:prstGeom>
+          <a:solidFill>
+            <a:srgbClr val="F2B418"/>
+          </a:solidFill>
+          <a:ln>
+            <a:noFill/>
+          </a:ln>
+          <a:effectLst/>
+        </p:spPr>
+        <p:style>
+          <a:lnRef idx="1">
+            <a:schemeClr val="accent1"/>
+          </a:lnRef>
+          <a:fillRef idx="3">
+            <a:schemeClr val="accent1"/>
+          </a:fillRef>
+          <a:effectRef idx="2">
+            <a:schemeClr val="accent1"/>
+          </a:effectRef>
+          <a:fontRef idx="minor">
+            <a:schemeClr val="lt1"/>
+          </a:fontRef>
+        </p:style>
+        <p:txBody>
+          <a:bodyPr rtlCol="0" anchor="ctr"/>
+          <a:lstStyle/>
+          <a:p>
+            <a:pPr algn="ctr"/>
+          </a:p>
+        </p:txBody>
+      </p:sp>
+      <p:sp>
+        <p:nvSpPr>
+          <p:cNvPr id="26" name="TextBox 25"/>
+          <p:cNvSpPr txBox="1"/>
+          <p:nvPr/>
+        </p:nvSpPr>
+        <p:spPr>
+          <a:xfrm>
+            <a:off x="4617720" y="4315968"/>
+            <a:ext cx="2834640" cy="411480"/>
+          </a:xfrm>
+          <a:prstGeom prst="rect">
+            <a:avLst/>
+          </a:prstGeom>
+          <a:noFill/>
+        </p:spPr>
+        <p:txBody>
+          <a:bodyPr wrap="square" anchor="ctr" lIns="0" rIns="0" tIns="0" bIns="0">
+            <a:spAutoFit/>
+          </a:bodyPr>
+          <a:lstStyle/>
+          <a:p>
+            <a:pPr algn="l"/>
+            <a:r>
+              <a:rPr sz="1500" b="1">
+                <a:solidFill>
+                  <a:srgbClr val="0F2A4C"/>
+                </a:solidFill>
+                <a:latin typeface="Calibri"/>
+              </a:rPr>
+              <a:t>Announcements</a:t>
+            </a:r>
+          </a:p>
+        </p:txBody>
+      </p:sp>
+      <p:sp>
+        <p:nvSpPr>
+          <p:cNvPr id="27" name="TextBox 26"/>
+          <p:cNvSpPr txBox="1"/>
+          <p:nvPr/>
+        </p:nvSpPr>
+        <p:spPr>
+          <a:xfrm>
+            <a:off x="4617720" y="4681728"/>
+            <a:ext cx="2834640" cy="1371600"/>
+          </a:xfrm>
+          <a:prstGeom prst="rect">
+            <a:avLst/>
+          </a:prstGeom>
+          <a:noFill/>
+        </p:spPr>
+        <p:txBody>
+          <a:bodyPr wrap="square" anchor="t" lIns="0" rIns="0" tIns="0" bIns="0">
+            <a:spAutoFit/>
+          </a:bodyPr>
+          <a:lstStyle/>
+          <a:p>
+            <a:pPr algn="l">
+              <a:lnSpc>
+                <a:spcPct val="110000"/>
+              </a:lnSpc>
             </a:pPr>
             <a:r>
-              <a:t>Real-time Notifications</a:t>
-            </a:r>
-          </a:p>
-          <a:p>
-            <a:pPr>
-              <a:spcAft>
-                <a:spcPts val="1200"/>
-              </a:spcAft>
-              <a:defRPr sz="1800"/>
+              <a:rPr sz="1500" b="0">
+                <a:solidFill>
+                  <a:srgbClr val="243244"/>
+                </a:solidFill>
+                <a:latin typeface="Calibri"/>
+              </a:rPr>
+              <a:t>Latest barangay news and updates.</a:t>
+            </a:r>
+          </a:p>
+        </p:txBody>
+      </p:sp>
+      <p:sp>
+        <p:nvSpPr>
+          <p:cNvPr id="28" name="Rounded Rectangle 27"/>
+          <p:cNvSpPr/>
+          <p:nvPr/>
+        </p:nvSpPr>
+        <p:spPr>
+          <a:xfrm>
+            <a:off x="7955279" y="4206240"/>
+            <a:ext cx="3291840" cy="1920240"/>
+          </a:xfrm>
+          <a:prstGeom prst="roundRect">
+            <a:avLst/>
+          </a:prstGeom>
+          <a:solidFill>
+            <a:srgbClr val="FFFFFF"/>
+          </a:solidFill>
+          <a:ln>
+            <a:noFill/>
+          </a:ln>
+          <a:effectLst/>
+        </p:spPr>
+        <p:style>
+          <a:lnRef idx="1">
+            <a:schemeClr val="accent1"/>
+          </a:lnRef>
+          <a:fillRef idx="3">
+            <a:schemeClr val="accent1"/>
+          </a:fillRef>
+          <a:effectRef idx="2">
+            <a:schemeClr val="accent1"/>
+          </a:effectRef>
+          <a:fontRef idx="minor">
+            <a:schemeClr val="lt1"/>
+          </a:fontRef>
+        </p:style>
+        <p:txBody>
+          <a:bodyPr rtlCol="0" anchor="ctr"/>
+          <a:lstStyle/>
+          <a:p>
+            <a:pPr algn="ctr"/>
+          </a:p>
+        </p:txBody>
+      </p:sp>
+      <p:sp>
+        <p:nvSpPr>
+          <p:cNvPr id="29" name="Rectangle 28"/>
+          <p:cNvSpPr/>
+          <p:nvPr/>
+        </p:nvSpPr>
+        <p:spPr>
+          <a:xfrm>
+            <a:off x="7955279" y="4206240"/>
+            <a:ext cx="82296" cy="1920240"/>
+          </a:xfrm>
+          <a:prstGeom prst="rect">
+            <a:avLst/>
+          </a:prstGeom>
+          <a:solidFill>
+            <a:srgbClr val="F2B418"/>
+          </a:solidFill>
+          <a:ln>
+            <a:noFill/>
+          </a:ln>
+          <a:effectLst/>
+        </p:spPr>
+        <p:style>
+          <a:lnRef idx="1">
+            <a:schemeClr val="accent1"/>
+          </a:lnRef>
+          <a:fillRef idx="3">
+            <a:schemeClr val="accent1"/>
+          </a:fillRef>
+          <a:effectRef idx="2">
+            <a:schemeClr val="accent1"/>
+          </a:effectRef>
+          <a:fontRef idx="minor">
+            <a:schemeClr val="lt1"/>
+          </a:fontRef>
+        </p:style>
+        <p:txBody>
+          <a:bodyPr rtlCol="0" anchor="ctr"/>
+          <a:lstStyle/>
+          <a:p>
+            <a:pPr algn="ctr"/>
+          </a:p>
+        </p:txBody>
+      </p:sp>
+      <p:sp>
+        <p:nvSpPr>
+          <p:cNvPr id="30" name="TextBox 29"/>
+          <p:cNvSpPr txBox="1"/>
+          <p:nvPr/>
+        </p:nvSpPr>
+        <p:spPr>
+          <a:xfrm>
+            <a:off x="8229599" y="4315968"/>
+            <a:ext cx="2834640" cy="411480"/>
+          </a:xfrm>
+          <a:prstGeom prst="rect">
+            <a:avLst/>
+          </a:prstGeom>
+          <a:noFill/>
+        </p:spPr>
+        <p:txBody>
+          <a:bodyPr wrap="square" anchor="ctr" lIns="0" rIns="0" tIns="0" bIns="0">
+            <a:spAutoFit/>
+          </a:bodyPr>
+          <a:lstStyle/>
+          <a:p>
+            <a:pPr algn="l"/>
+            <a:r>
+              <a:rPr sz="1500" b="1">
+                <a:solidFill>
+                  <a:srgbClr val="0F2A4C"/>
+                </a:solidFill>
+                <a:latin typeface="Calibri"/>
+              </a:rPr>
+              <a:t>Notifications</a:t>
+            </a:r>
+          </a:p>
+        </p:txBody>
+      </p:sp>
+      <p:sp>
+        <p:nvSpPr>
+          <p:cNvPr id="31" name="TextBox 30"/>
+          <p:cNvSpPr txBox="1"/>
+          <p:nvPr/>
+        </p:nvSpPr>
+        <p:spPr>
+          <a:xfrm>
+            <a:off x="8229599" y="4681728"/>
+            <a:ext cx="2834640" cy="1371600"/>
+          </a:xfrm>
+          <a:prstGeom prst="rect">
+            <a:avLst/>
+          </a:prstGeom>
+          <a:noFill/>
+        </p:spPr>
+        <p:txBody>
+          <a:bodyPr wrap="square" anchor="t" lIns="0" rIns="0" tIns="0" bIns="0">
+            <a:spAutoFit/>
+          </a:bodyPr>
+          <a:lstStyle/>
+          <a:p>
+            <a:pPr algn="l">
+              <a:lnSpc>
+                <a:spcPct val="110000"/>
+              </a:lnSpc>
             </a:pPr>
             <a:r>
-              <a:t>Access to Barangay Announcements</a:t>
+              <a:rPr sz="1500" b="0">
+                <a:solidFill>
+                  <a:srgbClr val="243244"/>
+                </a:solidFill>
+                <a:latin typeface="Calibri"/>
+              </a:rPr>
+              <a:t>Real-time alerts for every activity.</a:t>
             </a:r>
           </a:p>
         </p:txBody>
@@ -3773,40 +7623,90 @@
       <p:grpSpPr/>
       <p:sp>
         <p:nvSpPr>
-          <p:cNvPr id="2" name="Title 1"/>
-          <p:cNvSpPr>
-            <a:spLocks noGrp="1"/>
-          </p:cNvSpPr>
-          <p:nvPr>
-            <p:ph type="title"/>
-          </p:nvPr>
-        </p:nvSpPr>
-        <p:spPr/>
-        <p:txBody>
-          <a:bodyPr/>
-          <a:lstStyle/>
-          <a:p>
-            <a:r>
-              <a:t>Security &amp; Access Control</a:t>
-            </a:r>
-          </a:p>
-        </p:txBody>
-      </p:sp>
-      <p:sp>
-        <p:nvSpPr>
-          <p:cNvPr id="3" name="Content Placeholder 2"/>
-          <p:cNvSpPr>
-            <a:spLocks noGrp="1"/>
-          </p:cNvSpPr>
-          <p:nvPr>
-            <p:ph idx="1"/>
-          </p:nvPr>
-        </p:nvSpPr>
-        <p:spPr/>
-        <p:txBody>
-          <a:bodyPr/>
-          <a:lstStyle/>
-          <a:p/>
+          <p:cNvPr id="2" name="Rectangle 1"/>
+          <p:cNvSpPr/>
+          <p:nvPr/>
+        </p:nvSpPr>
+        <p:spPr>
+          <a:xfrm>
+            <a:off x="0" y="0"/>
+            <a:ext cx="12191695" cy="1234440"/>
+          </a:xfrm>
+          <a:prstGeom prst="rect">
+            <a:avLst/>
+          </a:prstGeom>
+          <a:solidFill>
+            <a:srgbClr val="0F2A4C"/>
+          </a:solidFill>
+          <a:ln>
+            <a:noFill/>
+          </a:ln>
+          <a:effectLst/>
+        </p:spPr>
+        <p:style>
+          <a:lnRef idx="1">
+            <a:schemeClr val="accent1"/>
+          </a:lnRef>
+          <a:fillRef idx="3">
+            <a:schemeClr val="accent1"/>
+          </a:fillRef>
+          <a:effectRef idx="2">
+            <a:schemeClr val="accent1"/>
+          </a:effectRef>
+          <a:fontRef idx="minor">
+            <a:schemeClr val="lt1"/>
+          </a:fontRef>
+        </p:style>
+        <p:txBody>
+          <a:bodyPr rtlCol="0" anchor="ctr"/>
+          <a:lstStyle/>
+          <a:p>
+            <a:pPr algn="ctr"/>
+          </a:p>
+        </p:txBody>
+      </p:sp>
+      <p:sp>
+        <p:nvSpPr>
+          <p:cNvPr id="3" name="Rectangle 2"/>
+          <p:cNvSpPr/>
+          <p:nvPr/>
+        </p:nvSpPr>
+        <p:spPr>
+          <a:xfrm>
+            <a:off x="0" y="1234440"/>
+            <a:ext cx="12191695" cy="50800"/>
+          </a:xfrm>
+          <a:prstGeom prst="rect">
+            <a:avLst/>
+          </a:prstGeom>
+          <a:solidFill>
+            <a:srgbClr val="F2B418"/>
+          </a:solidFill>
+          <a:ln>
+            <a:noFill/>
+          </a:ln>
+          <a:effectLst/>
+        </p:spPr>
+        <p:style>
+          <a:lnRef idx="1">
+            <a:schemeClr val="accent1"/>
+          </a:lnRef>
+          <a:fillRef idx="3">
+            <a:schemeClr val="accent1"/>
+          </a:fillRef>
+          <a:effectRef idx="2">
+            <a:schemeClr val="accent1"/>
+          </a:effectRef>
+          <a:fontRef idx="minor">
+            <a:schemeClr val="lt1"/>
+          </a:fontRef>
+        </p:style>
+        <p:txBody>
+          <a:bodyPr rtlCol="0" anchor="ctr"/>
+          <a:lstStyle/>
+          <a:p>
+            <a:pPr algn="ctr"/>
+          </a:p>
         </p:txBody>
       </p:sp>
       <p:sp>
@@ -3817,8 +7717,8 @@
         </p:nvSpPr>
         <p:spPr>
           <a:xfrm>
-            <a:off x="914400" y="1371600"/>
-            <a:ext cx="10058400" cy="4572000"/>
+            <a:off x="640080" y="0"/>
+            <a:ext cx="8686800" cy="1234440"/>
           </a:xfrm>
           <a:prstGeom prst="rect">
             <a:avLst/>
@@ -3826,63 +7726,897 @@
           <a:noFill/>
         </p:spPr>
         <p:txBody>
-          <a:bodyPr wrap="square">
+          <a:bodyPr wrap="square" anchor="ctr" lIns="0" rIns="0" tIns="0" bIns="0">
             <a:spAutoFit/>
           </a:bodyPr>
           <a:lstStyle/>
           <a:p>
-            <a:pPr>
-              <a:spcAft>
-                <a:spcPts val="1200"/>
-              </a:spcAft>
-              <a:defRPr sz="1800"/>
+            <a:pPr algn="l"/>
+            <a:r>
+              <a:rPr sz="3000" b="1">
+                <a:solidFill>
+                  <a:srgbClr val="FFFFFF"/>
+                </a:solidFill>
+                <a:latin typeface="Calibri"/>
+              </a:rPr>
+              <a:t>Security &amp; Access Control</a:t>
+            </a:r>
+          </a:p>
+        </p:txBody>
+      </p:sp>
+      <p:sp>
+        <p:nvSpPr>
+          <p:cNvPr id="5" name="TextBox 4"/>
+          <p:cNvSpPr txBox="1"/>
+          <p:nvPr/>
+        </p:nvSpPr>
+        <p:spPr>
+          <a:xfrm>
+            <a:off x="8778240" y="0"/>
+            <a:ext cx="2834640" cy="1234440"/>
+          </a:xfrm>
+          <a:prstGeom prst="rect">
+            <a:avLst/>
+          </a:prstGeom>
+          <a:noFill/>
+        </p:spPr>
+        <p:txBody>
+          <a:bodyPr wrap="square" anchor="ctr" lIns="0" rIns="0" tIns="0" bIns="0">
+            <a:spAutoFit/>
+          </a:bodyPr>
+          <a:lstStyle/>
+          <a:p>
+            <a:pPr algn="r"/>
+            <a:r>
+              <a:rPr sz="1200" b="0">
+                <a:solidFill>
+                  <a:srgbClr val="C9D6E8"/>
+                </a:solidFill>
+                <a:latin typeface="Calibri"/>
+              </a:rPr>
+              <a:t>Data you can trust</a:t>
+            </a:r>
+          </a:p>
+        </p:txBody>
+      </p:sp>
+      <p:sp>
+        <p:nvSpPr>
+          <p:cNvPr id="6" name="Rectangle 5"/>
+          <p:cNvSpPr/>
+          <p:nvPr/>
+        </p:nvSpPr>
+        <p:spPr>
+          <a:xfrm>
+            <a:off x="11231575" y="0"/>
+            <a:ext cx="960120" cy="384048"/>
+          </a:xfrm>
+          <a:prstGeom prst="rect">
+            <a:avLst/>
+          </a:prstGeom>
+          <a:solidFill>
+            <a:srgbClr val="F2B418"/>
+          </a:solidFill>
+          <a:ln>
+            <a:noFill/>
+          </a:ln>
+          <a:effectLst/>
+        </p:spPr>
+        <p:style>
+          <a:lnRef idx="1">
+            <a:schemeClr val="accent1"/>
+          </a:lnRef>
+          <a:fillRef idx="3">
+            <a:schemeClr val="accent1"/>
+          </a:fillRef>
+          <a:effectRef idx="2">
+            <a:schemeClr val="accent1"/>
+          </a:effectRef>
+          <a:fontRef idx="minor">
+            <a:schemeClr val="lt1"/>
+          </a:fontRef>
+        </p:style>
+        <p:txBody>
+          <a:bodyPr rtlCol="0" anchor="ctr"/>
+          <a:lstStyle/>
+          <a:p>
+            <a:pPr algn="ctr"/>
+          </a:p>
+        </p:txBody>
+      </p:sp>
+      <p:sp>
+        <p:nvSpPr>
+          <p:cNvPr id="7" name="TextBox 6"/>
+          <p:cNvSpPr txBox="1"/>
+          <p:nvPr/>
+        </p:nvSpPr>
+        <p:spPr>
+          <a:xfrm>
+            <a:off x="11231575" y="0"/>
+            <a:ext cx="960120" cy="384048"/>
+          </a:xfrm>
+          <a:prstGeom prst="rect">
+            <a:avLst/>
+          </a:prstGeom>
+          <a:noFill/>
+        </p:spPr>
+        <p:txBody>
+          <a:bodyPr wrap="square" anchor="ctr" lIns="0" rIns="0" tIns="0" bIns="0">
+            <a:spAutoFit/>
+          </a:bodyPr>
+          <a:lstStyle/>
+          <a:p>
+            <a:pPr algn="ctr"/>
+            <a:r>
+              <a:rPr sz="1400" b="1">
+                <a:solidFill>
+                  <a:srgbClr val="0F2A4C"/>
+                </a:solidFill>
+                <a:latin typeface="Calibri"/>
+              </a:rPr>
+              <a:t>BC</a:t>
+            </a:r>
+          </a:p>
+        </p:txBody>
+      </p:sp>
+      <p:sp>
+        <p:nvSpPr>
+          <p:cNvPr id="8" name="Rounded Rectangle 7"/>
+          <p:cNvSpPr/>
+          <p:nvPr/>
+        </p:nvSpPr>
+        <p:spPr>
+          <a:xfrm>
+            <a:off x="731520" y="1554480"/>
+            <a:ext cx="5120640" cy="1234440"/>
+          </a:xfrm>
+          <a:prstGeom prst="roundRect">
+            <a:avLst/>
+          </a:prstGeom>
+          <a:solidFill>
+            <a:srgbClr val="FFFFFF"/>
+          </a:solidFill>
+          <a:ln>
+            <a:noFill/>
+          </a:ln>
+          <a:effectLst/>
+        </p:spPr>
+        <p:style>
+          <a:lnRef idx="1">
+            <a:schemeClr val="accent1"/>
+          </a:lnRef>
+          <a:fillRef idx="3">
+            <a:schemeClr val="accent1"/>
+          </a:fillRef>
+          <a:effectRef idx="2">
+            <a:schemeClr val="accent1"/>
+          </a:effectRef>
+          <a:fontRef idx="minor">
+            <a:schemeClr val="lt1"/>
+          </a:fontRef>
+        </p:style>
+        <p:txBody>
+          <a:bodyPr rtlCol="0" anchor="ctr"/>
+          <a:lstStyle/>
+          <a:p>
+            <a:pPr algn="ctr"/>
+          </a:p>
+        </p:txBody>
+      </p:sp>
+      <p:sp>
+        <p:nvSpPr>
+          <p:cNvPr id="9" name="Rectangle 8"/>
+          <p:cNvSpPr/>
+          <p:nvPr/>
+        </p:nvSpPr>
+        <p:spPr>
+          <a:xfrm>
+            <a:off x="731520" y="1554480"/>
+            <a:ext cx="82296" cy="1234440"/>
+          </a:xfrm>
+          <a:prstGeom prst="rect">
+            <a:avLst/>
+          </a:prstGeom>
+          <a:solidFill>
+            <a:srgbClr val="F2B418"/>
+          </a:solidFill>
+          <a:ln>
+            <a:noFill/>
+          </a:ln>
+          <a:effectLst/>
+        </p:spPr>
+        <p:style>
+          <a:lnRef idx="1">
+            <a:schemeClr val="accent1"/>
+          </a:lnRef>
+          <a:fillRef idx="3">
+            <a:schemeClr val="accent1"/>
+          </a:fillRef>
+          <a:effectRef idx="2">
+            <a:schemeClr val="accent1"/>
+          </a:effectRef>
+          <a:fontRef idx="minor">
+            <a:schemeClr val="lt1"/>
+          </a:fontRef>
+        </p:style>
+        <p:txBody>
+          <a:bodyPr rtlCol="0" anchor="ctr"/>
+          <a:lstStyle/>
+          <a:p>
+            <a:pPr algn="ctr"/>
+          </a:p>
+        </p:txBody>
+      </p:sp>
+      <p:sp>
+        <p:nvSpPr>
+          <p:cNvPr id="10" name="TextBox 9"/>
+          <p:cNvSpPr txBox="1"/>
+          <p:nvPr/>
+        </p:nvSpPr>
+        <p:spPr>
+          <a:xfrm>
+            <a:off x="1005840" y="1664208"/>
+            <a:ext cx="4663440" cy="411480"/>
+          </a:xfrm>
+          <a:prstGeom prst="rect">
+            <a:avLst/>
+          </a:prstGeom>
+          <a:noFill/>
+        </p:spPr>
+        <p:txBody>
+          <a:bodyPr wrap="square" anchor="ctr" lIns="0" rIns="0" tIns="0" bIns="0">
+            <a:spAutoFit/>
+          </a:bodyPr>
+          <a:lstStyle/>
+          <a:p>
+            <a:pPr algn="l"/>
+            <a:r>
+              <a:rPr sz="1500" b="1">
+                <a:solidFill>
+                  <a:srgbClr val="0F2A4C"/>
+                </a:solidFill>
+                <a:latin typeface="Calibri"/>
+              </a:rPr>
+              <a:t>Role-Based Access Control</a:t>
+            </a:r>
+          </a:p>
+        </p:txBody>
+      </p:sp>
+      <p:sp>
+        <p:nvSpPr>
+          <p:cNvPr id="11" name="TextBox 10"/>
+          <p:cNvSpPr txBox="1"/>
+          <p:nvPr/>
+        </p:nvSpPr>
+        <p:spPr>
+          <a:xfrm>
+            <a:off x="1005840" y="2029968"/>
+            <a:ext cx="4663440" cy="685800"/>
+          </a:xfrm>
+          <a:prstGeom prst="rect">
+            <a:avLst/>
+          </a:prstGeom>
+          <a:noFill/>
+        </p:spPr>
+        <p:txBody>
+          <a:bodyPr wrap="square" anchor="t" lIns="0" rIns="0" tIns="0" bIns="0">
+            <a:spAutoFit/>
+          </a:bodyPr>
+          <a:lstStyle/>
+          <a:p>
+            <a:pPr algn="l">
+              <a:lnSpc>
+                <a:spcPct val="110000"/>
+              </a:lnSpc>
             </a:pPr>
             <a:r>
-              <a:t>Role-Based Access Control (RBAC)</a:t>
-            </a:r>
-          </a:p>
-          <a:p>
-            <a:pPr>
-              <a:spcAft>
-                <a:spcPts val="1200"/>
-              </a:spcAft>
-              <a:defRPr sz="1800"/>
+              <a:rPr sz="1500" b="0">
+                <a:solidFill>
+                  <a:srgbClr val="243244"/>
+                </a:solidFill>
+                <a:latin typeface="Calibri"/>
+              </a:rPr>
+              <a:t>Six roles: Captain, Secretary, Treasurer, Kagawad, Staff, Resident.</a:t>
+            </a:r>
+          </a:p>
+        </p:txBody>
+      </p:sp>
+      <p:sp>
+        <p:nvSpPr>
+          <p:cNvPr id="12" name="Rounded Rectangle 11"/>
+          <p:cNvSpPr/>
+          <p:nvPr/>
+        </p:nvSpPr>
+        <p:spPr>
+          <a:xfrm>
+            <a:off x="6309360" y="1554480"/>
+            <a:ext cx="5120640" cy="1234440"/>
+          </a:xfrm>
+          <a:prstGeom prst="roundRect">
+            <a:avLst/>
+          </a:prstGeom>
+          <a:solidFill>
+            <a:srgbClr val="FFFFFF"/>
+          </a:solidFill>
+          <a:ln>
+            <a:noFill/>
+          </a:ln>
+          <a:effectLst/>
+        </p:spPr>
+        <p:style>
+          <a:lnRef idx="1">
+            <a:schemeClr val="accent1"/>
+          </a:lnRef>
+          <a:fillRef idx="3">
+            <a:schemeClr val="accent1"/>
+          </a:fillRef>
+          <a:effectRef idx="2">
+            <a:schemeClr val="accent1"/>
+          </a:effectRef>
+          <a:fontRef idx="minor">
+            <a:schemeClr val="lt1"/>
+          </a:fontRef>
+        </p:style>
+        <p:txBody>
+          <a:bodyPr rtlCol="0" anchor="ctr"/>
+          <a:lstStyle/>
+          <a:p>
+            <a:pPr algn="ctr"/>
+          </a:p>
+        </p:txBody>
+      </p:sp>
+      <p:sp>
+        <p:nvSpPr>
+          <p:cNvPr id="13" name="Rectangle 12"/>
+          <p:cNvSpPr/>
+          <p:nvPr/>
+        </p:nvSpPr>
+        <p:spPr>
+          <a:xfrm>
+            <a:off x="6309360" y="1554480"/>
+            <a:ext cx="82296" cy="1234440"/>
+          </a:xfrm>
+          <a:prstGeom prst="rect">
+            <a:avLst/>
+          </a:prstGeom>
+          <a:solidFill>
+            <a:srgbClr val="F2B418"/>
+          </a:solidFill>
+          <a:ln>
+            <a:noFill/>
+          </a:ln>
+          <a:effectLst/>
+        </p:spPr>
+        <p:style>
+          <a:lnRef idx="1">
+            <a:schemeClr val="accent1"/>
+          </a:lnRef>
+          <a:fillRef idx="3">
+            <a:schemeClr val="accent1"/>
+          </a:fillRef>
+          <a:effectRef idx="2">
+            <a:schemeClr val="accent1"/>
+          </a:effectRef>
+          <a:fontRef idx="minor">
+            <a:schemeClr val="lt1"/>
+          </a:fontRef>
+        </p:style>
+        <p:txBody>
+          <a:bodyPr rtlCol="0" anchor="ctr"/>
+          <a:lstStyle/>
+          <a:p>
+            <a:pPr algn="ctr"/>
+          </a:p>
+        </p:txBody>
+      </p:sp>
+      <p:sp>
+        <p:nvSpPr>
+          <p:cNvPr id="14" name="TextBox 13"/>
+          <p:cNvSpPr txBox="1"/>
+          <p:nvPr/>
+        </p:nvSpPr>
+        <p:spPr>
+          <a:xfrm>
+            <a:off x="6583680" y="1664208"/>
+            <a:ext cx="4663440" cy="411480"/>
+          </a:xfrm>
+          <a:prstGeom prst="rect">
+            <a:avLst/>
+          </a:prstGeom>
+          <a:noFill/>
+        </p:spPr>
+        <p:txBody>
+          <a:bodyPr wrap="square" anchor="ctr" lIns="0" rIns="0" tIns="0" bIns="0">
+            <a:spAutoFit/>
+          </a:bodyPr>
+          <a:lstStyle/>
+          <a:p>
+            <a:pPr algn="l"/>
+            <a:r>
+              <a:rPr sz="1500" b="1">
+                <a:solidFill>
+                  <a:srgbClr val="0F2A4C"/>
+                </a:solidFill>
+                <a:latin typeface="Calibri"/>
+              </a:rPr>
+              <a:t>Row-Level Security</a:t>
+            </a:r>
+          </a:p>
+        </p:txBody>
+      </p:sp>
+      <p:sp>
+        <p:nvSpPr>
+          <p:cNvPr id="15" name="TextBox 14"/>
+          <p:cNvSpPr txBox="1"/>
+          <p:nvPr/>
+        </p:nvSpPr>
+        <p:spPr>
+          <a:xfrm>
+            <a:off x="6583680" y="2029968"/>
+            <a:ext cx="4663440" cy="685800"/>
+          </a:xfrm>
+          <a:prstGeom prst="rect">
+            <a:avLst/>
+          </a:prstGeom>
+          <a:noFill/>
+        </p:spPr>
+        <p:txBody>
+          <a:bodyPr wrap="square" anchor="t" lIns="0" rIns="0" tIns="0" bIns="0">
+            <a:spAutoFit/>
+          </a:bodyPr>
+          <a:lstStyle/>
+          <a:p>
+            <a:pPr algn="l">
+              <a:lnSpc>
+                <a:spcPct val="110000"/>
+              </a:lnSpc>
             </a:pPr>
             <a:r>
-              <a:t>Roles: Captain, Secretary, Treasurer, Kagawad, Staff, Resident</a:t>
-            </a:r>
-          </a:p>
-          <a:p>
-            <a:pPr>
-              <a:spcAft>
-                <a:spcPts val="1200"/>
-              </a:spcAft>
-              <a:defRPr sz="1800"/>
+              <a:rPr sz="1500" b="0">
+                <a:solidFill>
+                  <a:srgbClr val="243244"/>
+                </a:solidFill>
+                <a:latin typeface="Calibri"/>
+              </a:rPr>
+              <a:t>Database RLS policies protect every table and record.</a:t>
+            </a:r>
+          </a:p>
+        </p:txBody>
+      </p:sp>
+      <p:sp>
+        <p:nvSpPr>
+          <p:cNvPr id="16" name="Rounded Rectangle 15"/>
+          <p:cNvSpPr/>
+          <p:nvPr/>
+        </p:nvSpPr>
+        <p:spPr>
+          <a:xfrm>
+            <a:off x="731520" y="3108960"/>
+            <a:ext cx="5120640" cy="1234440"/>
+          </a:xfrm>
+          <a:prstGeom prst="roundRect">
+            <a:avLst/>
+          </a:prstGeom>
+          <a:solidFill>
+            <a:srgbClr val="FFFFFF"/>
+          </a:solidFill>
+          <a:ln>
+            <a:noFill/>
+          </a:ln>
+          <a:effectLst/>
+        </p:spPr>
+        <p:style>
+          <a:lnRef idx="1">
+            <a:schemeClr val="accent1"/>
+          </a:lnRef>
+          <a:fillRef idx="3">
+            <a:schemeClr val="accent1"/>
+          </a:fillRef>
+          <a:effectRef idx="2">
+            <a:schemeClr val="accent1"/>
+          </a:effectRef>
+          <a:fontRef idx="minor">
+            <a:schemeClr val="lt1"/>
+          </a:fontRef>
+        </p:style>
+        <p:txBody>
+          <a:bodyPr rtlCol="0" anchor="ctr"/>
+          <a:lstStyle/>
+          <a:p>
+            <a:pPr algn="ctr"/>
+          </a:p>
+        </p:txBody>
+      </p:sp>
+      <p:sp>
+        <p:nvSpPr>
+          <p:cNvPr id="17" name="Rectangle 16"/>
+          <p:cNvSpPr/>
+          <p:nvPr/>
+        </p:nvSpPr>
+        <p:spPr>
+          <a:xfrm>
+            <a:off x="731520" y="3108960"/>
+            <a:ext cx="82296" cy="1234440"/>
+          </a:xfrm>
+          <a:prstGeom prst="rect">
+            <a:avLst/>
+          </a:prstGeom>
+          <a:solidFill>
+            <a:srgbClr val="F2B418"/>
+          </a:solidFill>
+          <a:ln>
+            <a:noFill/>
+          </a:ln>
+          <a:effectLst/>
+        </p:spPr>
+        <p:style>
+          <a:lnRef idx="1">
+            <a:schemeClr val="accent1"/>
+          </a:lnRef>
+          <a:fillRef idx="3">
+            <a:schemeClr val="accent1"/>
+          </a:fillRef>
+          <a:effectRef idx="2">
+            <a:schemeClr val="accent1"/>
+          </a:effectRef>
+          <a:fontRef idx="minor">
+            <a:schemeClr val="lt1"/>
+          </a:fontRef>
+        </p:style>
+        <p:txBody>
+          <a:bodyPr rtlCol="0" anchor="ctr"/>
+          <a:lstStyle/>
+          <a:p>
+            <a:pPr algn="ctr"/>
+          </a:p>
+        </p:txBody>
+      </p:sp>
+      <p:sp>
+        <p:nvSpPr>
+          <p:cNvPr id="18" name="TextBox 17"/>
+          <p:cNvSpPr txBox="1"/>
+          <p:nvPr/>
+        </p:nvSpPr>
+        <p:spPr>
+          <a:xfrm>
+            <a:off x="1005840" y="3218688"/>
+            <a:ext cx="4663440" cy="411480"/>
+          </a:xfrm>
+          <a:prstGeom prst="rect">
+            <a:avLst/>
+          </a:prstGeom>
+          <a:noFill/>
+        </p:spPr>
+        <p:txBody>
+          <a:bodyPr wrap="square" anchor="ctr" lIns="0" rIns="0" tIns="0" bIns="0">
+            <a:spAutoFit/>
+          </a:bodyPr>
+          <a:lstStyle/>
+          <a:p>
+            <a:pPr algn="l"/>
+            <a:r>
+              <a:rPr sz="1500" b="1">
+                <a:solidFill>
+                  <a:srgbClr val="0F2A4C"/>
+                </a:solidFill>
+                <a:latin typeface="Calibri"/>
+              </a:rPr>
+              <a:t>Audit Logging</a:t>
+            </a:r>
+          </a:p>
+        </p:txBody>
+      </p:sp>
+      <p:sp>
+        <p:nvSpPr>
+          <p:cNvPr id="19" name="TextBox 18"/>
+          <p:cNvSpPr txBox="1"/>
+          <p:nvPr/>
+        </p:nvSpPr>
+        <p:spPr>
+          <a:xfrm>
+            <a:off x="1005840" y="3584448"/>
+            <a:ext cx="4663440" cy="685800"/>
+          </a:xfrm>
+          <a:prstGeom prst="rect">
+            <a:avLst/>
+          </a:prstGeom>
+          <a:noFill/>
+        </p:spPr>
+        <p:txBody>
+          <a:bodyPr wrap="square" anchor="t" lIns="0" rIns="0" tIns="0" bIns="0">
+            <a:spAutoFit/>
+          </a:bodyPr>
+          <a:lstStyle/>
+          <a:p>
+            <a:pPr algn="l">
+              <a:lnSpc>
+                <a:spcPct val="110000"/>
+              </a:lnSpc>
             </a:pPr>
             <a:r>
-              <a:t>Row Level Security (RLS) on all database tables</a:t>
-            </a:r>
-          </a:p>
-          <a:p>
-            <a:pPr>
-              <a:spcAft>
-                <a:spcPts val="1200"/>
-              </a:spcAft>
-              <a:defRPr sz="1800"/>
+              <a:rPr sz="1500" b="0">
+                <a:solidFill>
+                  <a:srgbClr val="243244"/>
+                </a:solidFill>
+                <a:latin typeface="Calibri"/>
+              </a:rPr>
+              <a:t>Administrative activity trail, server-side only.</a:t>
+            </a:r>
+          </a:p>
+        </p:txBody>
+      </p:sp>
+      <p:sp>
+        <p:nvSpPr>
+          <p:cNvPr id="20" name="Rounded Rectangle 19"/>
+          <p:cNvSpPr/>
+          <p:nvPr/>
+        </p:nvSpPr>
+        <p:spPr>
+          <a:xfrm>
+            <a:off x="6309360" y="3108960"/>
+            <a:ext cx="5120640" cy="1234440"/>
+          </a:xfrm>
+          <a:prstGeom prst="roundRect">
+            <a:avLst/>
+          </a:prstGeom>
+          <a:solidFill>
+            <a:srgbClr val="FFFFFF"/>
+          </a:solidFill>
+          <a:ln>
+            <a:noFill/>
+          </a:ln>
+          <a:effectLst/>
+        </p:spPr>
+        <p:style>
+          <a:lnRef idx="1">
+            <a:schemeClr val="accent1"/>
+          </a:lnRef>
+          <a:fillRef idx="3">
+            <a:schemeClr val="accent1"/>
+          </a:fillRef>
+          <a:effectRef idx="2">
+            <a:schemeClr val="accent1"/>
+          </a:effectRef>
+          <a:fontRef idx="minor">
+            <a:schemeClr val="lt1"/>
+          </a:fontRef>
+        </p:style>
+        <p:txBody>
+          <a:bodyPr rtlCol="0" anchor="ctr"/>
+          <a:lstStyle/>
+          <a:p>
+            <a:pPr algn="ctr"/>
+          </a:p>
+        </p:txBody>
+      </p:sp>
+      <p:sp>
+        <p:nvSpPr>
+          <p:cNvPr id="21" name="Rectangle 20"/>
+          <p:cNvSpPr/>
+          <p:nvPr/>
+        </p:nvSpPr>
+        <p:spPr>
+          <a:xfrm>
+            <a:off x="6309360" y="3108960"/>
+            <a:ext cx="82296" cy="1234440"/>
+          </a:xfrm>
+          <a:prstGeom prst="rect">
+            <a:avLst/>
+          </a:prstGeom>
+          <a:solidFill>
+            <a:srgbClr val="F2B418"/>
+          </a:solidFill>
+          <a:ln>
+            <a:noFill/>
+          </a:ln>
+          <a:effectLst/>
+        </p:spPr>
+        <p:style>
+          <a:lnRef idx="1">
+            <a:schemeClr val="accent1"/>
+          </a:lnRef>
+          <a:fillRef idx="3">
+            <a:schemeClr val="accent1"/>
+          </a:fillRef>
+          <a:effectRef idx="2">
+            <a:schemeClr val="accent1"/>
+          </a:effectRef>
+          <a:fontRef idx="minor">
+            <a:schemeClr val="lt1"/>
+          </a:fontRef>
+        </p:style>
+        <p:txBody>
+          <a:bodyPr rtlCol="0" anchor="ctr"/>
+          <a:lstStyle/>
+          <a:p>
+            <a:pPr algn="ctr"/>
+          </a:p>
+        </p:txBody>
+      </p:sp>
+      <p:sp>
+        <p:nvSpPr>
+          <p:cNvPr id="22" name="TextBox 21"/>
+          <p:cNvSpPr txBox="1"/>
+          <p:nvPr/>
+        </p:nvSpPr>
+        <p:spPr>
+          <a:xfrm>
+            <a:off x="6583680" y="3218688"/>
+            <a:ext cx="4663440" cy="411480"/>
+          </a:xfrm>
+          <a:prstGeom prst="rect">
+            <a:avLst/>
+          </a:prstGeom>
+          <a:noFill/>
+        </p:spPr>
+        <p:txBody>
+          <a:bodyPr wrap="square" anchor="ctr" lIns="0" rIns="0" tIns="0" bIns="0">
+            <a:spAutoFit/>
+          </a:bodyPr>
+          <a:lstStyle/>
+          <a:p>
+            <a:pPr algn="l"/>
+            <a:r>
+              <a:rPr sz="1500" b="1">
+                <a:solidFill>
+                  <a:srgbClr val="0F2A4C"/>
+                </a:solidFill>
+                <a:latin typeface="Calibri"/>
+              </a:rPr>
+              <a:t>Secure Storage</a:t>
+            </a:r>
+          </a:p>
+        </p:txBody>
+      </p:sp>
+      <p:sp>
+        <p:nvSpPr>
+          <p:cNvPr id="23" name="TextBox 22"/>
+          <p:cNvSpPr txBox="1"/>
+          <p:nvPr/>
+        </p:nvSpPr>
+        <p:spPr>
+          <a:xfrm>
+            <a:off x="6583680" y="3584448"/>
+            <a:ext cx="4663440" cy="685800"/>
+          </a:xfrm>
+          <a:prstGeom prst="rect">
+            <a:avLst/>
+          </a:prstGeom>
+          <a:noFill/>
+        </p:spPr>
+        <p:txBody>
+          <a:bodyPr wrap="square" anchor="t" lIns="0" rIns="0" tIns="0" bIns="0">
+            <a:spAutoFit/>
+          </a:bodyPr>
+          <a:lstStyle/>
+          <a:p>
+            <a:pPr algn="l">
+              <a:lnSpc>
+                <a:spcPct val="110000"/>
+              </a:lnSpc>
             </a:pPr>
             <a:r>
-              <a:t>Audit Logging for admin activities</a:t>
-            </a:r>
-          </a:p>
-          <a:p>
-            <a:pPr>
-              <a:spcAft>
-                <a:spcPts val="1200"/>
-              </a:spcAft>
-              <a:defRPr sz="1800"/>
-            </a:pPr>
-            <a:r>
-              <a:t>Secure Storage for Documents &amp; Photos</a:t>
+              <a:rPr sz="1500" b="0">
+                <a:solidFill>
+                  <a:srgbClr val="243244"/>
+                </a:solidFill>
+                <a:latin typeface="Calibri"/>
+              </a:rPr>
+              <a:t>Protected buckets for documents and photos with file validation.</a:t>
+            </a:r>
+          </a:p>
+        </p:txBody>
+      </p:sp>
+      <p:sp>
+        <p:nvSpPr>
+          <p:cNvPr id="24" name="Rounded Rectangle 23"/>
+          <p:cNvSpPr/>
+          <p:nvPr/>
+        </p:nvSpPr>
+        <p:spPr>
+          <a:xfrm>
+            <a:off x="3657600" y="4572000"/>
+            <a:ext cx="4846320" cy="1737360"/>
+          </a:xfrm>
+          <a:prstGeom prst="roundRect">
+            <a:avLst/>
+          </a:prstGeom>
+          <a:solidFill>
+            <a:srgbClr val="163A63"/>
+          </a:solidFill>
+          <a:ln>
+            <a:noFill/>
+          </a:ln>
+          <a:effectLst/>
+        </p:spPr>
+        <p:style>
+          <a:lnRef idx="1">
+            <a:schemeClr val="accent1"/>
+          </a:lnRef>
+          <a:fillRef idx="3">
+            <a:schemeClr val="accent1"/>
+          </a:fillRef>
+          <a:effectRef idx="2">
+            <a:schemeClr val="accent1"/>
+          </a:effectRef>
+          <a:fontRef idx="minor">
+            <a:schemeClr val="lt1"/>
+          </a:fontRef>
+        </p:style>
+        <p:txBody>
+          <a:bodyPr rtlCol="0" anchor="ctr"/>
+          <a:lstStyle/>
+          <a:p>
+            <a:pPr algn="ctr"/>
+          </a:p>
+        </p:txBody>
+      </p:sp>
+      <p:sp>
+        <p:nvSpPr>
+          <p:cNvPr id="25" name="TextBox 24"/>
+          <p:cNvSpPr txBox="1"/>
+          <p:nvPr/>
+        </p:nvSpPr>
+        <p:spPr>
+          <a:xfrm>
+            <a:off x="3657600" y="4754880"/>
+            <a:ext cx="4846320" cy="457200"/>
+          </a:xfrm>
+          <a:prstGeom prst="rect">
+            <a:avLst/>
+          </a:prstGeom>
+          <a:noFill/>
+        </p:spPr>
+        <p:txBody>
+          <a:bodyPr wrap="square" anchor="ctr" lIns="0" rIns="0" tIns="0" bIns="0">
+            <a:spAutoFit/>
+          </a:bodyPr>
+          <a:lstStyle/>
+          <a:p>
+            <a:pPr algn="ctr"/>
+            <a:r>
+              <a:rPr sz="1800" b="1">
+                <a:solidFill>
+                  <a:srgbClr val="F2B418"/>
+                </a:solidFill>
+                <a:latin typeface="Calibri"/>
+              </a:rPr>
+              <a:t>DEFENSE IN DEPTH</a:t>
+            </a:r>
+          </a:p>
+        </p:txBody>
+      </p:sp>
+      <p:sp>
+        <p:nvSpPr>
+          <p:cNvPr id="26" name="TextBox 25"/>
+          <p:cNvSpPr txBox="1"/>
+          <p:nvPr/>
+        </p:nvSpPr>
+        <p:spPr>
+          <a:xfrm>
+            <a:off x="4023360" y="5303520"/>
+            <a:ext cx="4114800" cy="822960"/>
+          </a:xfrm>
+          <a:prstGeom prst="rect">
+            <a:avLst/>
+          </a:prstGeom>
+          <a:noFill/>
+        </p:spPr>
+        <p:txBody>
+          <a:bodyPr wrap="square" anchor="ctr" lIns="0" rIns="0" tIns="0" bIns="0">
+            <a:spAutoFit/>
+          </a:bodyPr>
+          <a:lstStyle/>
+          <a:p>
+            <a:pPr algn="ctr"/>
+            <a:r>
+              <a:rPr sz="1400" b="0">
+                <a:solidFill>
+                  <a:srgbClr val="FFFFFF"/>
+                </a:solidFill>
+                <a:latin typeface="Calibri"/>
+              </a:rPr>
+              <a:t>Public QR verification for issued certificates, secure uploads,
+and scoped resident data access.</a:t>
             </a:r>
           </a:p>
         </p:txBody>
@@ -3907,40 +8641,90 @@
       <p:grpSpPr/>
       <p:sp>
         <p:nvSpPr>
-          <p:cNvPr id="2" name="Title 1"/>
-          <p:cNvSpPr>
-            <a:spLocks noGrp="1"/>
-          </p:cNvSpPr>
-          <p:nvPr>
-            <p:ph type="title"/>
-          </p:nvPr>
-        </p:nvSpPr>
-        <p:spPr/>
-        <p:txBody>
-          <a:bodyPr/>
-          <a:lstStyle/>
-          <a:p>
-            <a:r>
-              <a:t>Tech Stack</a:t>
-            </a:r>
-          </a:p>
-        </p:txBody>
-      </p:sp>
-      <p:sp>
-        <p:nvSpPr>
-          <p:cNvPr id="3" name="Content Placeholder 2"/>
-          <p:cNvSpPr>
-            <a:spLocks noGrp="1"/>
-          </p:cNvSpPr>
-          <p:nvPr>
-            <p:ph idx="1"/>
-          </p:nvPr>
-        </p:nvSpPr>
-        <p:spPr/>
-        <p:txBody>
-          <a:bodyPr/>
-          <a:lstStyle/>
-          <a:p/>
+          <p:cNvPr id="2" name="Rectangle 1"/>
+          <p:cNvSpPr/>
+          <p:nvPr/>
+        </p:nvSpPr>
+        <p:spPr>
+          <a:xfrm>
+            <a:off x="0" y="0"/>
+            <a:ext cx="12191695" cy="1234440"/>
+          </a:xfrm>
+          <a:prstGeom prst="rect">
+            <a:avLst/>
+          </a:prstGeom>
+          <a:solidFill>
+            <a:srgbClr val="0F2A4C"/>
+          </a:solidFill>
+          <a:ln>
+            <a:noFill/>
+          </a:ln>
+          <a:effectLst/>
+        </p:spPr>
+        <p:style>
+          <a:lnRef idx="1">
+            <a:schemeClr val="accent1"/>
+          </a:lnRef>
+          <a:fillRef idx="3">
+            <a:schemeClr val="accent1"/>
+          </a:fillRef>
+          <a:effectRef idx="2">
+            <a:schemeClr val="accent1"/>
+          </a:effectRef>
+          <a:fontRef idx="minor">
+            <a:schemeClr val="lt1"/>
+          </a:fontRef>
+        </p:style>
+        <p:txBody>
+          <a:bodyPr rtlCol="0" anchor="ctr"/>
+          <a:lstStyle/>
+          <a:p>
+            <a:pPr algn="ctr"/>
+          </a:p>
+        </p:txBody>
+      </p:sp>
+      <p:sp>
+        <p:nvSpPr>
+          <p:cNvPr id="3" name="Rectangle 2"/>
+          <p:cNvSpPr/>
+          <p:nvPr/>
+        </p:nvSpPr>
+        <p:spPr>
+          <a:xfrm>
+            <a:off x="0" y="1234440"/>
+            <a:ext cx="12191695" cy="50800"/>
+          </a:xfrm>
+          <a:prstGeom prst="rect">
+            <a:avLst/>
+          </a:prstGeom>
+          <a:solidFill>
+            <a:srgbClr val="F2B418"/>
+          </a:solidFill>
+          <a:ln>
+            <a:noFill/>
+          </a:ln>
+          <a:effectLst/>
+        </p:spPr>
+        <p:style>
+          <a:lnRef idx="1">
+            <a:schemeClr val="accent1"/>
+          </a:lnRef>
+          <a:fillRef idx="3">
+            <a:schemeClr val="accent1"/>
+          </a:fillRef>
+          <a:effectRef idx="2">
+            <a:schemeClr val="accent1"/>
+          </a:effectRef>
+          <a:fontRef idx="minor">
+            <a:schemeClr val="lt1"/>
+          </a:fontRef>
+        </p:style>
+        <p:txBody>
+          <a:bodyPr rtlCol="0" anchor="ctr"/>
+          <a:lstStyle/>
+          <a:p>
+            <a:pPr algn="ctr"/>
+          </a:p>
         </p:txBody>
       </p:sp>
       <p:sp>
@@ -3951,8 +8735,8 @@
         </p:nvSpPr>
         <p:spPr>
           <a:xfrm>
-            <a:off x="914400" y="1371600"/>
-            <a:ext cx="10058400" cy="4572000"/>
+            <a:off x="640080" y="0"/>
+            <a:ext cx="8686800" cy="1234440"/>
           </a:xfrm>
           <a:prstGeom prst="rect">
             <a:avLst/>
@@ -3960,96 +8744,1106 @@
           <a:noFill/>
         </p:spPr>
         <p:txBody>
-          <a:bodyPr wrap="square">
+          <a:bodyPr wrap="square" anchor="ctr" lIns="0" rIns="0" tIns="0" bIns="0">
             <a:spAutoFit/>
           </a:bodyPr>
           <a:lstStyle/>
           <a:p>
-            <a:pPr>
-              <a:spcAft>
-                <a:spcPts val="1200"/>
-              </a:spcAft>
-              <a:defRPr sz="1800"/>
+            <a:pPr algn="l"/>
+            <a:r>
+              <a:rPr sz="3000" b="1">
+                <a:solidFill>
+                  <a:srgbClr val="FFFFFF"/>
+                </a:solidFill>
+                <a:latin typeface="Calibri"/>
+              </a:rPr>
+              <a:t>Tech Stack</a:t>
+            </a:r>
+          </a:p>
+        </p:txBody>
+      </p:sp>
+      <p:sp>
+        <p:nvSpPr>
+          <p:cNvPr id="5" name="TextBox 4"/>
+          <p:cNvSpPr txBox="1"/>
+          <p:nvPr/>
+        </p:nvSpPr>
+        <p:spPr>
+          <a:xfrm>
+            <a:off x="8778240" y="0"/>
+            <a:ext cx="2834640" cy="1234440"/>
+          </a:xfrm>
+          <a:prstGeom prst="rect">
+            <a:avLst/>
+          </a:prstGeom>
+          <a:noFill/>
+        </p:spPr>
+        <p:txBody>
+          <a:bodyPr wrap="square" anchor="ctr" lIns="0" rIns="0" tIns="0" bIns="0">
+            <a:spAutoFit/>
+          </a:bodyPr>
+          <a:lstStyle/>
+          <a:p>
+            <a:pPr algn="r"/>
+            <a:r>
+              <a:rPr sz="1200" b="0">
+                <a:solidFill>
+                  <a:srgbClr val="C9D6E8"/>
+                </a:solidFill>
+                <a:latin typeface="Calibri"/>
+              </a:rPr>
+              <a:t>Modern, proven technology</a:t>
+            </a:r>
+          </a:p>
+        </p:txBody>
+      </p:sp>
+      <p:sp>
+        <p:nvSpPr>
+          <p:cNvPr id="6" name="Rectangle 5"/>
+          <p:cNvSpPr/>
+          <p:nvPr/>
+        </p:nvSpPr>
+        <p:spPr>
+          <a:xfrm>
+            <a:off x="11231575" y="0"/>
+            <a:ext cx="960120" cy="384048"/>
+          </a:xfrm>
+          <a:prstGeom prst="rect">
+            <a:avLst/>
+          </a:prstGeom>
+          <a:solidFill>
+            <a:srgbClr val="F2B418"/>
+          </a:solidFill>
+          <a:ln>
+            <a:noFill/>
+          </a:ln>
+          <a:effectLst/>
+        </p:spPr>
+        <p:style>
+          <a:lnRef idx="1">
+            <a:schemeClr val="accent1"/>
+          </a:lnRef>
+          <a:fillRef idx="3">
+            <a:schemeClr val="accent1"/>
+          </a:fillRef>
+          <a:effectRef idx="2">
+            <a:schemeClr val="accent1"/>
+          </a:effectRef>
+          <a:fontRef idx="minor">
+            <a:schemeClr val="lt1"/>
+          </a:fontRef>
+        </p:style>
+        <p:txBody>
+          <a:bodyPr rtlCol="0" anchor="ctr"/>
+          <a:lstStyle/>
+          <a:p>
+            <a:pPr algn="ctr"/>
+          </a:p>
+        </p:txBody>
+      </p:sp>
+      <p:sp>
+        <p:nvSpPr>
+          <p:cNvPr id="7" name="TextBox 6"/>
+          <p:cNvSpPr txBox="1"/>
+          <p:nvPr/>
+        </p:nvSpPr>
+        <p:spPr>
+          <a:xfrm>
+            <a:off x="11231575" y="0"/>
+            <a:ext cx="960120" cy="384048"/>
+          </a:xfrm>
+          <a:prstGeom prst="rect">
+            <a:avLst/>
+          </a:prstGeom>
+          <a:noFill/>
+        </p:spPr>
+        <p:txBody>
+          <a:bodyPr wrap="square" anchor="ctr" lIns="0" rIns="0" tIns="0" bIns="0">
+            <a:spAutoFit/>
+          </a:bodyPr>
+          <a:lstStyle/>
+          <a:p>
+            <a:pPr algn="ctr"/>
+            <a:r>
+              <a:rPr sz="1400" b="1">
+                <a:solidFill>
+                  <a:srgbClr val="0F2A4C"/>
+                </a:solidFill>
+                <a:latin typeface="Calibri"/>
+              </a:rPr>
+              <a:t>BC</a:t>
+            </a:r>
+          </a:p>
+        </p:txBody>
+      </p:sp>
+      <p:sp>
+        <p:nvSpPr>
+          <p:cNvPr id="8" name="Rounded Rectangle 7"/>
+          <p:cNvSpPr/>
+          <p:nvPr/>
+        </p:nvSpPr>
+        <p:spPr>
+          <a:xfrm>
+            <a:off x="731520" y="1600200"/>
+            <a:ext cx="5120640" cy="1280160"/>
+          </a:xfrm>
+          <a:prstGeom prst="roundRect">
+            <a:avLst/>
+          </a:prstGeom>
+          <a:solidFill>
+            <a:srgbClr val="FFFFFF"/>
+          </a:solidFill>
+          <a:ln>
+            <a:noFill/>
+          </a:ln>
+          <a:effectLst/>
+        </p:spPr>
+        <p:style>
+          <a:lnRef idx="1">
+            <a:schemeClr val="accent1"/>
+          </a:lnRef>
+          <a:fillRef idx="3">
+            <a:schemeClr val="accent1"/>
+          </a:fillRef>
+          <a:effectRef idx="2">
+            <a:schemeClr val="accent1"/>
+          </a:effectRef>
+          <a:fontRef idx="minor">
+            <a:schemeClr val="lt1"/>
+          </a:fontRef>
+        </p:style>
+        <p:txBody>
+          <a:bodyPr rtlCol="0" anchor="ctr"/>
+          <a:lstStyle/>
+          <a:p>
+            <a:pPr algn="ctr"/>
+          </a:p>
+        </p:txBody>
+      </p:sp>
+      <p:sp>
+        <p:nvSpPr>
+          <p:cNvPr id="9" name="Rectangle 8"/>
+          <p:cNvSpPr/>
+          <p:nvPr/>
+        </p:nvSpPr>
+        <p:spPr>
+          <a:xfrm>
+            <a:off x="731520" y="1600200"/>
+            <a:ext cx="82296" cy="1280160"/>
+          </a:xfrm>
+          <a:prstGeom prst="rect">
+            <a:avLst/>
+          </a:prstGeom>
+          <a:solidFill>
+            <a:srgbClr val="F2B418"/>
+          </a:solidFill>
+          <a:ln>
+            <a:noFill/>
+          </a:ln>
+          <a:effectLst/>
+        </p:spPr>
+        <p:style>
+          <a:lnRef idx="1">
+            <a:schemeClr val="accent1"/>
+          </a:lnRef>
+          <a:fillRef idx="3">
+            <a:schemeClr val="accent1"/>
+          </a:fillRef>
+          <a:effectRef idx="2">
+            <a:schemeClr val="accent1"/>
+          </a:effectRef>
+          <a:fontRef idx="minor">
+            <a:schemeClr val="lt1"/>
+          </a:fontRef>
+        </p:style>
+        <p:txBody>
+          <a:bodyPr rtlCol="0" anchor="ctr"/>
+          <a:lstStyle/>
+          <a:p>
+            <a:pPr algn="ctr"/>
+          </a:p>
+        </p:txBody>
+      </p:sp>
+      <p:sp>
+        <p:nvSpPr>
+          <p:cNvPr id="10" name="TextBox 9"/>
+          <p:cNvSpPr txBox="1"/>
+          <p:nvPr/>
+        </p:nvSpPr>
+        <p:spPr>
+          <a:xfrm>
+            <a:off x="1005840" y="1709928"/>
+            <a:ext cx="4663440" cy="411480"/>
+          </a:xfrm>
+          <a:prstGeom prst="rect">
+            <a:avLst/>
+          </a:prstGeom>
+          <a:noFill/>
+        </p:spPr>
+        <p:txBody>
+          <a:bodyPr wrap="square" anchor="ctr" lIns="0" rIns="0" tIns="0" bIns="0">
+            <a:spAutoFit/>
+          </a:bodyPr>
+          <a:lstStyle/>
+          <a:p>
+            <a:pPr algn="l"/>
+            <a:r>
+              <a:rPr sz="1500" b="1">
+                <a:solidFill>
+                  <a:srgbClr val="0F2A4C"/>
+                </a:solidFill>
+                <a:latin typeface="Calibri"/>
+              </a:rPr>
+              <a:t>Frontend</a:t>
+            </a:r>
+          </a:p>
+        </p:txBody>
+      </p:sp>
+      <p:sp>
+        <p:nvSpPr>
+          <p:cNvPr id="11" name="TextBox 10"/>
+          <p:cNvSpPr txBox="1"/>
+          <p:nvPr/>
+        </p:nvSpPr>
+        <p:spPr>
+          <a:xfrm>
+            <a:off x="1005840" y="2075688"/>
+            <a:ext cx="4663440" cy="731520"/>
+          </a:xfrm>
+          <a:prstGeom prst="rect">
+            <a:avLst/>
+          </a:prstGeom>
+          <a:noFill/>
+        </p:spPr>
+        <p:txBody>
+          <a:bodyPr wrap="square" anchor="t" lIns="0" rIns="0" tIns="0" bIns="0">
+            <a:spAutoFit/>
+          </a:bodyPr>
+          <a:lstStyle/>
+          <a:p>
+            <a:pPr algn="l">
+              <a:lnSpc>
+                <a:spcPct val="110000"/>
+              </a:lnSpc>
             </a:pPr>
             <a:r>
-              <a:t>Framework: Next.js 16 (App Router, Turbopack)</a:t>
-            </a:r>
-          </a:p>
-          <a:p>
-            <a:pPr>
-              <a:spcAft>
-                <a:spcPts val="1200"/>
-              </a:spcAft>
-              <a:defRPr sz="1800"/>
+              <a:rPr sz="1500" b="0">
+                <a:solidFill>
+                  <a:srgbClr val="243244"/>
+                </a:solidFill>
+                <a:latin typeface="Calibri"/>
+              </a:rPr>
+              <a:t>Next.js 16 · TypeScript · Tailwind CSS v4</a:t>
+            </a:r>
+          </a:p>
+        </p:txBody>
+      </p:sp>
+      <p:sp>
+        <p:nvSpPr>
+          <p:cNvPr id="12" name="Rounded Rectangle 11"/>
+          <p:cNvSpPr/>
+          <p:nvPr/>
+        </p:nvSpPr>
+        <p:spPr>
+          <a:xfrm>
+            <a:off x="6309360" y="1600200"/>
+            <a:ext cx="5120640" cy="1280160"/>
+          </a:xfrm>
+          <a:prstGeom prst="roundRect">
+            <a:avLst/>
+          </a:prstGeom>
+          <a:solidFill>
+            <a:srgbClr val="FFFFFF"/>
+          </a:solidFill>
+          <a:ln>
+            <a:noFill/>
+          </a:ln>
+          <a:effectLst/>
+        </p:spPr>
+        <p:style>
+          <a:lnRef idx="1">
+            <a:schemeClr val="accent1"/>
+          </a:lnRef>
+          <a:fillRef idx="3">
+            <a:schemeClr val="accent1"/>
+          </a:fillRef>
+          <a:effectRef idx="2">
+            <a:schemeClr val="accent1"/>
+          </a:effectRef>
+          <a:fontRef idx="minor">
+            <a:schemeClr val="lt1"/>
+          </a:fontRef>
+        </p:style>
+        <p:txBody>
+          <a:bodyPr rtlCol="0" anchor="ctr"/>
+          <a:lstStyle/>
+          <a:p>
+            <a:pPr algn="ctr"/>
+          </a:p>
+        </p:txBody>
+      </p:sp>
+      <p:sp>
+        <p:nvSpPr>
+          <p:cNvPr id="13" name="Rectangle 12"/>
+          <p:cNvSpPr/>
+          <p:nvPr/>
+        </p:nvSpPr>
+        <p:spPr>
+          <a:xfrm>
+            <a:off x="6309360" y="1600200"/>
+            <a:ext cx="82296" cy="1280160"/>
+          </a:xfrm>
+          <a:prstGeom prst="rect">
+            <a:avLst/>
+          </a:prstGeom>
+          <a:solidFill>
+            <a:srgbClr val="F2B418"/>
+          </a:solidFill>
+          <a:ln>
+            <a:noFill/>
+          </a:ln>
+          <a:effectLst/>
+        </p:spPr>
+        <p:style>
+          <a:lnRef idx="1">
+            <a:schemeClr val="accent1"/>
+          </a:lnRef>
+          <a:fillRef idx="3">
+            <a:schemeClr val="accent1"/>
+          </a:fillRef>
+          <a:effectRef idx="2">
+            <a:schemeClr val="accent1"/>
+          </a:effectRef>
+          <a:fontRef idx="minor">
+            <a:schemeClr val="lt1"/>
+          </a:fontRef>
+        </p:style>
+        <p:txBody>
+          <a:bodyPr rtlCol="0" anchor="ctr"/>
+          <a:lstStyle/>
+          <a:p>
+            <a:pPr algn="ctr"/>
+          </a:p>
+        </p:txBody>
+      </p:sp>
+      <p:sp>
+        <p:nvSpPr>
+          <p:cNvPr id="14" name="TextBox 13"/>
+          <p:cNvSpPr txBox="1"/>
+          <p:nvPr/>
+        </p:nvSpPr>
+        <p:spPr>
+          <a:xfrm>
+            <a:off x="6583680" y="1709928"/>
+            <a:ext cx="4663440" cy="411480"/>
+          </a:xfrm>
+          <a:prstGeom prst="rect">
+            <a:avLst/>
+          </a:prstGeom>
+          <a:noFill/>
+        </p:spPr>
+        <p:txBody>
+          <a:bodyPr wrap="square" anchor="ctr" lIns="0" rIns="0" tIns="0" bIns="0">
+            <a:spAutoFit/>
+          </a:bodyPr>
+          <a:lstStyle/>
+          <a:p>
+            <a:pPr algn="l"/>
+            <a:r>
+              <a:rPr sz="1500" b="1">
+                <a:solidFill>
+                  <a:srgbClr val="0F2A4C"/>
+                </a:solidFill>
+                <a:latin typeface="Calibri"/>
+              </a:rPr>
+              <a:t>UI &amp; Charts</a:t>
+            </a:r>
+          </a:p>
+        </p:txBody>
+      </p:sp>
+      <p:sp>
+        <p:nvSpPr>
+          <p:cNvPr id="15" name="TextBox 14"/>
+          <p:cNvSpPr txBox="1"/>
+          <p:nvPr/>
+        </p:nvSpPr>
+        <p:spPr>
+          <a:xfrm>
+            <a:off x="6583680" y="2075688"/>
+            <a:ext cx="4663440" cy="731520"/>
+          </a:xfrm>
+          <a:prstGeom prst="rect">
+            <a:avLst/>
+          </a:prstGeom>
+          <a:noFill/>
+        </p:spPr>
+        <p:txBody>
+          <a:bodyPr wrap="square" anchor="t" lIns="0" rIns="0" tIns="0" bIns="0">
+            <a:spAutoFit/>
+          </a:bodyPr>
+          <a:lstStyle/>
+          <a:p>
+            <a:pPr algn="l">
+              <a:lnSpc>
+                <a:spcPct val="110000"/>
+              </a:lnSpc>
             </a:pPr>
             <a:r>
-              <a:t>Language: TypeScript</a:t>
-            </a:r>
-          </a:p>
-          <a:p>
-            <a:pPr>
-              <a:spcAft>
-                <a:spcPts val="1200"/>
-              </a:spcAft>
-              <a:defRPr sz="1800"/>
+              <a:rPr sz="1500" b="0">
+                <a:solidFill>
+                  <a:srgbClr val="243244"/>
+                </a:solidFill>
+                <a:latin typeface="Calibri"/>
+              </a:rPr>
+              <a:t>Radix UI · Lucide Icons · Recharts</a:t>
+            </a:r>
+          </a:p>
+        </p:txBody>
+      </p:sp>
+      <p:sp>
+        <p:nvSpPr>
+          <p:cNvPr id="16" name="Rounded Rectangle 15"/>
+          <p:cNvSpPr/>
+          <p:nvPr/>
+        </p:nvSpPr>
+        <p:spPr>
+          <a:xfrm>
+            <a:off x="731520" y="3154680"/>
+            <a:ext cx="5120640" cy="1280160"/>
+          </a:xfrm>
+          <a:prstGeom prst="roundRect">
+            <a:avLst/>
+          </a:prstGeom>
+          <a:solidFill>
+            <a:srgbClr val="FFFFFF"/>
+          </a:solidFill>
+          <a:ln>
+            <a:noFill/>
+          </a:ln>
+          <a:effectLst/>
+        </p:spPr>
+        <p:style>
+          <a:lnRef idx="1">
+            <a:schemeClr val="accent1"/>
+          </a:lnRef>
+          <a:fillRef idx="3">
+            <a:schemeClr val="accent1"/>
+          </a:fillRef>
+          <a:effectRef idx="2">
+            <a:schemeClr val="accent1"/>
+          </a:effectRef>
+          <a:fontRef idx="minor">
+            <a:schemeClr val="lt1"/>
+          </a:fontRef>
+        </p:style>
+        <p:txBody>
+          <a:bodyPr rtlCol="0" anchor="ctr"/>
+          <a:lstStyle/>
+          <a:p>
+            <a:pPr algn="ctr"/>
+          </a:p>
+        </p:txBody>
+      </p:sp>
+      <p:sp>
+        <p:nvSpPr>
+          <p:cNvPr id="17" name="Rectangle 16"/>
+          <p:cNvSpPr/>
+          <p:nvPr/>
+        </p:nvSpPr>
+        <p:spPr>
+          <a:xfrm>
+            <a:off x="731520" y="3154680"/>
+            <a:ext cx="82296" cy="1280160"/>
+          </a:xfrm>
+          <a:prstGeom prst="rect">
+            <a:avLst/>
+          </a:prstGeom>
+          <a:solidFill>
+            <a:srgbClr val="F2B418"/>
+          </a:solidFill>
+          <a:ln>
+            <a:noFill/>
+          </a:ln>
+          <a:effectLst/>
+        </p:spPr>
+        <p:style>
+          <a:lnRef idx="1">
+            <a:schemeClr val="accent1"/>
+          </a:lnRef>
+          <a:fillRef idx="3">
+            <a:schemeClr val="accent1"/>
+          </a:fillRef>
+          <a:effectRef idx="2">
+            <a:schemeClr val="accent1"/>
+          </a:effectRef>
+          <a:fontRef idx="minor">
+            <a:schemeClr val="lt1"/>
+          </a:fontRef>
+        </p:style>
+        <p:txBody>
+          <a:bodyPr rtlCol="0" anchor="ctr"/>
+          <a:lstStyle/>
+          <a:p>
+            <a:pPr algn="ctr"/>
+          </a:p>
+        </p:txBody>
+      </p:sp>
+      <p:sp>
+        <p:nvSpPr>
+          <p:cNvPr id="18" name="TextBox 17"/>
+          <p:cNvSpPr txBox="1"/>
+          <p:nvPr/>
+        </p:nvSpPr>
+        <p:spPr>
+          <a:xfrm>
+            <a:off x="1005840" y="3264408"/>
+            <a:ext cx="4663440" cy="411480"/>
+          </a:xfrm>
+          <a:prstGeom prst="rect">
+            <a:avLst/>
+          </a:prstGeom>
+          <a:noFill/>
+        </p:spPr>
+        <p:txBody>
+          <a:bodyPr wrap="square" anchor="ctr" lIns="0" rIns="0" tIns="0" bIns="0">
+            <a:spAutoFit/>
+          </a:bodyPr>
+          <a:lstStyle/>
+          <a:p>
+            <a:pPr algn="l"/>
+            <a:r>
+              <a:rPr sz="1500" b="1">
+                <a:solidFill>
+                  <a:srgbClr val="0F2A4C"/>
+                </a:solidFill>
+                <a:latin typeface="Calibri"/>
+              </a:rPr>
+              <a:t>Auth &amp; Security</a:t>
+            </a:r>
+          </a:p>
+        </p:txBody>
+      </p:sp>
+      <p:sp>
+        <p:nvSpPr>
+          <p:cNvPr id="19" name="TextBox 18"/>
+          <p:cNvSpPr txBox="1"/>
+          <p:nvPr/>
+        </p:nvSpPr>
+        <p:spPr>
+          <a:xfrm>
+            <a:off x="1005840" y="3630168"/>
+            <a:ext cx="4663440" cy="731520"/>
+          </a:xfrm>
+          <a:prstGeom prst="rect">
+            <a:avLst/>
+          </a:prstGeom>
+          <a:noFill/>
+        </p:spPr>
+        <p:txBody>
+          <a:bodyPr wrap="square" anchor="t" lIns="0" rIns="0" tIns="0" bIns="0">
+            <a:spAutoFit/>
+          </a:bodyPr>
+          <a:lstStyle/>
+          <a:p>
+            <a:pPr algn="l">
+              <a:lnSpc>
+                <a:spcPct val="110000"/>
+              </a:lnSpc>
             </a:pPr>
             <a:r>
-              <a:t>Styling: Tailwind CSS v4</a:t>
-            </a:r>
-          </a:p>
-          <a:p>
-            <a:pPr>
-              <a:spcAft>
-                <a:spcPts val="1200"/>
-              </a:spcAft>
-              <a:defRPr sz="1800"/>
+              <a:rPr sz="1500" b="0">
+                <a:solidFill>
+                  <a:srgbClr val="243244"/>
+                </a:solidFill>
+                <a:latin typeface="Calibri"/>
+              </a:rPr>
+              <a:t>Supabase Auth · Row-Level Security · RBAC</a:t>
+            </a:r>
+          </a:p>
+        </p:txBody>
+      </p:sp>
+      <p:sp>
+        <p:nvSpPr>
+          <p:cNvPr id="20" name="Rounded Rectangle 19"/>
+          <p:cNvSpPr/>
+          <p:nvPr/>
+        </p:nvSpPr>
+        <p:spPr>
+          <a:xfrm>
+            <a:off x="6309360" y="3154680"/>
+            <a:ext cx="5120640" cy="1280160"/>
+          </a:xfrm>
+          <a:prstGeom prst="roundRect">
+            <a:avLst/>
+          </a:prstGeom>
+          <a:solidFill>
+            <a:srgbClr val="FFFFFF"/>
+          </a:solidFill>
+          <a:ln>
+            <a:noFill/>
+          </a:ln>
+          <a:effectLst/>
+        </p:spPr>
+        <p:style>
+          <a:lnRef idx="1">
+            <a:schemeClr val="accent1"/>
+          </a:lnRef>
+          <a:fillRef idx="3">
+            <a:schemeClr val="accent1"/>
+          </a:fillRef>
+          <a:effectRef idx="2">
+            <a:schemeClr val="accent1"/>
+          </a:effectRef>
+          <a:fontRef idx="minor">
+            <a:schemeClr val="lt1"/>
+          </a:fontRef>
+        </p:style>
+        <p:txBody>
+          <a:bodyPr rtlCol="0" anchor="ctr"/>
+          <a:lstStyle/>
+          <a:p>
+            <a:pPr algn="ctr"/>
+          </a:p>
+        </p:txBody>
+      </p:sp>
+      <p:sp>
+        <p:nvSpPr>
+          <p:cNvPr id="21" name="Rectangle 20"/>
+          <p:cNvSpPr/>
+          <p:nvPr/>
+        </p:nvSpPr>
+        <p:spPr>
+          <a:xfrm>
+            <a:off x="6309360" y="3154680"/>
+            <a:ext cx="82296" cy="1280160"/>
+          </a:xfrm>
+          <a:prstGeom prst="rect">
+            <a:avLst/>
+          </a:prstGeom>
+          <a:solidFill>
+            <a:srgbClr val="F2B418"/>
+          </a:solidFill>
+          <a:ln>
+            <a:noFill/>
+          </a:ln>
+          <a:effectLst/>
+        </p:spPr>
+        <p:style>
+          <a:lnRef idx="1">
+            <a:schemeClr val="accent1"/>
+          </a:lnRef>
+          <a:fillRef idx="3">
+            <a:schemeClr val="accent1"/>
+          </a:fillRef>
+          <a:effectRef idx="2">
+            <a:schemeClr val="accent1"/>
+          </a:effectRef>
+          <a:fontRef idx="minor">
+            <a:schemeClr val="lt1"/>
+          </a:fontRef>
+        </p:style>
+        <p:txBody>
+          <a:bodyPr rtlCol="0" anchor="ctr"/>
+          <a:lstStyle/>
+          <a:p>
+            <a:pPr algn="ctr"/>
+          </a:p>
+        </p:txBody>
+      </p:sp>
+      <p:sp>
+        <p:nvSpPr>
+          <p:cNvPr id="22" name="TextBox 21"/>
+          <p:cNvSpPr txBox="1"/>
+          <p:nvPr/>
+        </p:nvSpPr>
+        <p:spPr>
+          <a:xfrm>
+            <a:off x="6583680" y="3264408"/>
+            <a:ext cx="4663440" cy="411480"/>
+          </a:xfrm>
+          <a:prstGeom prst="rect">
+            <a:avLst/>
+          </a:prstGeom>
+          <a:noFill/>
+        </p:spPr>
+        <p:txBody>
+          <a:bodyPr wrap="square" anchor="ctr" lIns="0" rIns="0" tIns="0" bIns="0">
+            <a:spAutoFit/>
+          </a:bodyPr>
+          <a:lstStyle/>
+          <a:p>
+            <a:pPr algn="l"/>
+            <a:r>
+              <a:rPr sz="1500" b="1">
+                <a:solidFill>
+                  <a:srgbClr val="0F2A4C"/>
+                </a:solidFill>
+                <a:latin typeface="Calibri"/>
+              </a:rPr>
+              <a:t>Database</a:t>
+            </a:r>
+          </a:p>
+        </p:txBody>
+      </p:sp>
+      <p:sp>
+        <p:nvSpPr>
+          <p:cNvPr id="23" name="TextBox 22"/>
+          <p:cNvSpPr txBox="1"/>
+          <p:nvPr/>
+        </p:nvSpPr>
+        <p:spPr>
+          <a:xfrm>
+            <a:off x="6583680" y="3630168"/>
+            <a:ext cx="4663440" cy="731520"/>
+          </a:xfrm>
+          <a:prstGeom prst="rect">
+            <a:avLst/>
+          </a:prstGeom>
+          <a:noFill/>
+        </p:spPr>
+        <p:txBody>
+          <a:bodyPr wrap="square" anchor="t" lIns="0" rIns="0" tIns="0" bIns="0">
+            <a:spAutoFit/>
+          </a:bodyPr>
+          <a:lstStyle/>
+          <a:p>
+            <a:pPr algn="l">
+              <a:lnSpc>
+                <a:spcPct val="110000"/>
+              </a:lnSpc>
             </a:pPr>
             <a:r>
-              <a:t>Database &amp; Auth: Supabase (PostgreSQL)</a:t>
-            </a:r>
-          </a:p>
-          <a:p>
-            <a:pPr>
-              <a:spcAft>
-                <a:spcPts val="1200"/>
-              </a:spcAft>
-              <a:defRPr sz="1800"/>
+              <a:rPr sz="1500" b="0">
+                <a:solidFill>
+                  <a:srgbClr val="243244"/>
+                </a:solidFill>
+                <a:latin typeface="Calibri"/>
+              </a:rPr>
+              <a:t>Supabase PostgreSQL with full RLS</a:t>
+            </a:r>
+          </a:p>
+        </p:txBody>
+      </p:sp>
+      <p:sp>
+        <p:nvSpPr>
+          <p:cNvPr id="24" name="Rounded Rectangle 23"/>
+          <p:cNvSpPr/>
+          <p:nvPr/>
+        </p:nvSpPr>
+        <p:spPr>
+          <a:xfrm>
+            <a:off x="731520" y="4709160"/>
+            <a:ext cx="5120640" cy="1280160"/>
+          </a:xfrm>
+          <a:prstGeom prst="roundRect">
+            <a:avLst/>
+          </a:prstGeom>
+          <a:solidFill>
+            <a:srgbClr val="FFFFFF"/>
+          </a:solidFill>
+          <a:ln>
+            <a:noFill/>
+          </a:ln>
+          <a:effectLst/>
+        </p:spPr>
+        <p:style>
+          <a:lnRef idx="1">
+            <a:schemeClr val="accent1"/>
+          </a:lnRef>
+          <a:fillRef idx="3">
+            <a:schemeClr val="accent1"/>
+          </a:fillRef>
+          <a:effectRef idx="2">
+            <a:schemeClr val="accent1"/>
+          </a:effectRef>
+          <a:fontRef idx="minor">
+            <a:schemeClr val="lt1"/>
+          </a:fontRef>
+        </p:style>
+        <p:txBody>
+          <a:bodyPr rtlCol="0" anchor="ctr"/>
+          <a:lstStyle/>
+          <a:p>
+            <a:pPr algn="ctr"/>
+          </a:p>
+        </p:txBody>
+      </p:sp>
+      <p:sp>
+        <p:nvSpPr>
+          <p:cNvPr id="25" name="Rectangle 24"/>
+          <p:cNvSpPr/>
+          <p:nvPr/>
+        </p:nvSpPr>
+        <p:spPr>
+          <a:xfrm>
+            <a:off x="731520" y="4709160"/>
+            <a:ext cx="82296" cy="1280160"/>
+          </a:xfrm>
+          <a:prstGeom prst="rect">
+            <a:avLst/>
+          </a:prstGeom>
+          <a:solidFill>
+            <a:srgbClr val="F2B418"/>
+          </a:solidFill>
+          <a:ln>
+            <a:noFill/>
+          </a:ln>
+          <a:effectLst/>
+        </p:spPr>
+        <p:style>
+          <a:lnRef idx="1">
+            <a:schemeClr val="accent1"/>
+          </a:lnRef>
+          <a:fillRef idx="3">
+            <a:schemeClr val="accent1"/>
+          </a:fillRef>
+          <a:effectRef idx="2">
+            <a:schemeClr val="accent1"/>
+          </a:effectRef>
+          <a:fontRef idx="minor">
+            <a:schemeClr val="lt1"/>
+          </a:fontRef>
+        </p:style>
+        <p:txBody>
+          <a:bodyPr rtlCol="0" anchor="ctr"/>
+          <a:lstStyle/>
+          <a:p>
+            <a:pPr algn="ctr"/>
+          </a:p>
+        </p:txBody>
+      </p:sp>
+      <p:sp>
+        <p:nvSpPr>
+          <p:cNvPr id="26" name="TextBox 25"/>
+          <p:cNvSpPr txBox="1"/>
+          <p:nvPr/>
+        </p:nvSpPr>
+        <p:spPr>
+          <a:xfrm>
+            <a:off x="1005840" y="4818888"/>
+            <a:ext cx="4663440" cy="411480"/>
+          </a:xfrm>
+          <a:prstGeom prst="rect">
+            <a:avLst/>
+          </a:prstGeom>
+          <a:noFill/>
+        </p:spPr>
+        <p:txBody>
+          <a:bodyPr wrap="square" anchor="ctr" lIns="0" rIns="0" tIns="0" bIns="0">
+            <a:spAutoFit/>
+          </a:bodyPr>
+          <a:lstStyle/>
+          <a:p>
+            <a:pPr algn="l"/>
+            <a:r>
+              <a:rPr sz="1500" b="1">
+                <a:solidFill>
+                  <a:srgbClr val="0F2A4C"/>
+                </a:solidFill>
+                <a:latin typeface="Calibri"/>
+              </a:rPr>
+              <a:t>PDF &amp; Documents</a:t>
+            </a:r>
+          </a:p>
+        </p:txBody>
+      </p:sp>
+      <p:sp>
+        <p:nvSpPr>
+          <p:cNvPr id="27" name="TextBox 26"/>
+          <p:cNvSpPr txBox="1"/>
+          <p:nvPr/>
+        </p:nvSpPr>
+        <p:spPr>
+          <a:xfrm>
+            <a:off x="1005840" y="5184648"/>
+            <a:ext cx="4663440" cy="731520"/>
+          </a:xfrm>
+          <a:prstGeom prst="rect">
+            <a:avLst/>
+          </a:prstGeom>
+          <a:noFill/>
+        </p:spPr>
+        <p:txBody>
+          <a:bodyPr wrap="square" anchor="t" lIns="0" rIns="0" tIns="0" bIns="0">
+            <a:spAutoFit/>
+          </a:bodyPr>
+          <a:lstStyle/>
+          <a:p>
+            <a:pPr algn="l">
+              <a:lnSpc>
+                <a:spcPct val="110000"/>
+              </a:lnSpc>
             </a:pPr>
             <a:r>
-              <a:t>UI Components: Radix UI &amp; Lucide React</a:t>
-            </a:r>
-          </a:p>
-          <a:p>
-            <a:pPr>
-              <a:spcAft>
-                <a:spcPts val="1200"/>
-              </a:spcAft>
-              <a:defRPr sz="1800"/>
+              <a:rPr sz="1500" b="0">
+                <a:solidFill>
+                  <a:srgbClr val="243244"/>
+                </a:solidFill>
+                <a:latin typeface="Calibri"/>
+              </a:rPr>
+              <a:t>React-PDF · jsPDF + autotable</a:t>
+            </a:r>
+          </a:p>
+        </p:txBody>
+      </p:sp>
+      <p:sp>
+        <p:nvSpPr>
+          <p:cNvPr id="28" name="Rounded Rectangle 27"/>
+          <p:cNvSpPr/>
+          <p:nvPr/>
+        </p:nvSpPr>
+        <p:spPr>
+          <a:xfrm>
+            <a:off x="6309360" y="4709160"/>
+            <a:ext cx="5120640" cy="1280160"/>
+          </a:xfrm>
+          <a:prstGeom prst="roundRect">
+            <a:avLst/>
+          </a:prstGeom>
+          <a:solidFill>
+            <a:srgbClr val="FFFFFF"/>
+          </a:solidFill>
+          <a:ln>
+            <a:noFill/>
+          </a:ln>
+          <a:effectLst/>
+        </p:spPr>
+        <p:style>
+          <a:lnRef idx="1">
+            <a:schemeClr val="accent1"/>
+          </a:lnRef>
+          <a:fillRef idx="3">
+            <a:schemeClr val="accent1"/>
+          </a:fillRef>
+          <a:effectRef idx="2">
+            <a:schemeClr val="accent1"/>
+          </a:effectRef>
+          <a:fontRef idx="minor">
+            <a:schemeClr val="lt1"/>
+          </a:fontRef>
+        </p:style>
+        <p:txBody>
+          <a:bodyPr rtlCol="0" anchor="ctr"/>
+          <a:lstStyle/>
+          <a:p>
+            <a:pPr algn="ctr"/>
+          </a:p>
+        </p:txBody>
+      </p:sp>
+      <p:sp>
+        <p:nvSpPr>
+          <p:cNvPr id="29" name="Rectangle 28"/>
+          <p:cNvSpPr/>
+          <p:nvPr/>
+        </p:nvSpPr>
+        <p:spPr>
+          <a:xfrm>
+            <a:off x="6309360" y="4709160"/>
+            <a:ext cx="82296" cy="1280160"/>
+          </a:xfrm>
+          <a:prstGeom prst="rect">
+            <a:avLst/>
+          </a:prstGeom>
+          <a:solidFill>
+            <a:srgbClr val="F2B418"/>
+          </a:solidFill>
+          <a:ln>
+            <a:noFill/>
+          </a:ln>
+          <a:effectLst/>
+        </p:spPr>
+        <p:style>
+          <a:lnRef idx="1">
+            <a:schemeClr val="accent1"/>
+          </a:lnRef>
+          <a:fillRef idx="3">
+            <a:schemeClr val="accent1"/>
+          </a:fillRef>
+          <a:effectRef idx="2">
+            <a:schemeClr val="accent1"/>
+          </a:effectRef>
+          <a:fontRef idx="minor">
+            <a:schemeClr val="lt1"/>
+          </a:fontRef>
+        </p:style>
+        <p:txBody>
+          <a:bodyPr rtlCol="0" anchor="ctr"/>
+          <a:lstStyle/>
+          <a:p>
+            <a:pPr algn="ctr"/>
+          </a:p>
+        </p:txBody>
+      </p:sp>
+      <p:sp>
+        <p:nvSpPr>
+          <p:cNvPr id="30" name="TextBox 29"/>
+          <p:cNvSpPr txBox="1"/>
+          <p:nvPr/>
+        </p:nvSpPr>
+        <p:spPr>
+          <a:xfrm>
+            <a:off x="6583680" y="4818888"/>
+            <a:ext cx="4663440" cy="411480"/>
+          </a:xfrm>
+          <a:prstGeom prst="rect">
+            <a:avLst/>
+          </a:prstGeom>
+          <a:noFill/>
+        </p:spPr>
+        <p:txBody>
+          <a:bodyPr wrap="square" anchor="ctr" lIns="0" rIns="0" tIns="0" bIns="0">
+            <a:spAutoFit/>
+          </a:bodyPr>
+          <a:lstStyle/>
+          <a:p>
+            <a:pPr algn="l"/>
+            <a:r>
+              <a:rPr sz="1500" b="1">
+                <a:solidFill>
+                  <a:srgbClr val="0F2A4C"/>
+                </a:solidFill>
+                <a:latin typeface="Calibri"/>
+              </a:rPr>
+              <a:t>Excel Export</a:t>
+            </a:r>
+          </a:p>
+        </p:txBody>
+      </p:sp>
+      <p:sp>
+        <p:nvSpPr>
+          <p:cNvPr id="31" name="TextBox 30"/>
+          <p:cNvSpPr txBox="1"/>
+          <p:nvPr/>
+        </p:nvSpPr>
+        <p:spPr>
+          <a:xfrm>
+            <a:off x="6583680" y="5184648"/>
+            <a:ext cx="4663440" cy="731520"/>
+          </a:xfrm>
+          <a:prstGeom prst="rect">
+            <a:avLst/>
+          </a:prstGeom>
+          <a:noFill/>
+        </p:spPr>
+        <p:txBody>
+          <a:bodyPr wrap="square" anchor="t" lIns="0" rIns="0" tIns="0" bIns="0">
+            <a:spAutoFit/>
+          </a:bodyPr>
+          <a:lstStyle/>
+          <a:p>
+            <a:pPr algn="l">
+              <a:lnSpc>
+                <a:spcPct val="110000"/>
+              </a:lnSpc>
             </a:pPr>
             <a:r>
-              <a:t>Charts: Recharts</a:t>
-            </a:r>
-          </a:p>
-          <a:p>
-            <a:pPr>
-              <a:spcAft>
-                <a:spcPts val="1200"/>
-              </a:spcAft>
-              <a:defRPr sz="1800"/>
-            </a:pPr>
-            <a:r>
-              <a:t>PDF Generation: React-PDF &amp; jsPDF</a:t>
-            </a:r>
-          </a:p>
-          <a:p>
-            <a:pPr>
-              <a:spcAft>
-                <a:spcPts val="1200"/>
-              </a:spcAft>
-              <a:defRPr sz="1800"/>
-            </a:pPr>
-            <a:r>
-              <a:t>Excel Export: SheetJS</a:t>
+              <a:rPr sz="1500" b="0">
+                <a:solidFill>
+                  <a:srgbClr val="243244"/>
+                </a:solidFill>
+                <a:latin typeface="Calibri"/>
+              </a:rPr>
+              <a:t>SheetJS (xlsx) · Export All workbooks</a:t>
             </a:r>
           </a:p>
         </p:txBody>
@@ -4074,52 +9868,234 @@
       <p:grpSpPr/>
       <p:sp>
         <p:nvSpPr>
-          <p:cNvPr id="2" name="Title 1"/>
-          <p:cNvSpPr>
-            <a:spLocks noGrp="1"/>
-          </p:cNvSpPr>
-          <p:nvPr>
-            <p:ph type="title"/>
-          </p:nvPr>
-        </p:nvSpPr>
-        <p:spPr/>
-        <p:txBody>
-          <a:bodyPr/>
-          <a:lstStyle/>
-          <a:p>
-            <a:r>
-              <a:t>System Architecture</a:t>
-            </a:r>
-          </a:p>
-        </p:txBody>
-      </p:sp>
-      <p:sp>
-        <p:nvSpPr>
-          <p:cNvPr id="3" name="Content Placeholder 2"/>
-          <p:cNvSpPr>
-            <a:spLocks noGrp="1"/>
-          </p:cNvSpPr>
-          <p:nvPr>
-            <p:ph idx="1"/>
-          </p:nvPr>
-        </p:nvSpPr>
-        <p:spPr/>
-        <p:txBody>
-          <a:bodyPr/>
-          <a:lstStyle/>
-          <a:p/>
-        </p:txBody>
-      </p:sp>
-      <p:sp>
-        <p:nvSpPr>
-          <p:cNvPr id="4" name="TextBox 3"/>
+          <p:cNvPr id="2" name="Rectangle 1"/>
+          <p:cNvSpPr/>
+          <p:nvPr/>
+        </p:nvSpPr>
+        <p:spPr>
+          <a:xfrm>
+            <a:off x="0" y="0"/>
+            <a:ext cx="12191695" cy="6858000"/>
+          </a:xfrm>
+          <a:prstGeom prst="rect">
+            <a:avLst/>
+          </a:prstGeom>
+          <a:solidFill>
+            <a:srgbClr val="0F2A4C"/>
+          </a:solidFill>
+          <a:ln>
+            <a:noFill/>
+          </a:ln>
+          <a:effectLst/>
+        </p:spPr>
+        <p:style>
+          <a:lnRef idx="1">
+            <a:schemeClr val="accent1"/>
+          </a:lnRef>
+          <a:fillRef idx="3">
+            <a:schemeClr val="accent1"/>
+          </a:fillRef>
+          <a:effectRef idx="2">
+            <a:schemeClr val="accent1"/>
+          </a:effectRef>
+          <a:fontRef idx="minor">
+            <a:schemeClr val="lt1"/>
+          </a:fontRef>
+        </p:style>
+        <p:txBody>
+          <a:bodyPr rtlCol="0" anchor="ctr"/>
+          <a:lstStyle/>
+          <a:p>
+            <a:pPr algn="ctr"/>
+          </a:p>
+        </p:txBody>
+      </p:sp>
+      <p:sp>
+        <p:nvSpPr>
+          <p:cNvPr id="3" name="Rectangle 2"/>
+          <p:cNvSpPr/>
+          <p:nvPr/>
+        </p:nvSpPr>
+        <p:spPr>
+          <a:xfrm>
+            <a:off x="0" y="0"/>
+            <a:ext cx="256032" cy="6858000"/>
+          </a:xfrm>
+          <a:prstGeom prst="rect">
+            <a:avLst/>
+          </a:prstGeom>
+          <a:solidFill>
+            <a:srgbClr val="F2B418"/>
+          </a:solidFill>
+          <a:ln>
+            <a:noFill/>
+          </a:ln>
+          <a:effectLst/>
+        </p:spPr>
+        <p:style>
+          <a:lnRef idx="1">
+            <a:schemeClr val="accent1"/>
+          </a:lnRef>
+          <a:fillRef idx="3">
+            <a:schemeClr val="accent1"/>
+          </a:fillRef>
+          <a:effectRef idx="2">
+            <a:schemeClr val="accent1"/>
+          </a:effectRef>
+          <a:fontRef idx="minor">
+            <a:schemeClr val="lt1"/>
+          </a:fontRef>
+        </p:style>
+        <p:txBody>
+          <a:bodyPr rtlCol="0" anchor="ctr"/>
+          <a:lstStyle/>
+          <a:p>
+            <a:pPr algn="ctr"/>
+          </a:p>
+        </p:txBody>
+      </p:sp>
+      <p:sp>
+        <p:nvSpPr>
+          <p:cNvPr id="4" name="Rectangle 3"/>
+          <p:cNvSpPr/>
+          <p:nvPr/>
+        </p:nvSpPr>
+        <p:spPr>
+          <a:xfrm>
+            <a:off x="11935663" y="0"/>
+            <a:ext cx="256032" cy="6858000"/>
+          </a:xfrm>
+          <a:prstGeom prst="rect">
+            <a:avLst/>
+          </a:prstGeom>
+          <a:solidFill>
+            <a:srgbClr val="F2B418"/>
+          </a:solidFill>
+          <a:ln>
+            <a:noFill/>
+          </a:ln>
+          <a:effectLst/>
+        </p:spPr>
+        <p:style>
+          <a:lnRef idx="1">
+            <a:schemeClr val="accent1"/>
+          </a:lnRef>
+          <a:fillRef idx="3">
+            <a:schemeClr val="accent1"/>
+          </a:fillRef>
+          <a:effectRef idx="2">
+            <a:schemeClr val="accent1"/>
+          </a:effectRef>
+          <a:fontRef idx="minor">
+            <a:schemeClr val="lt1"/>
+          </a:fontRef>
+        </p:style>
+        <p:txBody>
+          <a:bodyPr rtlCol="0" anchor="ctr"/>
+          <a:lstStyle/>
+          <a:p>
+            <a:pPr algn="ctr"/>
+          </a:p>
+        </p:txBody>
+      </p:sp>
+      <p:sp>
+        <p:nvSpPr>
+          <p:cNvPr id="5" name="Oval 4"/>
+          <p:cNvSpPr/>
+          <p:nvPr/>
+        </p:nvSpPr>
+        <p:spPr>
+          <a:xfrm>
+            <a:off x="5458968" y="1005840"/>
+            <a:ext cx="1280160" cy="1280160"/>
+          </a:xfrm>
+          <a:prstGeom prst="ellipse">
+            <a:avLst/>
+          </a:prstGeom>
+          <a:solidFill>
+            <a:srgbClr val="163A63"/>
+          </a:solidFill>
+          <a:ln>
+            <a:noFill/>
+          </a:ln>
+          <a:effectLst/>
+        </p:spPr>
+        <p:style>
+          <a:lnRef idx="1">
+            <a:schemeClr val="accent1"/>
+          </a:lnRef>
+          <a:fillRef idx="3">
+            <a:schemeClr val="accent1"/>
+          </a:fillRef>
+          <a:effectRef idx="2">
+            <a:schemeClr val="accent1"/>
+          </a:effectRef>
+          <a:fontRef idx="minor">
+            <a:schemeClr val="lt1"/>
+          </a:fontRef>
+        </p:style>
+        <p:txBody>
+          <a:bodyPr rtlCol="0" anchor="ctr"/>
+          <a:lstStyle/>
+          <a:p>
+            <a:pPr algn="ctr"/>
+          </a:p>
+        </p:txBody>
+      </p:sp>
+      <p:sp>
+        <p:nvSpPr>
+          <p:cNvPr id="6" name="Rectangle 5"/>
+          <p:cNvSpPr/>
+          <p:nvPr/>
+        </p:nvSpPr>
+        <p:spPr>
+          <a:xfrm>
+            <a:off x="5779008" y="1325880"/>
+            <a:ext cx="640080" cy="640080"/>
+          </a:xfrm>
+          <a:prstGeom prst="rect">
+            <a:avLst/>
+          </a:prstGeom>
+          <a:solidFill>
+            <a:srgbClr val="F2B418"/>
+          </a:solidFill>
+          <a:ln>
+            <a:noFill/>
+          </a:ln>
+          <a:effectLst/>
+        </p:spPr>
+        <p:style>
+          <a:lnRef idx="1">
+            <a:schemeClr val="accent1"/>
+          </a:lnRef>
+          <a:fillRef idx="3">
+            <a:schemeClr val="accent1"/>
+          </a:fillRef>
+          <a:effectRef idx="2">
+            <a:schemeClr val="accent1"/>
+          </a:effectRef>
+          <a:fontRef idx="minor">
+            <a:schemeClr val="lt1"/>
+          </a:fontRef>
+        </p:style>
+        <p:txBody>
+          <a:bodyPr rtlCol="0" anchor="ctr"/>
+          <a:lstStyle/>
+          <a:p>
+            <a:pPr algn="ctr"/>
+          </a:p>
+        </p:txBody>
+      </p:sp>
+      <p:sp>
+        <p:nvSpPr>
+          <p:cNvPr id="7" name="TextBox 6"/>
           <p:cNvSpPr txBox="1"/>
           <p:nvPr/>
         </p:nvSpPr>
         <p:spPr>
           <a:xfrm>
-            <a:off x="914400" y="1371600"/>
-            <a:ext cx="10058400" cy="4572000"/>
+            <a:off x="5458968" y="1005840"/>
+            <a:ext cx="1280160" cy="1280160"/>
           </a:xfrm>
           <a:prstGeom prst="rect">
             <a:avLst/>
@@ -4127,106 +10103,53 @@
           <a:noFill/>
         </p:spPr>
         <p:txBody>
-          <a:bodyPr wrap="square">
+          <a:bodyPr wrap="square" anchor="ctr" lIns="0" rIns="0" tIns="0" bIns="0">
             <a:spAutoFit/>
           </a:bodyPr>
           <a:lstStyle/>
           <a:p>
-            <a:pPr>
-              <a:spcAft>
-                <a:spcPts val="1200"/>
-              </a:spcAft>
-              <a:defRPr sz="1800"/>
-            </a:pPr>
-            <a:r>
-              <a:t>Frontend: Modern, responsive web interface</a:t>
-            </a:r>
-          </a:p>
-          <a:p>
-            <a:pPr>
-              <a:spcAft>
-                <a:spcPts val="1200"/>
-              </a:spcAft>
-              <a:defRPr sz="1800"/>
-            </a:pPr>
-            <a:r>
-              <a:t>Backend: Next.js API Routes &amp; Server Actions</a:t>
-            </a:r>
-          </a:p>
-          <a:p>
-            <a:pPr>
-              <a:spcAft>
-                <a:spcPts val="1200"/>
-              </a:spcAft>
-              <a:defRPr sz="1800"/>
-            </a:pPr>
-            <a:r>
-              <a:t>Database: Supabase PostgreSQL with RLS</a:t>
-            </a:r>
-          </a:p>
-          <a:p>
-            <a:pPr>
-              <a:spcAft>
-                <a:spcPts val="1200"/>
-              </a:spcAft>
-              <a:defRPr sz="1800"/>
-            </a:pPr>
-            <a:r>
-              <a:t>Auth: Supabase Auth (Email/Password)</a:t>
-            </a:r>
-          </a:p>
-          <a:p>
-            <a:pPr>
-              <a:spcAft>
-                <a:spcPts val="1200"/>
-              </a:spcAft>
-              <a:defRPr sz="1800"/>
-            </a:pPr>
-            <a:r>
-              <a:t>Storage: Supabase Storage for attachments</a:t>
-            </a:r>
-          </a:p>
-        </p:txBody>
-      </p:sp>
-    </p:spTree>
-  </p:cSld>
-  <p:clrMapOvr>
-    <a:masterClrMapping/>
-  </p:clrMapOvr>
-</p:sld>
-</file>
-
-<file path=ppt/slides/slide9.xml><?xml version="1.0" encoding="utf-8"?>
-<p:sld xmlns:a="http://schemas.openxmlformats.org/drawingml/2006/main" xmlns:p="http://schemas.openxmlformats.org/presentationml/2006/main" xmlns:r="http://schemas.openxmlformats.org/officeDocument/2006/relationships">
-  <p:cSld>
-    <p:spTree>
-      <p:nvGrpSpPr>
-        <p:cNvPr id="1" name=""/>
-        <p:cNvGrpSpPr/>
-        <p:nvPr/>
-      </p:nvGrpSpPr>
-      <p:grpSpPr/>
-      <p:sp>
-        <p:nvSpPr>
-          <p:cNvPr id="2" name="Title 1"/>
-          <p:cNvSpPr>
-            <a:spLocks noGrp="1"/>
-          </p:cNvSpPr>
-          <p:nvPr>
-            <p:ph type="ctrTitle"/>
-          </p:nvPr>
-        </p:nvSpPr>
-        <p:spPr/>
-        <p:txBody>
-          <a:bodyPr/>
-          <a:lstStyle/>
-          <a:p>
             <a:pPr algn="ctr"/>
             <a:r>
-              <a:rPr>
-                <a:solidFill>
-                  <a:srgbClr val="1E293B"/>
-                </a:solidFill>
+              <a:rPr sz="2200" b="1">
+                <a:solidFill>
+                  <a:srgbClr val="0F2A4C"/>
+                </a:solidFill>
+                <a:latin typeface="Calibri"/>
+              </a:rPr>
+              <a:t>BC</a:t>
+            </a:r>
+          </a:p>
+        </p:txBody>
+      </p:sp>
+      <p:sp>
+        <p:nvSpPr>
+          <p:cNvPr id="8" name="TextBox 7"/>
+          <p:cNvSpPr txBox="1"/>
+          <p:nvPr/>
+        </p:nvSpPr>
+        <p:spPr>
+          <a:xfrm>
+            <a:off x="0" y="2651760"/>
+            <a:ext cx="12191695" cy="914400"/>
+          </a:xfrm>
+          <a:prstGeom prst="rect">
+            <a:avLst/>
+          </a:prstGeom>
+          <a:noFill/>
+        </p:spPr>
+        <p:txBody>
+          <a:bodyPr wrap="square" anchor="ctr" lIns="0" rIns="0" tIns="0" bIns="0">
+            <a:spAutoFit/>
+          </a:bodyPr>
+          <a:lstStyle/>
+          <a:p>
+            <a:pPr algn="ctr"/>
+            <a:r>
+              <a:rPr sz="5200" b="1">
+                <a:solidFill>
+                  <a:srgbClr val="FFFFFF"/>
+                </a:solidFill>
+                <a:latin typeface="Calibri"/>
               </a:rPr>
               <a:t>BarangayConnect</a:t>
             </a:r>
@@ -4235,38 +10158,119 @@
       </p:sp>
       <p:sp>
         <p:nvSpPr>
-          <p:cNvPr id="3" name="Subtitle 2"/>
-          <p:cNvSpPr>
-            <a:spLocks noGrp="1"/>
-          </p:cNvSpPr>
-          <p:nvPr>
-            <p:ph type="subTitle" idx="1"/>
-          </p:nvPr>
-        </p:nvSpPr>
-        <p:spPr/>
-        <p:txBody>
-          <a:bodyPr/>
+          <p:cNvPr id="9" name="Rectangle 8"/>
+          <p:cNvSpPr/>
+          <p:nvPr/>
+        </p:nvSpPr>
+        <p:spPr>
+          <a:xfrm>
+            <a:off x="4754880" y="3675887"/>
+            <a:ext cx="2679192" cy="38100"/>
+          </a:xfrm>
+          <a:prstGeom prst="rect">
+            <a:avLst/>
+          </a:prstGeom>
+          <a:solidFill>
+            <a:srgbClr val="F2B418"/>
+          </a:solidFill>
+          <a:ln>
+            <a:noFill/>
+          </a:ln>
+          <a:effectLst/>
+        </p:spPr>
+        <p:style>
+          <a:lnRef idx="1">
+            <a:schemeClr val="accent1"/>
+          </a:lnRef>
+          <a:fillRef idx="3">
+            <a:schemeClr val="accent1"/>
+          </a:fillRef>
+          <a:effectRef idx="2">
+            <a:schemeClr val="accent1"/>
+          </a:effectRef>
+          <a:fontRef idx="minor">
+            <a:schemeClr val="lt1"/>
+          </a:fontRef>
+        </p:style>
+        <p:txBody>
+          <a:bodyPr rtlCol="0" anchor="ctr"/>
           <a:lstStyle/>
           <a:p>
             <a:pPr algn="ctr"/>
-            <a:r>
-              <a:rPr>
-                <a:solidFill>
-                  <a:srgbClr val="1E293B"/>
-                </a:solidFill>
+          </a:p>
+        </p:txBody>
+      </p:sp>
+      <p:sp>
+        <p:nvSpPr>
+          <p:cNvPr id="10" name="TextBox 9"/>
+          <p:cNvSpPr txBox="1"/>
+          <p:nvPr/>
+        </p:nvSpPr>
+        <p:spPr>
+          <a:xfrm>
+            <a:off x="1280160" y="3977639"/>
+            <a:ext cx="9601200" cy="1097280"/>
+          </a:xfrm>
+          <a:prstGeom prst="rect">
+            <a:avLst/>
+          </a:prstGeom>
+          <a:noFill/>
+        </p:spPr>
+        <p:txBody>
+          <a:bodyPr wrap="square" anchor="ctr" lIns="0" rIns="0" tIns="0" bIns="0">
+            <a:spAutoFit/>
+          </a:bodyPr>
+          <a:lstStyle/>
+          <a:p>
+            <a:pPr algn="ctr">
+              <a:lnSpc>
+                <a:spcPct val="120000"/>
+              </a:lnSpc>
+            </a:pPr>
+            <a:r>
+              <a:rPr sz="2000" b="0">
+                <a:solidFill>
+                  <a:srgbClr val="D5E0EE"/>
+                </a:solidFill>
+                <a:latin typeface="Calibri"/>
               </a:rPr>
-              <a:t>Thank You</a:t>
-            </a:r>
-          </a:p>
+              <a:t>Building Smarter, More Connected Communities
+Thank You for Your Attention</a:t>
+            </a:r>
+          </a:p>
+        </p:txBody>
+      </p:sp>
+      <p:sp>
+        <p:nvSpPr>
+          <p:cNvPr id="11" name="TextBox 10"/>
+          <p:cNvSpPr txBox="1"/>
+          <p:nvPr/>
+        </p:nvSpPr>
+        <p:spPr>
+          <a:xfrm>
+            <a:off x="0" y="6172200"/>
+            <a:ext cx="12191695" cy="457200"/>
+          </a:xfrm>
+          <a:prstGeom prst="rect">
+            <a:avLst/>
+          </a:prstGeom>
+          <a:noFill/>
+        </p:spPr>
+        <p:txBody>
+          <a:bodyPr wrap="square" anchor="ctr" lIns="0" rIns="0" tIns="0" bIns="0">
+            <a:spAutoFit/>
+          </a:bodyPr>
+          <a:lstStyle/>
           <a:p>
             <a:pPr algn="ctr"/>
             <a:r>
-              <a:rPr>
-                <a:solidFill>
-                  <a:srgbClr val="1E293B"/>
-                </a:solidFill>
+              <a:rPr sz="1300" b="0">
+                <a:solidFill>
+                  <a:srgbClr val="9AAFC6"/>
+                </a:solidFill>
+                <a:latin typeface="Calibri"/>
               </a:rPr>
-              <a:t>For Your Attention</a:t>
+              <a:t>BarangayConnect · Digital Governance, Made Simple</a:t>
             </a:r>
           </a:p>
         </p:txBody>

--- a/BarangayConnect_Presentation.pptx
+++ b/BarangayConnect_Presentation.pptx
@@ -10,8 +10,10 @@
     <p:sldId id="258" r:id="rId9"/>
     <p:sldId id="259" r:id="rId10"/>
     <p:sldId id="260" r:id="rId11"/>
+    <p:sldId id="264" r:id="rId15"/>
     <p:sldId id="261" r:id="rId12"/>
     <p:sldId id="262" r:id="rId13"/>
+    <p:sldId id="265" r:id="rId16"/>
     <p:sldId id="263" r:id="rId14"/>
   </p:sldIdLst>
   <p:sldSz cx="12191695" cy="6858000" type="screen4x3"/>
@@ -3512,6 +3514,1557 @@
 </p:sld>
 </file>
 
+<file path=ppt/slides/slide10.xml><?xml version="1.0" encoding="utf-8"?>
+<p:sld xmlns:a="http://schemas.openxmlformats.org/drawingml/2006/main" xmlns:p="http://schemas.openxmlformats.org/presentationml/2006/main" xmlns:r="http://schemas.openxmlformats.org/officeDocument/2006/relationships">
+  <p:cSld>
+    <p:spTree>
+      <p:nvGrpSpPr>
+        <p:cNvPr id="1" name=""/>
+        <p:cNvGrpSpPr/>
+        <p:nvPr/>
+      </p:nvGrpSpPr>
+      <p:grpSpPr/>
+      <p:sp>
+        <p:nvSpPr>
+          <p:cNvPr id="2" name="Rectangle 1"/>
+          <p:cNvSpPr/>
+          <p:nvPr/>
+        </p:nvSpPr>
+        <p:spPr>
+          <a:xfrm>
+            <a:off x="0" y="0"/>
+            <a:ext cx="12191695" cy="1234440"/>
+          </a:xfrm>
+          <a:prstGeom prst="rect">
+            <a:avLst/>
+          </a:prstGeom>
+          <a:solidFill>
+            <a:srgbClr val="0F2A4C"/>
+          </a:solidFill>
+          <a:ln>
+            <a:noFill/>
+          </a:ln>
+          <a:effectLst/>
+        </p:spPr>
+        <p:style>
+          <a:lnRef idx="1">
+            <a:schemeClr val="accent1"/>
+          </a:lnRef>
+          <a:fillRef idx="3">
+            <a:schemeClr val="accent1"/>
+          </a:fillRef>
+          <a:effectRef idx="2">
+            <a:schemeClr val="accent1"/>
+          </a:effectRef>
+          <a:fontRef idx="minor">
+            <a:schemeClr val="lt1"/>
+          </a:fontRef>
+        </p:style>
+        <p:txBody>
+          <a:bodyPr rtlCol="0" anchor="ctr"/>
+          <a:lstStyle/>
+          <a:p>
+            <a:pPr algn="ctr"/>
+          </a:p>
+        </p:txBody>
+      </p:sp>
+      <p:sp>
+        <p:nvSpPr>
+          <p:cNvPr id="3" name="Rectangle 2"/>
+          <p:cNvSpPr/>
+          <p:nvPr/>
+        </p:nvSpPr>
+        <p:spPr>
+          <a:xfrm>
+            <a:off x="0" y="1234440"/>
+            <a:ext cx="12191695" cy="50800"/>
+          </a:xfrm>
+          <a:prstGeom prst="rect">
+            <a:avLst/>
+          </a:prstGeom>
+          <a:solidFill>
+            <a:srgbClr val="F2B418"/>
+          </a:solidFill>
+          <a:ln>
+            <a:noFill/>
+          </a:ln>
+          <a:effectLst/>
+        </p:spPr>
+        <p:style>
+          <a:lnRef idx="1">
+            <a:schemeClr val="accent1"/>
+          </a:lnRef>
+          <a:fillRef idx="3">
+            <a:schemeClr val="accent1"/>
+          </a:fillRef>
+          <a:effectRef idx="2">
+            <a:schemeClr val="accent1"/>
+          </a:effectRef>
+          <a:fontRef idx="minor">
+            <a:schemeClr val="lt1"/>
+          </a:fontRef>
+        </p:style>
+        <p:txBody>
+          <a:bodyPr rtlCol="0" anchor="ctr"/>
+          <a:lstStyle/>
+          <a:p>
+            <a:pPr algn="ctr"/>
+          </a:p>
+        </p:txBody>
+      </p:sp>
+      <p:sp>
+        <p:nvSpPr>
+          <p:cNvPr id="4" name="TextBox 3"/>
+          <p:cNvSpPr txBox="1"/>
+          <p:nvPr/>
+        </p:nvSpPr>
+        <p:spPr>
+          <a:xfrm>
+            <a:off x="640080" y="0"/>
+            <a:ext cx="8686800" cy="1234440"/>
+          </a:xfrm>
+          <a:prstGeom prst="rect">
+            <a:avLst/>
+          </a:prstGeom>
+          <a:noFill/>
+        </p:spPr>
+        <p:txBody>
+          <a:bodyPr wrap="square" anchor="ctr" lIns="0" rIns="0" tIns="0" bIns="0">
+            <a:spAutoFit/>
+          </a:bodyPr>
+          <a:lstStyle/>
+          <a:p>
+            <a:pPr algn="l"/>
+            <a:r>
+              <a:rPr sz="3000" b="1">
+                <a:solidFill>
+                  <a:srgbClr val="FFFFFF"/>
+                </a:solidFill>
+                <a:latin typeface="Calibri"/>
+              </a:rPr>
+              <a:t>On-Premise &amp; Operations</a:t>
+            </a:r>
+          </a:p>
+        </p:txBody>
+      </p:sp>
+      <p:sp>
+        <p:nvSpPr>
+          <p:cNvPr id="5" name="TextBox 4"/>
+          <p:cNvSpPr txBox="1"/>
+          <p:nvPr/>
+        </p:nvSpPr>
+        <p:spPr>
+          <a:xfrm>
+            <a:off x="8778240" y="0"/>
+            <a:ext cx="2834640" cy="1234440"/>
+          </a:xfrm>
+          <a:prstGeom prst="rect">
+            <a:avLst/>
+          </a:prstGeom>
+          <a:noFill/>
+        </p:spPr>
+        <p:txBody>
+          <a:bodyPr wrap="square" anchor="ctr" lIns="0" rIns="0" tIns="0" bIns="0">
+            <a:spAutoFit/>
+          </a:bodyPr>
+          <a:lstStyle/>
+          <a:p>
+            <a:pPr algn="r"/>
+            <a:r>
+              <a:rPr sz="1200" b="0">
+                <a:solidFill>
+                  <a:srgbClr val="C9D6E8"/>
+                </a:solidFill>
+                <a:latin typeface="Calibri"/>
+              </a:rPr>
+              <a:t>Self-hosted, always on, always backed up</a:t>
+            </a:r>
+          </a:p>
+        </p:txBody>
+      </p:sp>
+      <p:sp>
+        <p:nvSpPr>
+          <p:cNvPr id="6" name="Rectangle 5"/>
+          <p:cNvSpPr/>
+          <p:nvPr/>
+        </p:nvSpPr>
+        <p:spPr>
+          <a:xfrm>
+            <a:off x="11231575" y="0"/>
+            <a:ext cx="960120" cy="384048"/>
+          </a:xfrm>
+          <a:prstGeom prst="rect">
+            <a:avLst/>
+          </a:prstGeom>
+          <a:solidFill>
+            <a:srgbClr val="F2B418"/>
+          </a:solidFill>
+          <a:ln>
+            <a:noFill/>
+          </a:ln>
+          <a:effectLst/>
+        </p:spPr>
+        <p:style>
+          <a:lnRef idx="1">
+            <a:schemeClr val="accent1"/>
+          </a:lnRef>
+          <a:fillRef idx="3">
+            <a:schemeClr val="accent1"/>
+          </a:fillRef>
+          <a:effectRef idx="2">
+            <a:schemeClr val="accent1"/>
+          </a:effectRef>
+          <a:fontRef idx="minor">
+            <a:schemeClr val="lt1"/>
+          </a:fontRef>
+        </p:style>
+        <p:txBody>
+          <a:bodyPr rtlCol="0" anchor="ctr"/>
+          <a:lstStyle/>
+          <a:p>
+            <a:pPr algn="ctr"/>
+          </a:p>
+        </p:txBody>
+      </p:sp>
+      <p:sp>
+        <p:nvSpPr>
+          <p:cNvPr id="7" name="TextBox 6"/>
+          <p:cNvSpPr txBox="1"/>
+          <p:nvPr/>
+        </p:nvSpPr>
+        <p:spPr>
+          <a:xfrm>
+            <a:off x="11231575" y="0"/>
+            <a:ext cx="960120" cy="384048"/>
+          </a:xfrm>
+          <a:prstGeom prst="rect">
+            <a:avLst/>
+          </a:prstGeom>
+          <a:noFill/>
+        </p:spPr>
+        <p:txBody>
+          <a:bodyPr wrap="square" anchor="ctr" lIns="0" rIns="0" tIns="0" bIns="0">
+            <a:spAutoFit/>
+          </a:bodyPr>
+          <a:lstStyle/>
+          <a:p>
+            <a:pPr algn="ctr"/>
+            <a:r>
+              <a:rPr sz="1400" b="1">
+                <a:solidFill>
+                  <a:srgbClr val="0F2A4C"/>
+                </a:solidFill>
+                <a:latin typeface="Calibri"/>
+              </a:rPr>
+              <a:t>BC</a:t>
+            </a:r>
+          </a:p>
+        </p:txBody>
+      </p:sp>
+      <p:sp>
+        <p:nvSpPr>
+          <p:cNvPr id="8" name="Rounded Rectangle 7"/>
+          <p:cNvSpPr/>
+          <p:nvPr/>
+        </p:nvSpPr>
+        <p:spPr>
+          <a:xfrm>
+            <a:off x="594360" y="1554480"/>
+            <a:ext cx="5303520" cy="914400"/>
+          </a:xfrm>
+          <a:prstGeom prst="roundRect">
+            <a:avLst/>
+          </a:prstGeom>
+          <a:solidFill>
+            <a:srgbClr val="FFFFFF"/>
+          </a:solidFill>
+          <a:ln>
+            <a:noFill/>
+          </a:ln>
+          <a:effectLst/>
+        </p:spPr>
+        <p:style>
+          <a:lnRef idx="1">
+            <a:schemeClr val="accent1"/>
+          </a:lnRef>
+          <a:fillRef idx="3">
+            <a:schemeClr val="accent1"/>
+          </a:fillRef>
+          <a:effectRef idx="2">
+            <a:schemeClr val="accent1"/>
+          </a:effectRef>
+          <a:fontRef idx="minor">
+            <a:schemeClr val="lt1"/>
+          </a:fontRef>
+        </p:style>
+        <p:txBody>
+          <a:bodyPr rtlCol="0" anchor="ctr"/>
+          <a:lstStyle/>
+          <a:p>
+            <a:pPr algn="ctr"/>
+          </a:p>
+        </p:txBody>
+      </p:sp>
+      <p:sp>
+        <p:nvSpPr>
+          <p:cNvPr id="9" name="Rectangle 8"/>
+          <p:cNvSpPr/>
+          <p:nvPr/>
+        </p:nvSpPr>
+        <p:spPr>
+          <a:xfrm>
+            <a:off x="594360" y="1554480"/>
+            <a:ext cx="82296" cy="914400"/>
+          </a:xfrm>
+          <a:prstGeom prst="rect">
+            <a:avLst/>
+          </a:prstGeom>
+          <a:solidFill>
+            <a:srgbClr val="F2B418"/>
+          </a:solidFill>
+          <a:ln>
+            <a:noFill/>
+          </a:ln>
+          <a:effectLst/>
+        </p:spPr>
+        <p:style>
+          <a:lnRef idx="1">
+            <a:schemeClr val="accent1"/>
+          </a:lnRef>
+          <a:fillRef idx="3">
+            <a:schemeClr val="accent1"/>
+          </a:fillRef>
+          <a:effectRef idx="2">
+            <a:schemeClr val="accent1"/>
+          </a:effectRef>
+          <a:fontRef idx="minor">
+            <a:schemeClr val="lt1"/>
+          </a:fontRef>
+        </p:style>
+        <p:txBody>
+          <a:bodyPr rtlCol="0" anchor="ctr"/>
+          <a:lstStyle/>
+          <a:p>
+            <a:pPr algn="ctr"/>
+          </a:p>
+        </p:txBody>
+      </p:sp>
+      <p:sp>
+        <p:nvSpPr>
+          <p:cNvPr id="10" name="TextBox 9"/>
+          <p:cNvSpPr txBox="1"/>
+          <p:nvPr/>
+        </p:nvSpPr>
+        <p:spPr>
+          <a:xfrm>
+            <a:off x="868680" y="1664208"/>
+            <a:ext cx="4846320" cy="411480"/>
+          </a:xfrm>
+          <a:prstGeom prst="rect">
+            <a:avLst/>
+          </a:prstGeom>
+          <a:noFill/>
+        </p:spPr>
+        <p:txBody>
+          <a:bodyPr wrap="square" anchor="ctr" lIns="0" rIns="0" tIns="0" bIns="0">
+            <a:spAutoFit/>
+          </a:bodyPr>
+          <a:lstStyle/>
+          <a:p>
+            <a:pPr algn="l"/>
+            <a:r>
+              <a:rPr sz="1500" b="1">
+                <a:solidFill>
+                  <a:srgbClr val="0F2A4C"/>
+                </a:solidFill>
+                <a:latin typeface="Calibri"/>
+              </a:rPr>
+              <a:t>Fully Self-Hosted</a:t>
+            </a:r>
+          </a:p>
+        </p:txBody>
+      </p:sp>
+      <p:sp>
+        <p:nvSpPr>
+          <p:cNvPr id="11" name="TextBox 10"/>
+          <p:cNvSpPr txBox="1"/>
+          <p:nvPr/>
+        </p:nvSpPr>
+        <p:spPr>
+          <a:xfrm>
+            <a:off x="868680" y="2029968"/>
+            <a:ext cx="4846320" cy="365760"/>
+          </a:xfrm>
+          <a:prstGeom prst="rect">
+            <a:avLst/>
+          </a:prstGeom>
+          <a:noFill/>
+        </p:spPr>
+        <p:txBody>
+          <a:bodyPr wrap="square" anchor="t" lIns="0" rIns="0" tIns="0" bIns="0">
+            <a:spAutoFit/>
+          </a:bodyPr>
+          <a:lstStyle/>
+          <a:p>
+            <a:pPr algn="l">
+              <a:lnSpc>
+                <a:spcPct val="110000"/>
+              </a:lnSpc>
+            </a:pPr>
+            <a:r>
+              <a:rPr sz="1500" b="0">
+                <a:solidFill>
+                  <a:srgbClr val="243244"/>
+                </a:solidFill>
+                <a:latin typeface="Calibri"/>
+              </a:rPr>
+              <a:t>Runs on the barangay's own machine over the local network.</a:t>
+            </a:r>
+          </a:p>
+        </p:txBody>
+      </p:sp>
+      <p:sp>
+        <p:nvSpPr>
+          <p:cNvPr id="12" name="Rounded Rectangle 11"/>
+          <p:cNvSpPr/>
+          <p:nvPr/>
+        </p:nvSpPr>
+        <p:spPr>
+          <a:xfrm>
+            <a:off x="6309360" y="1554480"/>
+            <a:ext cx="5303520" cy="914400"/>
+          </a:xfrm>
+          <a:prstGeom prst="roundRect">
+            <a:avLst/>
+          </a:prstGeom>
+          <a:solidFill>
+            <a:srgbClr val="FFFFFF"/>
+          </a:solidFill>
+          <a:ln>
+            <a:noFill/>
+          </a:ln>
+          <a:effectLst/>
+        </p:spPr>
+        <p:style>
+          <a:lnRef idx="1">
+            <a:schemeClr val="accent1"/>
+          </a:lnRef>
+          <a:fillRef idx="3">
+            <a:schemeClr val="accent1"/>
+          </a:fillRef>
+          <a:effectRef idx="2">
+            <a:schemeClr val="accent1"/>
+          </a:effectRef>
+          <a:fontRef idx="minor">
+            <a:schemeClr val="lt1"/>
+          </a:fontRef>
+        </p:style>
+        <p:txBody>
+          <a:bodyPr rtlCol="0" anchor="ctr"/>
+          <a:lstStyle/>
+          <a:p>
+            <a:pPr algn="ctr"/>
+          </a:p>
+        </p:txBody>
+      </p:sp>
+      <p:sp>
+        <p:nvSpPr>
+          <p:cNvPr id="13" name="Rectangle 12"/>
+          <p:cNvSpPr/>
+          <p:nvPr/>
+        </p:nvSpPr>
+        <p:spPr>
+          <a:xfrm>
+            <a:off x="6309360" y="1554480"/>
+            <a:ext cx="82296" cy="914400"/>
+          </a:xfrm>
+          <a:prstGeom prst="rect">
+            <a:avLst/>
+          </a:prstGeom>
+          <a:solidFill>
+            <a:srgbClr val="F2B418"/>
+          </a:solidFill>
+          <a:ln>
+            <a:noFill/>
+          </a:ln>
+          <a:effectLst/>
+        </p:spPr>
+        <p:style>
+          <a:lnRef idx="1">
+            <a:schemeClr val="accent1"/>
+          </a:lnRef>
+          <a:fillRef idx="3">
+            <a:schemeClr val="accent1"/>
+          </a:fillRef>
+          <a:effectRef idx="2">
+            <a:schemeClr val="accent1"/>
+          </a:effectRef>
+          <a:fontRef idx="minor">
+            <a:schemeClr val="lt1"/>
+          </a:fontRef>
+        </p:style>
+        <p:txBody>
+          <a:bodyPr rtlCol="0" anchor="ctr"/>
+          <a:lstStyle/>
+          <a:p>
+            <a:pPr algn="ctr"/>
+          </a:p>
+        </p:txBody>
+      </p:sp>
+      <p:sp>
+        <p:nvSpPr>
+          <p:cNvPr id="14" name="TextBox 13"/>
+          <p:cNvSpPr txBox="1"/>
+          <p:nvPr/>
+        </p:nvSpPr>
+        <p:spPr>
+          <a:xfrm>
+            <a:off x="6583680" y="1664208"/>
+            <a:ext cx="4846320" cy="411480"/>
+          </a:xfrm>
+          <a:prstGeom prst="rect">
+            <a:avLst/>
+          </a:prstGeom>
+          <a:noFill/>
+        </p:spPr>
+        <p:txBody>
+          <a:bodyPr wrap="square" anchor="ctr" lIns="0" rIns="0" tIns="0" bIns="0">
+            <a:spAutoFit/>
+          </a:bodyPr>
+          <a:lstStyle/>
+          <a:p>
+            <a:pPr algn="l"/>
+            <a:r>
+              <a:rPr sz="1500" b="1">
+                <a:solidFill>
+                  <a:srgbClr val="0F2A4C"/>
+                </a:solidFill>
+                <a:latin typeface="Calibri"/>
+              </a:rPr>
+              <a:t>On-Premise PostgreSQL</a:t>
+            </a:r>
+          </a:p>
+        </p:txBody>
+      </p:sp>
+      <p:sp>
+        <p:nvSpPr>
+          <p:cNvPr id="15" name="TextBox 14"/>
+          <p:cNvSpPr txBox="1"/>
+          <p:nvPr/>
+        </p:nvSpPr>
+        <p:spPr>
+          <a:xfrm>
+            <a:off x="6583680" y="2029968"/>
+            <a:ext cx="4846320" cy="365760"/>
+          </a:xfrm>
+          <a:prstGeom prst="rect">
+            <a:avLst/>
+          </a:prstGeom>
+          <a:noFill/>
+        </p:spPr>
+        <p:txBody>
+          <a:bodyPr wrap="square" anchor="t" lIns="0" rIns="0" tIns="0" bIns="0">
+            <a:spAutoFit/>
+          </a:bodyPr>
+          <a:lstStyle/>
+          <a:p>
+            <a:pPr algn="l">
+              <a:lnSpc>
+                <a:spcPct val="110000"/>
+              </a:lnSpc>
+            </a:pPr>
+            <a:r>
+              <a:rPr sz="1500" b="0">
+                <a:solidFill>
+                  <a:srgbClr val="243244"/>
+                </a:solidFill>
+                <a:latin typeface="Calibri"/>
+              </a:rPr>
+              <a:t>Data is stored locally - nothing leaves the barangay.</a:t>
+            </a:r>
+          </a:p>
+        </p:txBody>
+      </p:sp>
+      <p:sp>
+        <p:nvSpPr>
+          <p:cNvPr id="16" name="Rounded Rectangle 15"/>
+          <p:cNvSpPr/>
+          <p:nvPr/>
+        </p:nvSpPr>
+        <p:spPr>
+          <a:xfrm>
+            <a:off x="594360" y="3063240"/>
+            <a:ext cx="5303520" cy="914400"/>
+          </a:xfrm>
+          <a:prstGeom prst="roundRect">
+            <a:avLst/>
+          </a:prstGeom>
+          <a:solidFill>
+            <a:srgbClr val="FFFFFF"/>
+          </a:solidFill>
+          <a:ln>
+            <a:noFill/>
+          </a:ln>
+          <a:effectLst/>
+        </p:spPr>
+        <p:style>
+          <a:lnRef idx="1">
+            <a:schemeClr val="accent1"/>
+          </a:lnRef>
+          <a:fillRef idx="3">
+            <a:schemeClr val="accent1"/>
+          </a:fillRef>
+          <a:effectRef idx="2">
+            <a:schemeClr val="accent1"/>
+          </a:effectRef>
+          <a:fontRef idx="minor">
+            <a:schemeClr val="lt1"/>
+          </a:fontRef>
+        </p:style>
+        <p:txBody>
+          <a:bodyPr rtlCol="0" anchor="ctr"/>
+          <a:lstStyle/>
+          <a:p>
+            <a:pPr algn="ctr"/>
+          </a:p>
+        </p:txBody>
+      </p:sp>
+      <p:sp>
+        <p:nvSpPr>
+          <p:cNvPr id="17" name="Rectangle 16"/>
+          <p:cNvSpPr/>
+          <p:nvPr/>
+        </p:nvSpPr>
+        <p:spPr>
+          <a:xfrm>
+            <a:off x="594360" y="3063240"/>
+            <a:ext cx="82296" cy="914400"/>
+          </a:xfrm>
+          <a:prstGeom prst="rect">
+            <a:avLst/>
+          </a:prstGeom>
+          <a:solidFill>
+            <a:srgbClr val="F2B418"/>
+          </a:solidFill>
+          <a:ln>
+            <a:noFill/>
+          </a:ln>
+          <a:effectLst/>
+        </p:spPr>
+        <p:style>
+          <a:lnRef idx="1">
+            <a:schemeClr val="accent1"/>
+          </a:lnRef>
+          <a:fillRef idx="3">
+            <a:schemeClr val="accent1"/>
+          </a:fillRef>
+          <a:effectRef idx="2">
+            <a:schemeClr val="accent1"/>
+          </a:effectRef>
+          <a:fontRef idx="minor">
+            <a:schemeClr val="lt1"/>
+          </a:fontRef>
+        </p:style>
+        <p:txBody>
+          <a:bodyPr rtlCol="0" anchor="ctr"/>
+          <a:lstStyle/>
+          <a:p>
+            <a:pPr algn="ctr"/>
+          </a:p>
+        </p:txBody>
+      </p:sp>
+      <p:sp>
+        <p:nvSpPr>
+          <p:cNvPr id="18" name="TextBox 17"/>
+          <p:cNvSpPr txBox="1"/>
+          <p:nvPr/>
+        </p:nvSpPr>
+        <p:spPr>
+          <a:xfrm>
+            <a:off x="868680" y="3172968"/>
+            <a:ext cx="4846320" cy="411480"/>
+          </a:xfrm>
+          <a:prstGeom prst="rect">
+            <a:avLst/>
+          </a:prstGeom>
+          <a:noFill/>
+        </p:spPr>
+        <p:txBody>
+          <a:bodyPr wrap="square" anchor="ctr" lIns="0" rIns="0" tIns="0" bIns="0">
+            <a:spAutoFit/>
+          </a:bodyPr>
+          <a:lstStyle/>
+          <a:p>
+            <a:pPr algn="l"/>
+            <a:r>
+              <a:rPr sz="1500" b="1">
+                <a:solidFill>
+                  <a:srgbClr val="0F2A4C"/>
+                </a:solidFill>
+                <a:latin typeface="Calibri"/>
+              </a:rPr>
+              <a:t>Scheduled Auto-Start</a:t>
+            </a:r>
+          </a:p>
+        </p:txBody>
+      </p:sp>
+      <p:sp>
+        <p:nvSpPr>
+          <p:cNvPr id="19" name="TextBox 18"/>
+          <p:cNvSpPr txBox="1"/>
+          <p:nvPr/>
+        </p:nvSpPr>
+        <p:spPr>
+          <a:xfrm>
+            <a:off x="868680" y="3538728"/>
+            <a:ext cx="4846320" cy="365760"/>
+          </a:xfrm>
+          <a:prstGeom prst="rect">
+            <a:avLst/>
+          </a:prstGeom>
+          <a:noFill/>
+        </p:spPr>
+        <p:txBody>
+          <a:bodyPr wrap="square" anchor="t" lIns="0" rIns="0" tIns="0" bIns="0">
+            <a:spAutoFit/>
+          </a:bodyPr>
+          <a:lstStyle/>
+          <a:p>
+            <a:pPr algn="l">
+              <a:lnSpc>
+                <a:spcPct val="110000"/>
+              </a:lnSpc>
+            </a:pPr>
+            <a:r>
+              <a:rPr sz="1500" b="0">
+                <a:solidFill>
+                  <a:srgbClr val="243244"/>
+                </a:solidFill>
+                <a:latin typeface="Calibri"/>
+              </a:rPr>
+              <a:t>App and tunnel launch automatically at boot.</a:t>
+            </a:r>
+          </a:p>
+        </p:txBody>
+      </p:sp>
+      <p:sp>
+        <p:nvSpPr>
+          <p:cNvPr id="20" name="Rounded Rectangle 19"/>
+          <p:cNvSpPr/>
+          <p:nvPr/>
+        </p:nvSpPr>
+        <p:spPr>
+          <a:xfrm>
+            <a:off x="6309360" y="3063240"/>
+            <a:ext cx="5303520" cy="914400"/>
+          </a:xfrm>
+          <a:prstGeom prst="roundRect">
+            <a:avLst/>
+          </a:prstGeom>
+          <a:solidFill>
+            <a:srgbClr val="FFFFFF"/>
+          </a:solidFill>
+          <a:ln>
+            <a:noFill/>
+          </a:ln>
+          <a:effectLst/>
+        </p:spPr>
+        <p:style>
+          <a:lnRef idx="1">
+            <a:schemeClr val="accent1"/>
+          </a:lnRef>
+          <a:fillRef idx="3">
+            <a:schemeClr val="accent1"/>
+          </a:fillRef>
+          <a:effectRef idx="2">
+            <a:schemeClr val="accent1"/>
+          </a:effectRef>
+          <a:fontRef idx="minor">
+            <a:schemeClr val="lt1"/>
+          </a:fontRef>
+        </p:style>
+        <p:txBody>
+          <a:bodyPr rtlCol="0" anchor="ctr"/>
+          <a:lstStyle/>
+          <a:p>
+            <a:pPr algn="ctr"/>
+          </a:p>
+        </p:txBody>
+      </p:sp>
+      <p:sp>
+        <p:nvSpPr>
+          <p:cNvPr id="21" name="Rectangle 20"/>
+          <p:cNvSpPr/>
+          <p:nvPr/>
+        </p:nvSpPr>
+        <p:spPr>
+          <a:xfrm>
+            <a:off x="6309360" y="3063240"/>
+            <a:ext cx="82296" cy="914400"/>
+          </a:xfrm>
+          <a:prstGeom prst="rect">
+            <a:avLst/>
+          </a:prstGeom>
+          <a:solidFill>
+            <a:srgbClr val="F2B418"/>
+          </a:solidFill>
+          <a:ln>
+            <a:noFill/>
+          </a:ln>
+          <a:effectLst/>
+        </p:spPr>
+        <p:style>
+          <a:lnRef idx="1">
+            <a:schemeClr val="accent1"/>
+          </a:lnRef>
+          <a:fillRef idx="3">
+            <a:schemeClr val="accent1"/>
+          </a:fillRef>
+          <a:effectRef idx="2">
+            <a:schemeClr val="accent1"/>
+          </a:effectRef>
+          <a:fontRef idx="minor">
+            <a:schemeClr val="lt1"/>
+          </a:fontRef>
+        </p:style>
+        <p:txBody>
+          <a:bodyPr rtlCol="0" anchor="ctr"/>
+          <a:lstStyle/>
+          <a:p>
+            <a:pPr algn="ctr"/>
+          </a:p>
+        </p:txBody>
+      </p:sp>
+      <p:sp>
+        <p:nvSpPr>
+          <p:cNvPr id="22" name="TextBox 21"/>
+          <p:cNvSpPr txBox="1"/>
+          <p:nvPr/>
+        </p:nvSpPr>
+        <p:spPr>
+          <a:xfrm>
+            <a:off x="6583680" y="3172968"/>
+            <a:ext cx="4846320" cy="411480"/>
+          </a:xfrm>
+          <a:prstGeom prst="rect">
+            <a:avLst/>
+          </a:prstGeom>
+          <a:noFill/>
+        </p:spPr>
+        <p:txBody>
+          <a:bodyPr wrap="square" anchor="ctr" lIns="0" rIns="0" tIns="0" bIns="0">
+            <a:spAutoFit/>
+          </a:bodyPr>
+          <a:lstStyle/>
+          <a:p>
+            <a:pPr algn="l"/>
+            <a:r>
+              <a:rPr sz="1500" b="1">
+                <a:solidFill>
+                  <a:srgbClr val="0F2A4C"/>
+                </a:solidFill>
+                <a:latin typeface="Calibri"/>
+              </a:rPr>
+              <a:t>Health Monitoring</a:t>
+            </a:r>
+          </a:p>
+        </p:txBody>
+      </p:sp>
+      <p:sp>
+        <p:nvSpPr>
+          <p:cNvPr id="23" name="TextBox 22"/>
+          <p:cNvSpPr txBox="1"/>
+          <p:nvPr/>
+        </p:nvSpPr>
+        <p:spPr>
+          <a:xfrm>
+            <a:off x="6583680" y="3538728"/>
+            <a:ext cx="4846320" cy="365760"/>
+          </a:xfrm>
+          <a:prstGeom prst="rect">
+            <a:avLst/>
+          </a:prstGeom>
+          <a:noFill/>
+        </p:spPr>
+        <p:txBody>
+          <a:bodyPr wrap="square" anchor="t" lIns="0" rIns="0" tIns="0" bIns="0">
+            <a:spAutoFit/>
+          </a:bodyPr>
+          <a:lstStyle/>
+          <a:p>
+            <a:pPr algn="l">
+              <a:lnSpc>
+                <a:spcPct val="110000"/>
+              </a:lnSpc>
+            </a:pPr>
+            <a:r>
+              <a:rPr sz="1500" b="0">
+                <a:solidFill>
+                  <a:srgbClr val="243244"/>
+                </a:solidFill>
+                <a:latin typeface="Calibri"/>
+              </a:rPr>
+              <a:t>Watches uptime and restarts services on failure.</a:t>
+            </a:r>
+          </a:p>
+        </p:txBody>
+      </p:sp>
+      <p:sp>
+        <p:nvSpPr>
+          <p:cNvPr id="24" name="Rounded Rectangle 23"/>
+          <p:cNvSpPr/>
+          <p:nvPr/>
+        </p:nvSpPr>
+        <p:spPr>
+          <a:xfrm>
+            <a:off x="594360" y="4572000"/>
+            <a:ext cx="5303520" cy="914400"/>
+          </a:xfrm>
+          <a:prstGeom prst="roundRect">
+            <a:avLst/>
+          </a:prstGeom>
+          <a:solidFill>
+            <a:srgbClr val="FFFFFF"/>
+          </a:solidFill>
+          <a:ln>
+            <a:noFill/>
+          </a:ln>
+          <a:effectLst/>
+        </p:spPr>
+        <p:style>
+          <a:lnRef idx="1">
+            <a:schemeClr val="accent1"/>
+          </a:lnRef>
+          <a:fillRef idx="3">
+            <a:schemeClr val="accent1"/>
+          </a:fillRef>
+          <a:effectRef idx="2">
+            <a:schemeClr val="accent1"/>
+          </a:effectRef>
+          <a:fontRef idx="minor">
+            <a:schemeClr val="lt1"/>
+          </a:fontRef>
+        </p:style>
+        <p:txBody>
+          <a:bodyPr rtlCol="0" anchor="ctr"/>
+          <a:lstStyle/>
+          <a:p>
+            <a:pPr algn="ctr"/>
+          </a:p>
+        </p:txBody>
+      </p:sp>
+      <p:sp>
+        <p:nvSpPr>
+          <p:cNvPr id="25" name="Rectangle 24"/>
+          <p:cNvSpPr/>
+          <p:nvPr/>
+        </p:nvSpPr>
+        <p:spPr>
+          <a:xfrm>
+            <a:off x="594360" y="4572000"/>
+            <a:ext cx="82296" cy="914400"/>
+          </a:xfrm>
+          <a:prstGeom prst="rect">
+            <a:avLst/>
+          </a:prstGeom>
+          <a:solidFill>
+            <a:srgbClr val="F2B418"/>
+          </a:solidFill>
+          <a:ln>
+            <a:noFill/>
+          </a:ln>
+          <a:effectLst/>
+        </p:spPr>
+        <p:style>
+          <a:lnRef idx="1">
+            <a:schemeClr val="accent1"/>
+          </a:lnRef>
+          <a:fillRef idx="3">
+            <a:schemeClr val="accent1"/>
+          </a:fillRef>
+          <a:effectRef idx="2">
+            <a:schemeClr val="accent1"/>
+          </a:effectRef>
+          <a:fontRef idx="minor">
+            <a:schemeClr val="lt1"/>
+          </a:fontRef>
+        </p:style>
+        <p:txBody>
+          <a:bodyPr rtlCol="0" anchor="ctr"/>
+          <a:lstStyle/>
+          <a:p>
+            <a:pPr algn="ctr"/>
+          </a:p>
+        </p:txBody>
+      </p:sp>
+      <p:sp>
+        <p:nvSpPr>
+          <p:cNvPr id="26" name="TextBox 25"/>
+          <p:cNvSpPr txBox="1"/>
+          <p:nvPr/>
+        </p:nvSpPr>
+        <p:spPr>
+          <a:xfrm>
+            <a:off x="868680" y="4681728"/>
+            <a:ext cx="4846320" cy="411480"/>
+          </a:xfrm>
+          <a:prstGeom prst="rect">
+            <a:avLst/>
+          </a:prstGeom>
+          <a:noFill/>
+        </p:spPr>
+        <p:txBody>
+          <a:bodyPr wrap="square" anchor="ctr" lIns="0" rIns="0" tIns="0" bIns="0">
+            <a:spAutoFit/>
+          </a:bodyPr>
+          <a:lstStyle/>
+          <a:p>
+            <a:pPr algn="l"/>
+            <a:r>
+              <a:rPr sz="1500" b="1">
+                <a:solidFill>
+                  <a:srgbClr val="0F2A4C"/>
+                </a:solidFill>
+                <a:latin typeface="Calibri"/>
+              </a:rPr>
+              <a:t>Hourly Backups</a:t>
+            </a:r>
+          </a:p>
+        </p:txBody>
+      </p:sp>
+      <p:sp>
+        <p:nvSpPr>
+          <p:cNvPr id="27" name="TextBox 26"/>
+          <p:cNvSpPr txBox="1"/>
+          <p:nvPr/>
+        </p:nvSpPr>
+        <p:spPr>
+          <a:xfrm>
+            <a:off x="868680" y="5047488"/>
+            <a:ext cx="4846320" cy="365760"/>
+          </a:xfrm>
+          <a:prstGeom prst="rect">
+            <a:avLst/>
+          </a:prstGeom>
+          <a:noFill/>
+        </p:spPr>
+        <p:txBody>
+          <a:bodyPr wrap="square" anchor="t" lIns="0" rIns="0" tIns="0" bIns="0">
+            <a:spAutoFit/>
+          </a:bodyPr>
+          <a:lstStyle/>
+          <a:p>
+            <a:pPr algn="l">
+              <a:lnSpc>
+                <a:spcPct val="110000"/>
+              </a:lnSpc>
+            </a:pPr>
+            <a:r>
+              <a:rPr sz="1500" b="0">
+                <a:solidFill>
+                  <a:srgbClr val="243244"/>
+                </a:solidFill>
+                <a:latin typeface="Calibri"/>
+              </a:rPr>
+              <a:t>Automatic database backups with one-command restore.</a:t>
+            </a:r>
+          </a:p>
+        </p:txBody>
+      </p:sp>
+      <p:sp>
+        <p:nvSpPr>
+          <p:cNvPr id="28" name="Rounded Rectangle 27"/>
+          <p:cNvSpPr/>
+          <p:nvPr/>
+        </p:nvSpPr>
+        <p:spPr>
+          <a:xfrm>
+            <a:off x="6309360" y="4572000"/>
+            <a:ext cx="5303520" cy="914400"/>
+          </a:xfrm>
+          <a:prstGeom prst="roundRect">
+            <a:avLst/>
+          </a:prstGeom>
+          <a:solidFill>
+            <a:srgbClr val="FFFFFF"/>
+          </a:solidFill>
+          <a:ln>
+            <a:noFill/>
+          </a:ln>
+          <a:effectLst/>
+        </p:spPr>
+        <p:style>
+          <a:lnRef idx="1">
+            <a:schemeClr val="accent1"/>
+          </a:lnRef>
+          <a:fillRef idx="3">
+            <a:schemeClr val="accent1"/>
+          </a:fillRef>
+          <a:effectRef idx="2">
+            <a:schemeClr val="accent1"/>
+          </a:effectRef>
+          <a:fontRef idx="minor">
+            <a:schemeClr val="lt1"/>
+          </a:fontRef>
+        </p:style>
+        <p:txBody>
+          <a:bodyPr rtlCol="0" anchor="ctr"/>
+          <a:lstStyle/>
+          <a:p>
+            <a:pPr algn="ctr"/>
+          </a:p>
+        </p:txBody>
+      </p:sp>
+      <p:sp>
+        <p:nvSpPr>
+          <p:cNvPr id="29" name="Rectangle 28"/>
+          <p:cNvSpPr/>
+          <p:nvPr/>
+        </p:nvSpPr>
+        <p:spPr>
+          <a:xfrm>
+            <a:off x="6309360" y="4572000"/>
+            <a:ext cx="82296" cy="914400"/>
+          </a:xfrm>
+          <a:prstGeom prst="rect">
+            <a:avLst/>
+          </a:prstGeom>
+          <a:solidFill>
+            <a:srgbClr val="F2B418"/>
+          </a:solidFill>
+          <a:ln>
+            <a:noFill/>
+          </a:ln>
+          <a:effectLst/>
+        </p:spPr>
+        <p:style>
+          <a:lnRef idx="1">
+            <a:schemeClr val="accent1"/>
+          </a:lnRef>
+          <a:fillRef idx="3">
+            <a:schemeClr val="accent1"/>
+          </a:fillRef>
+          <a:effectRef idx="2">
+            <a:schemeClr val="accent1"/>
+          </a:effectRef>
+          <a:fontRef idx="minor">
+            <a:schemeClr val="lt1"/>
+          </a:fontRef>
+        </p:style>
+        <p:txBody>
+          <a:bodyPr rtlCol="0" anchor="ctr"/>
+          <a:lstStyle/>
+          <a:p>
+            <a:pPr algn="ctr"/>
+          </a:p>
+        </p:txBody>
+      </p:sp>
+      <p:sp>
+        <p:nvSpPr>
+          <p:cNvPr id="30" name="TextBox 29"/>
+          <p:cNvSpPr txBox="1"/>
+          <p:nvPr/>
+        </p:nvSpPr>
+        <p:spPr>
+          <a:xfrm>
+            <a:off x="6583680" y="4681728"/>
+            <a:ext cx="4846320" cy="411480"/>
+          </a:xfrm>
+          <a:prstGeom prst="rect">
+            <a:avLst/>
+          </a:prstGeom>
+          <a:noFill/>
+        </p:spPr>
+        <p:txBody>
+          <a:bodyPr wrap="square" anchor="ctr" lIns="0" rIns="0" tIns="0" bIns="0">
+            <a:spAutoFit/>
+          </a:bodyPr>
+          <a:lstStyle/>
+          <a:p>
+            <a:pPr algn="l"/>
+            <a:r>
+              <a:rPr sz="1500" b="1">
+                <a:solidFill>
+                  <a:srgbClr val="0F2A4C"/>
+                </a:solidFill>
+                <a:latin typeface="Calibri"/>
+              </a:rPr>
+              <a:t>Secure Remote Access</a:t>
+            </a:r>
+          </a:p>
+        </p:txBody>
+      </p:sp>
+      <p:sp>
+        <p:nvSpPr>
+          <p:cNvPr id="31" name="TextBox 30"/>
+          <p:cNvSpPr txBox="1"/>
+          <p:nvPr/>
+        </p:nvSpPr>
+        <p:spPr>
+          <a:xfrm>
+            <a:off x="6583680" y="5047488"/>
+            <a:ext cx="4846320" cy="365760"/>
+          </a:xfrm>
+          <a:prstGeom prst="rect">
+            <a:avLst/>
+          </a:prstGeom>
+          <a:noFill/>
+        </p:spPr>
+        <p:txBody>
+          <a:bodyPr wrap="square" anchor="t" lIns="0" rIns="0" tIns="0" bIns="0">
+            <a:spAutoFit/>
+          </a:bodyPr>
+          <a:lstStyle/>
+          <a:p>
+            <a:pPr algn="l">
+              <a:lnSpc>
+                <a:spcPct val="110000"/>
+              </a:lnSpc>
+            </a:pPr>
+            <a:r>
+              <a:rPr sz="1500" b="0">
+                <a:solidFill>
+                  <a:srgbClr val="243244"/>
+                </a:solidFill>
+                <a:latin typeface="Calibri"/>
+              </a:rPr>
+              <a:t>Tunnel lets officials sign in from outside the office.</a:t>
+            </a:r>
+          </a:p>
+        </p:txBody>
+      </p:sp>
+      <p:sp>
+        <p:nvSpPr>
+          <p:cNvPr id="32" name="Rounded Rectangle 31"/>
+          <p:cNvSpPr/>
+          <p:nvPr/>
+        </p:nvSpPr>
+        <p:spPr>
+          <a:xfrm>
+            <a:off x="594360" y="5623560"/>
+            <a:ext cx="5303520" cy="914400"/>
+          </a:xfrm>
+          <a:prstGeom prst="roundRect">
+            <a:avLst/>
+          </a:prstGeom>
+          <a:solidFill>
+            <a:srgbClr val="FFFFFF"/>
+          </a:solidFill>
+          <a:ln>
+            <a:noFill/>
+          </a:ln>
+          <a:effectLst/>
+        </p:spPr>
+        <p:style>
+          <a:lnRef idx="1">
+            <a:schemeClr val="accent1"/>
+          </a:lnRef>
+          <a:fillRef idx="3">
+            <a:schemeClr val="accent1"/>
+          </a:fillRef>
+          <a:effectRef idx="2">
+            <a:schemeClr val="accent1"/>
+          </a:effectRef>
+          <a:fontRef idx="minor">
+            <a:schemeClr val="lt1"/>
+          </a:fontRef>
+        </p:style>
+        <p:txBody>
+          <a:bodyPr rtlCol="0" anchor="ctr"/>
+          <a:lstStyle/>
+          <a:p>
+            <a:pPr algn="ctr"/>
+          </a:p>
+        </p:txBody>
+      </p:sp>
+      <p:sp>
+        <p:nvSpPr>
+          <p:cNvPr id="33" name="Rectangle 32"/>
+          <p:cNvSpPr/>
+          <p:nvPr/>
+        </p:nvSpPr>
+        <p:spPr>
+          <a:xfrm>
+            <a:off x="594360" y="5623560"/>
+            <a:ext cx="82296" cy="914400"/>
+          </a:xfrm>
+          <a:prstGeom prst="rect">
+            <a:avLst/>
+          </a:prstGeom>
+          <a:solidFill>
+            <a:srgbClr val="F2B418"/>
+          </a:solidFill>
+          <a:ln>
+            <a:noFill/>
+          </a:ln>
+          <a:effectLst/>
+        </p:spPr>
+        <p:style>
+          <a:lnRef idx="1">
+            <a:schemeClr val="accent1"/>
+          </a:lnRef>
+          <a:fillRef idx="3">
+            <a:schemeClr val="accent1"/>
+          </a:fillRef>
+          <a:effectRef idx="2">
+            <a:schemeClr val="accent1"/>
+          </a:effectRef>
+          <a:fontRef idx="minor">
+            <a:schemeClr val="lt1"/>
+          </a:fontRef>
+        </p:style>
+        <p:txBody>
+          <a:bodyPr rtlCol="0" anchor="ctr"/>
+          <a:lstStyle/>
+          <a:p>
+            <a:pPr algn="ctr"/>
+          </a:p>
+        </p:txBody>
+      </p:sp>
+      <p:sp>
+        <p:nvSpPr>
+          <p:cNvPr id="34" name="TextBox 33"/>
+          <p:cNvSpPr txBox="1"/>
+          <p:nvPr/>
+        </p:nvSpPr>
+        <p:spPr>
+          <a:xfrm>
+            <a:off x="868680" y="5733288"/>
+            <a:ext cx="4846320" cy="411480"/>
+          </a:xfrm>
+          <a:prstGeom prst="rect">
+            <a:avLst/>
+          </a:prstGeom>
+          <a:noFill/>
+        </p:spPr>
+        <p:txBody>
+          <a:bodyPr wrap="square" anchor="ctr" lIns="0" rIns="0" tIns="0" bIns="0">
+            <a:spAutoFit/>
+          </a:bodyPr>
+          <a:lstStyle/>
+          <a:p>
+            <a:pPr algn="l"/>
+            <a:r>
+              <a:rPr sz="1500" b="1">
+                <a:solidFill>
+                  <a:srgbClr val="0F2A4C"/>
+                </a:solidFill>
+                <a:latin typeface="Calibri"/>
+              </a:rPr>
+              <a:t>No External Dependencies</a:t>
+            </a:r>
+          </a:p>
+        </p:txBody>
+      </p:sp>
+      <p:sp>
+        <p:nvSpPr>
+          <p:cNvPr id="35" name="TextBox 34"/>
+          <p:cNvSpPr txBox="1"/>
+          <p:nvPr/>
+        </p:nvSpPr>
+        <p:spPr>
+          <a:xfrm>
+            <a:off x="868680" y="6099048"/>
+            <a:ext cx="4846320" cy="365760"/>
+          </a:xfrm>
+          <a:prstGeom prst="rect">
+            <a:avLst/>
+          </a:prstGeom>
+          <a:noFill/>
+        </p:spPr>
+        <p:txBody>
+          <a:bodyPr wrap="square" anchor="t" lIns="0" rIns="0" tIns="0" bIns="0">
+            <a:spAutoFit/>
+          </a:bodyPr>
+          <a:lstStyle/>
+          <a:p>
+            <a:pPr algn="l">
+              <a:lnSpc>
+                <a:spcPct val="110000"/>
+              </a:lnSpc>
+            </a:pPr>
+            <a:r>
+              <a:rPr sz="1500" b="0">
+                <a:solidFill>
+                  <a:srgbClr val="243244"/>
+                </a:solidFill>
+                <a:latin typeface="Calibri"/>
+              </a:rPr>
+              <a:t>No reliance on third-party accounts or cloud services.</a:t>
+            </a:r>
+          </a:p>
+        </p:txBody>
+      </p:sp>
+      <p:sp>
+        <p:nvSpPr>
+          <p:cNvPr id="36" name="Rounded Rectangle 35"/>
+          <p:cNvSpPr/>
+          <p:nvPr/>
+        </p:nvSpPr>
+        <p:spPr>
+          <a:xfrm>
+            <a:off x="6309360" y="5623560"/>
+            <a:ext cx="5303520" cy="914400"/>
+          </a:xfrm>
+          <a:prstGeom prst="roundRect">
+            <a:avLst/>
+          </a:prstGeom>
+          <a:solidFill>
+            <a:srgbClr val="FFFFFF"/>
+          </a:solidFill>
+          <a:ln>
+            <a:noFill/>
+          </a:ln>
+          <a:effectLst/>
+        </p:spPr>
+        <p:style>
+          <a:lnRef idx="1">
+            <a:schemeClr val="accent1"/>
+          </a:lnRef>
+          <a:fillRef idx="3">
+            <a:schemeClr val="accent1"/>
+          </a:fillRef>
+          <a:effectRef idx="2">
+            <a:schemeClr val="accent1"/>
+          </a:effectRef>
+          <a:fontRef idx="minor">
+            <a:schemeClr val="lt1"/>
+          </a:fontRef>
+        </p:style>
+        <p:txBody>
+          <a:bodyPr rtlCol="0" anchor="ctr"/>
+          <a:lstStyle/>
+          <a:p>
+            <a:pPr algn="ctr"/>
+          </a:p>
+        </p:txBody>
+      </p:sp>
+      <p:sp>
+        <p:nvSpPr>
+          <p:cNvPr id="37" name="Rectangle 36"/>
+          <p:cNvSpPr/>
+          <p:nvPr/>
+        </p:nvSpPr>
+        <p:spPr>
+          <a:xfrm>
+            <a:off x="6309360" y="5623560"/>
+            <a:ext cx="82296" cy="914400"/>
+          </a:xfrm>
+          <a:prstGeom prst="rect">
+            <a:avLst/>
+          </a:prstGeom>
+          <a:solidFill>
+            <a:srgbClr val="F2B418"/>
+          </a:solidFill>
+          <a:ln>
+            <a:noFill/>
+          </a:ln>
+          <a:effectLst/>
+        </p:spPr>
+        <p:style>
+          <a:lnRef idx="1">
+            <a:schemeClr val="accent1"/>
+          </a:lnRef>
+          <a:fillRef idx="3">
+            <a:schemeClr val="accent1"/>
+          </a:fillRef>
+          <a:effectRef idx="2">
+            <a:schemeClr val="accent1"/>
+          </a:effectRef>
+          <a:fontRef idx="minor">
+            <a:schemeClr val="lt1"/>
+          </a:fontRef>
+        </p:style>
+        <p:txBody>
+          <a:bodyPr rtlCol="0" anchor="ctr"/>
+          <a:lstStyle/>
+          <a:p>
+            <a:pPr algn="ctr"/>
+          </a:p>
+        </p:txBody>
+      </p:sp>
+      <p:sp>
+        <p:nvSpPr>
+          <p:cNvPr id="38" name="TextBox 37"/>
+          <p:cNvSpPr txBox="1"/>
+          <p:nvPr/>
+        </p:nvSpPr>
+        <p:spPr>
+          <a:xfrm>
+            <a:off x="6583680" y="5733288"/>
+            <a:ext cx="4846320" cy="411480"/>
+          </a:xfrm>
+          <a:prstGeom prst="rect">
+            <a:avLst/>
+          </a:prstGeom>
+          <a:noFill/>
+        </p:spPr>
+        <p:txBody>
+          <a:bodyPr wrap="square" anchor="ctr" lIns="0" rIns="0" tIns="0" bIns="0">
+            <a:spAutoFit/>
+          </a:bodyPr>
+          <a:lstStyle/>
+          <a:p>
+            <a:pPr algn="l"/>
+            <a:r>
+              <a:rPr sz="1500" b="1">
+                <a:solidFill>
+                  <a:srgbClr val="0F2A4C"/>
+                </a:solidFill>
+                <a:latin typeface="Calibri"/>
+              </a:rPr>
+              <a:t>Stop and Start on Demand</a:t>
+            </a:r>
+          </a:p>
+        </p:txBody>
+      </p:sp>
+      <p:sp>
+        <p:nvSpPr>
+          <p:cNvPr id="39" name="TextBox 38"/>
+          <p:cNvSpPr txBox="1"/>
+          <p:nvPr/>
+        </p:nvSpPr>
+        <p:spPr>
+          <a:xfrm>
+            <a:off x="6583680" y="6099048"/>
+            <a:ext cx="4846320" cy="365760"/>
+          </a:xfrm>
+          <a:prstGeom prst="rect">
+            <a:avLst/>
+          </a:prstGeom>
+          <a:noFill/>
+        </p:spPr>
+        <p:txBody>
+          <a:bodyPr wrap="square" anchor="t" lIns="0" rIns="0" tIns="0" bIns="0">
+            <a:spAutoFit/>
+          </a:bodyPr>
+          <a:lstStyle/>
+          <a:p>
+            <a:pPr algn="l">
+              <a:lnSpc>
+                <a:spcPct val="110000"/>
+              </a:lnSpc>
+            </a:pPr>
+            <a:r>
+              <a:rPr sz="1500" b="0">
+                <a:solidFill>
+                  <a:srgbClr val="243244"/>
+                </a:solidFill>
+                <a:latin typeface="Calibri"/>
+              </a:rPr>
+              <a:t>One command shuts down; one command starts it back up.</a:t>
+            </a:r>
+          </a:p>
+        </p:txBody>
+      </p:sp>
+    </p:spTree>
+  </p:cSld>
+  <p:clrMapOvr>
+    <a:masterClrMapping/>
+  </p:clrMapOvr>
+</p:sld>
+</file>
+
 <file path=ppt/slides/slide2.xml><?xml version="1.0" encoding="utf-8"?>
 <p:sld xmlns:a="http://schemas.openxmlformats.org/drawingml/2006/main" xmlns:p="http://schemas.openxmlformats.org/presentationml/2006/main" xmlns:r="http://schemas.openxmlformats.org/officeDocument/2006/relationships">
   <p:cSld>
@@ -4820,7 +6373,7 @@
                 </a:solidFill>
                 <a:latin typeface="Calibri"/>
               </a:rPr>
-              <a:t>Role-based access, row-level security and full audit trails.</a:t>
+              <a:t>Role-based access, per-user data scoping and full audit trails.</a:t>
             </a:r>
           </a:p>
         </p:txBody>
@@ -6047,7 +7600,7 @@
                 </a:solidFill>
                 <a:latin typeface="Calibri"/>
               </a:rPr>
-              <a:t>Publish announcements with attachments and notify residents.</a:t>
+              <a:t>Publish announcements with attachments; in-app notification plus queued email.</a:t>
             </a:r>
           </a:p>
         </p:txBody>
@@ -6547,7 +8100,7 @@
                 </a:solidFill>
                 <a:latin typeface="Calibri"/>
               </a:rPr>
-              <a:t>Self-service for every resident</a:t>
+              <a:t>Accounts issued by the Barangay Office</a:t>
             </a:r>
           </a:p>
         </p:txBody>
@@ -6788,7 +8341,7 @@
                 </a:solidFill>
                 <a:latin typeface="Calibri"/>
               </a:rPr>
-              <a:t>Self-service personal information management.</a:t>
+              <a:t>Manage your own profile anytime after signing in.</a:t>
             </a:r>
           </a:p>
         </p:txBody>
@@ -7598,7 +9151,7 @@
                 </a:solidFill>
                 <a:latin typeface="Calibri"/>
               </a:rPr>
-              <a:t>Real-time alerts for every activity.</a:t>
+              <a:t>In-app alerts for every activity, plus optional queued email.</a:t>
             </a:r>
           </a:p>
         </p:txBody>
@@ -8138,7 +9691,7 @@
                 </a:solidFill>
                 <a:latin typeface="Calibri"/>
               </a:rPr>
-              <a:t>Row-Level Security</a:t>
+              <a:t>Auto-Scoped Access</a:t>
             </a:r>
           </a:p>
         </p:txBody>
@@ -8177,7 +9730,7 @@
                 </a:solidFill>
                 <a:latin typeface="Calibri"/>
               </a:rPr>
-              <a:t>Database RLS policies protect every table and record.</a:t>
+              <a:t>Resident reads and writes are scoped to their own records.</a:t>
             </a:r>
           </a:p>
         </p:txBody>
@@ -8462,7 +10015,7 @@
                 </a:solidFill>
                 <a:latin typeface="Calibri"/>
               </a:rPr>
-              <a:t>Secure Storage</a:t>
+              <a:t>Hardened Auth and Storage</a:t>
             </a:r>
           </a:p>
         </p:txBody>
@@ -8501,7 +10054,7 @@
                 </a:solidFill>
                 <a:latin typeface="Calibri"/>
               </a:rPr>
-              <a:t>Protected buckets for documents and photos with file validation.</a:t>
+              <a:t>bcrypt, HttpOnly sessions, 5-try lockout, default passwords refused; per-resident validated uploads.</a:t>
             </a:r>
           </a:p>
         </p:txBody>
@@ -9357,7 +10910,7 @@
                 </a:solidFill>
                 <a:latin typeface="Calibri"/>
               </a:rPr>
-              <a:t>Supabase Auth · Row-Level Security · RBAC</a:t>
+              <a:t>Local auth · bcrypt · HttpOnly sessions · RBAC</a:t>
             </a:r>
           </a:p>
         </p:txBody>
@@ -9519,7 +11072,7 @@
                 </a:solidFill>
                 <a:latin typeface="Calibri"/>
               </a:rPr>
-              <a:t>Supabase PostgreSQL with full RLS</a:t>
+              <a:t>PostgreSQL, self-hosted on-premise</a:t>
             </a:r>
           </a:p>
         </p:txBody>
@@ -10271,6 +11824,1233 @@
                 <a:latin typeface="Calibri"/>
               </a:rPr>
               <a:t>BarangayConnect · Digital Governance, Made Simple</a:t>
+            </a:r>
+          </a:p>
+        </p:txBody>
+      </p:sp>
+    </p:spTree>
+  </p:cSld>
+  <p:clrMapOvr>
+    <a:masterClrMapping/>
+  </p:clrMapOvr>
+</p:sld>
+</file>
+
+<file path=ppt/slides/slide9.xml><?xml version="1.0" encoding="utf-8"?>
+<p:sld xmlns:a="http://schemas.openxmlformats.org/drawingml/2006/main" xmlns:p="http://schemas.openxmlformats.org/presentationml/2006/main" xmlns:r="http://schemas.openxmlformats.org/officeDocument/2006/relationships">
+  <p:cSld>
+    <p:spTree>
+      <p:nvGrpSpPr>
+        <p:cNvPr id="1" name=""/>
+        <p:cNvGrpSpPr/>
+        <p:nvPr/>
+      </p:nvGrpSpPr>
+      <p:grpSpPr/>
+      <p:sp>
+        <p:nvSpPr>
+          <p:cNvPr id="2" name="Rectangle 1"/>
+          <p:cNvSpPr/>
+          <p:nvPr/>
+        </p:nvSpPr>
+        <p:spPr>
+          <a:xfrm>
+            <a:off x="0" y="0"/>
+            <a:ext cx="12191695" cy="1234440"/>
+          </a:xfrm>
+          <a:prstGeom prst="rect">
+            <a:avLst/>
+          </a:prstGeom>
+          <a:solidFill>
+            <a:srgbClr val="0F2A4C"/>
+          </a:solidFill>
+          <a:ln>
+            <a:noFill/>
+          </a:ln>
+          <a:effectLst/>
+        </p:spPr>
+        <p:style>
+          <a:lnRef idx="1">
+            <a:schemeClr val="accent1"/>
+          </a:lnRef>
+          <a:fillRef idx="3">
+            <a:schemeClr val="accent1"/>
+          </a:fillRef>
+          <a:effectRef idx="2">
+            <a:schemeClr val="accent1"/>
+          </a:effectRef>
+          <a:fontRef idx="minor">
+            <a:schemeClr val="lt1"/>
+          </a:fontRef>
+        </p:style>
+        <p:txBody>
+          <a:bodyPr rtlCol="0" anchor="ctr"/>
+          <a:lstStyle/>
+          <a:p>
+            <a:pPr algn="ctr"/>
+          </a:p>
+        </p:txBody>
+      </p:sp>
+      <p:sp>
+        <p:nvSpPr>
+          <p:cNvPr id="3" name="Rectangle 2"/>
+          <p:cNvSpPr/>
+          <p:nvPr/>
+        </p:nvSpPr>
+        <p:spPr>
+          <a:xfrm>
+            <a:off x="0" y="1234440"/>
+            <a:ext cx="12191695" cy="50800"/>
+          </a:xfrm>
+          <a:prstGeom prst="rect">
+            <a:avLst/>
+          </a:prstGeom>
+          <a:solidFill>
+            <a:srgbClr val="F2B418"/>
+          </a:solidFill>
+          <a:ln>
+            <a:noFill/>
+          </a:ln>
+          <a:effectLst/>
+        </p:spPr>
+        <p:style>
+          <a:lnRef idx="1">
+            <a:schemeClr val="accent1"/>
+          </a:lnRef>
+          <a:fillRef idx="3">
+            <a:schemeClr val="accent1"/>
+          </a:fillRef>
+          <a:effectRef idx="2">
+            <a:schemeClr val="accent1"/>
+          </a:effectRef>
+          <a:fontRef idx="minor">
+            <a:schemeClr val="lt1"/>
+          </a:fontRef>
+        </p:style>
+        <p:txBody>
+          <a:bodyPr rtlCol="0" anchor="ctr"/>
+          <a:lstStyle/>
+          <a:p>
+            <a:pPr algn="ctr"/>
+          </a:p>
+        </p:txBody>
+      </p:sp>
+      <p:sp>
+        <p:nvSpPr>
+          <p:cNvPr id="4" name="TextBox 3"/>
+          <p:cNvSpPr txBox="1"/>
+          <p:nvPr/>
+        </p:nvSpPr>
+        <p:spPr>
+          <a:xfrm>
+            <a:off x="640080" y="0"/>
+            <a:ext cx="8686800" cy="1234440"/>
+          </a:xfrm>
+          <a:prstGeom prst="rect">
+            <a:avLst/>
+          </a:prstGeom>
+          <a:noFill/>
+        </p:spPr>
+        <p:txBody>
+          <a:bodyPr wrap="square" anchor="ctr" lIns="0" rIns="0" tIns="0" bIns="0">
+            <a:spAutoFit/>
+          </a:bodyPr>
+          <a:lstStyle/>
+          <a:p>
+            <a:pPr algn="l"/>
+            <a:r>
+              <a:rPr sz="3000" b="1">
+                <a:solidFill>
+                  <a:srgbClr val="FFFFFF"/>
+                </a:solidFill>
+                <a:latin typeface="Calibri"/>
+              </a:rPr>
+              <a:t>Accounts &amp; Access</a:t>
+            </a:r>
+          </a:p>
+        </p:txBody>
+      </p:sp>
+      <p:sp>
+        <p:nvSpPr>
+          <p:cNvPr id="5" name="TextBox 4"/>
+          <p:cNvSpPr txBox="1"/>
+          <p:nvPr/>
+        </p:nvSpPr>
+        <p:spPr>
+          <a:xfrm>
+            <a:off x="8778240" y="0"/>
+            <a:ext cx="2834640" cy="1234440"/>
+          </a:xfrm>
+          <a:prstGeom prst="rect">
+            <a:avLst/>
+          </a:prstGeom>
+          <a:noFill/>
+        </p:spPr>
+        <p:txBody>
+          <a:bodyPr wrap="square" anchor="ctr" lIns="0" rIns="0" tIns="0" bIns="0">
+            <a:spAutoFit/>
+          </a:bodyPr>
+          <a:lstStyle/>
+          <a:p>
+            <a:pPr algn="r"/>
+            <a:r>
+              <a:rPr sz="1200" b="0">
+                <a:solidFill>
+                  <a:srgbClr val="C9D6E8"/>
+                </a:solidFill>
+                <a:latin typeface="Calibri"/>
+              </a:rPr>
+              <a:t>Barangay-issued logins, no public signup</a:t>
+            </a:r>
+          </a:p>
+        </p:txBody>
+      </p:sp>
+      <p:sp>
+        <p:nvSpPr>
+          <p:cNvPr id="6" name="Rectangle 5"/>
+          <p:cNvSpPr/>
+          <p:nvPr/>
+        </p:nvSpPr>
+        <p:spPr>
+          <a:xfrm>
+            <a:off x="11231575" y="0"/>
+            <a:ext cx="960120" cy="384048"/>
+          </a:xfrm>
+          <a:prstGeom prst="rect">
+            <a:avLst/>
+          </a:prstGeom>
+          <a:solidFill>
+            <a:srgbClr val="F2B418"/>
+          </a:solidFill>
+          <a:ln>
+            <a:noFill/>
+          </a:ln>
+          <a:effectLst/>
+        </p:spPr>
+        <p:style>
+          <a:lnRef idx="1">
+            <a:schemeClr val="accent1"/>
+          </a:lnRef>
+          <a:fillRef idx="3">
+            <a:schemeClr val="accent1"/>
+          </a:fillRef>
+          <a:effectRef idx="2">
+            <a:schemeClr val="accent1"/>
+          </a:effectRef>
+          <a:fontRef idx="minor">
+            <a:schemeClr val="lt1"/>
+          </a:fontRef>
+        </p:style>
+        <p:txBody>
+          <a:bodyPr rtlCol="0" anchor="ctr"/>
+          <a:lstStyle/>
+          <a:p>
+            <a:pPr algn="ctr"/>
+          </a:p>
+        </p:txBody>
+      </p:sp>
+      <p:sp>
+        <p:nvSpPr>
+          <p:cNvPr id="7" name="TextBox 6"/>
+          <p:cNvSpPr txBox="1"/>
+          <p:nvPr/>
+        </p:nvSpPr>
+        <p:spPr>
+          <a:xfrm>
+            <a:off x="11231575" y="0"/>
+            <a:ext cx="960120" cy="384048"/>
+          </a:xfrm>
+          <a:prstGeom prst="rect">
+            <a:avLst/>
+          </a:prstGeom>
+          <a:noFill/>
+        </p:spPr>
+        <p:txBody>
+          <a:bodyPr wrap="square" anchor="ctr" lIns="0" rIns="0" tIns="0" bIns="0">
+            <a:spAutoFit/>
+          </a:bodyPr>
+          <a:lstStyle/>
+          <a:p>
+            <a:pPr algn="ctr"/>
+            <a:r>
+              <a:rPr sz="1400" b="1">
+                <a:solidFill>
+                  <a:srgbClr val="0F2A4C"/>
+                </a:solidFill>
+                <a:latin typeface="Calibri"/>
+              </a:rPr>
+              <a:t>BC</a:t>
+            </a:r>
+          </a:p>
+        </p:txBody>
+      </p:sp>
+      <p:sp>
+        <p:nvSpPr>
+          <p:cNvPr id="8" name="Rounded Rectangle 7"/>
+          <p:cNvSpPr/>
+          <p:nvPr/>
+        </p:nvSpPr>
+        <p:spPr>
+          <a:xfrm>
+            <a:off x="731520" y="1645920"/>
+            <a:ext cx="3291840" cy="1920240"/>
+          </a:xfrm>
+          <a:prstGeom prst="roundRect">
+            <a:avLst/>
+          </a:prstGeom>
+          <a:solidFill>
+            <a:srgbClr val="FFFFFF"/>
+          </a:solidFill>
+          <a:ln>
+            <a:noFill/>
+          </a:ln>
+          <a:effectLst/>
+        </p:spPr>
+        <p:style>
+          <a:lnRef idx="1">
+            <a:schemeClr val="accent1"/>
+          </a:lnRef>
+          <a:fillRef idx="3">
+            <a:schemeClr val="accent1"/>
+          </a:fillRef>
+          <a:effectRef idx="2">
+            <a:schemeClr val="accent1"/>
+          </a:effectRef>
+          <a:fontRef idx="minor">
+            <a:schemeClr val="lt1"/>
+          </a:fontRef>
+        </p:style>
+        <p:txBody>
+          <a:bodyPr rtlCol="0" anchor="ctr"/>
+          <a:lstStyle/>
+          <a:p>
+            <a:pPr algn="ctr"/>
+          </a:p>
+        </p:txBody>
+      </p:sp>
+      <p:sp>
+        <p:nvSpPr>
+          <p:cNvPr id="9" name="Rectangle 8"/>
+          <p:cNvSpPr/>
+          <p:nvPr/>
+        </p:nvSpPr>
+        <p:spPr>
+          <a:xfrm>
+            <a:off x="731520" y="1645920"/>
+            <a:ext cx="82296" cy="1920240"/>
+          </a:xfrm>
+          <a:prstGeom prst="rect">
+            <a:avLst/>
+          </a:prstGeom>
+          <a:solidFill>
+            <a:srgbClr val="F2B418"/>
+          </a:solidFill>
+          <a:ln>
+            <a:noFill/>
+          </a:ln>
+          <a:effectLst/>
+        </p:spPr>
+        <p:style>
+          <a:lnRef idx="1">
+            <a:schemeClr val="accent1"/>
+          </a:lnRef>
+          <a:fillRef idx="3">
+            <a:schemeClr val="accent1"/>
+          </a:fillRef>
+          <a:effectRef idx="2">
+            <a:schemeClr val="accent1"/>
+          </a:effectRef>
+          <a:fontRef idx="minor">
+            <a:schemeClr val="lt1"/>
+          </a:fontRef>
+        </p:style>
+        <p:txBody>
+          <a:bodyPr rtlCol="0" anchor="ctr"/>
+          <a:lstStyle/>
+          <a:p>
+            <a:pPr algn="ctr"/>
+          </a:p>
+        </p:txBody>
+      </p:sp>
+      <p:sp>
+        <p:nvSpPr>
+          <p:cNvPr id="10" name="TextBox 9"/>
+          <p:cNvSpPr txBox="1"/>
+          <p:nvPr/>
+        </p:nvSpPr>
+        <p:spPr>
+          <a:xfrm>
+            <a:off x="1005840" y="1755648"/>
+            <a:ext cx="2834640" cy="411480"/>
+          </a:xfrm>
+          <a:prstGeom prst="rect">
+            <a:avLst/>
+          </a:prstGeom>
+          <a:noFill/>
+        </p:spPr>
+        <p:txBody>
+          <a:bodyPr wrap="square" anchor="ctr" lIns="0" rIns="0" tIns="0" bIns="0">
+            <a:spAutoFit/>
+          </a:bodyPr>
+          <a:lstStyle/>
+          <a:p>
+            <a:pPr algn="l"/>
+            <a:r>
+              <a:rPr sz="1500" b="1">
+                <a:solidFill>
+                  <a:srgbClr val="0F2A4C"/>
+                </a:solidFill>
+                <a:latin typeface="Calibri"/>
+              </a:rPr>
+              <a:t>Barangay-Issued Accounts</a:t>
+            </a:r>
+          </a:p>
+        </p:txBody>
+      </p:sp>
+      <p:sp>
+        <p:nvSpPr>
+          <p:cNvPr id="11" name="TextBox 10"/>
+          <p:cNvSpPr txBox="1"/>
+          <p:nvPr/>
+        </p:nvSpPr>
+        <p:spPr>
+          <a:xfrm>
+            <a:off x="1005840" y="2121408"/>
+            <a:ext cx="2834640" cy="1371600"/>
+          </a:xfrm>
+          <a:prstGeom prst="rect">
+            <a:avLst/>
+          </a:prstGeom>
+          <a:noFill/>
+        </p:spPr>
+        <p:txBody>
+          <a:bodyPr wrap="square" anchor="t" lIns="0" rIns="0" tIns="0" bIns="0">
+            <a:spAutoFit/>
+          </a:bodyPr>
+          <a:lstStyle/>
+          <a:p>
+            <a:pPr algn="l">
+              <a:lnSpc>
+                <a:spcPct val="110000"/>
+              </a:lnSpc>
+            </a:pPr>
+            <a:r>
+              <a:rPr sz="1500" b="0">
+                <a:solidFill>
+                  <a:srgbClr val="243244"/>
+                </a:solidFill>
+                <a:latin typeface="Calibri"/>
+              </a:rPr>
+              <a:t>Office creates resident login accounts inside the Residents module.</a:t>
+            </a:r>
+          </a:p>
+        </p:txBody>
+      </p:sp>
+      <p:sp>
+        <p:nvSpPr>
+          <p:cNvPr id="12" name="Rounded Rectangle 11"/>
+          <p:cNvSpPr/>
+          <p:nvPr/>
+        </p:nvSpPr>
+        <p:spPr>
+          <a:xfrm>
+            <a:off x="4343400" y="1645920"/>
+            <a:ext cx="3291840" cy="1920240"/>
+          </a:xfrm>
+          <a:prstGeom prst="roundRect">
+            <a:avLst/>
+          </a:prstGeom>
+          <a:solidFill>
+            <a:srgbClr val="FFFFFF"/>
+          </a:solidFill>
+          <a:ln>
+            <a:noFill/>
+          </a:ln>
+          <a:effectLst/>
+        </p:spPr>
+        <p:style>
+          <a:lnRef idx="1">
+            <a:schemeClr val="accent1"/>
+          </a:lnRef>
+          <a:fillRef idx="3">
+            <a:schemeClr val="accent1"/>
+          </a:fillRef>
+          <a:effectRef idx="2">
+            <a:schemeClr val="accent1"/>
+          </a:effectRef>
+          <a:fontRef idx="minor">
+            <a:schemeClr val="lt1"/>
+          </a:fontRef>
+        </p:style>
+        <p:txBody>
+          <a:bodyPr rtlCol="0" anchor="ctr"/>
+          <a:lstStyle/>
+          <a:p>
+            <a:pPr algn="ctr"/>
+          </a:p>
+        </p:txBody>
+      </p:sp>
+      <p:sp>
+        <p:nvSpPr>
+          <p:cNvPr id="13" name="Rectangle 12"/>
+          <p:cNvSpPr/>
+          <p:nvPr/>
+        </p:nvSpPr>
+        <p:spPr>
+          <a:xfrm>
+            <a:off x="4343400" y="1645920"/>
+            <a:ext cx="82296" cy="1920240"/>
+          </a:xfrm>
+          <a:prstGeom prst="rect">
+            <a:avLst/>
+          </a:prstGeom>
+          <a:solidFill>
+            <a:srgbClr val="F2B418"/>
+          </a:solidFill>
+          <a:ln>
+            <a:noFill/>
+          </a:ln>
+          <a:effectLst/>
+        </p:spPr>
+        <p:style>
+          <a:lnRef idx="1">
+            <a:schemeClr val="accent1"/>
+          </a:lnRef>
+          <a:fillRef idx="3">
+            <a:schemeClr val="accent1"/>
+          </a:fillRef>
+          <a:effectRef idx="2">
+            <a:schemeClr val="accent1"/>
+          </a:effectRef>
+          <a:fontRef idx="minor">
+            <a:schemeClr val="lt1"/>
+          </a:fontRef>
+        </p:style>
+        <p:txBody>
+          <a:bodyPr rtlCol="0" anchor="ctr"/>
+          <a:lstStyle/>
+          <a:p>
+            <a:pPr algn="ctr"/>
+          </a:p>
+        </p:txBody>
+      </p:sp>
+      <p:sp>
+        <p:nvSpPr>
+          <p:cNvPr id="14" name="TextBox 13"/>
+          <p:cNvSpPr txBox="1"/>
+          <p:nvPr/>
+        </p:nvSpPr>
+        <p:spPr>
+          <a:xfrm>
+            <a:off x="4617720" y="1755648"/>
+            <a:ext cx="2834640" cy="411480"/>
+          </a:xfrm>
+          <a:prstGeom prst="rect">
+            <a:avLst/>
+          </a:prstGeom>
+          <a:noFill/>
+        </p:spPr>
+        <p:txBody>
+          <a:bodyPr wrap="square" anchor="ctr" lIns="0" rIns="0" tIns="0" bIns="0">
+            <a:spAutoFit/>
+          </a:bodyPr>
+          <a:lstStyle/>
+          <a:p>
+            <a:pPr algn="l"/>
+            <a:r>
+              <a:rPr sz="1500" b="1">
+                <a:solidFill>
+                  <a:srgbClr val="0F2A4C"/>
+                </a:solidFill>
+                <a:latin typeface="Calibri"/>
+              </a:rPr>
+              <a:t>Add Resident / Create Login</a:t>
+            </a:r>
+          </a:p>
+        </p:txBody>
+      </p:sp>
+      <p:sp>
+        <p:nvSpPr>
+          <p:cNvPr id="15" name="TextBox 14"/>
+          <p:cNvSpPr txBox="1"/>
+          <p:nvPr/>
+        </p:nvSpPr>
+        <p:spPr>
+          <a:xfrm>
+            <a:off x="4617720" y="2121408"/>
+            <a:ext cx="2834640" cy="1371600"/>
+          </a:xfrm>
+          <a:prstGeom prst="rect">
+            <a:avLst/>
+          </a:prstGeom>
+          <a:noFill/>
+        </p:spPr>
+        <p:txBody>
+          <a:bodyPr wrap="square" anchor="t" lIns="0" rIns="0" tIns="0" bIns="0">
+            <a:spAutoFit/>
+          </a:bodyPr>
+          <a:lstStyle/>
+          <a:p>
+            <a:pPr algn="l">
+              <a:lnSpc>
+                <a:spcPct val="110000"/>
+              </a:lnSpc>
+            </a:pPr>
+            <a:r>
+              <a:rPr sz="1500" b="0">
+                <a:solidFill>
+                  <a:srgbClr val="243244"/>
+                </a:solidFill>
+                <a:latin typeface="Calibri"/>
+              </a:rPr>
+              <a:t>Two entry points: new households or existing residents.</a:t>
+            </a:r>
+          </a:p>
+        </p:txBody>
+      </p:sp>
+      <p:sp>
+        <p:nvSpPr>
+          <p:cNvPr id="16" name="Rounded Rectangle 15"/>
+          <p:cNvSpPr/>
+          <p:nvPr/>
+        </p:nvSpPr>
+        <p:spPr>
+          <a:xfrm>
+            <a:off x="7955279" y="1645920"/>
+            <a:ext cx="3291840" cy="1920240"/>
+          </a:xfrm>
+          <a:prstGeom prst="roundRect">
+            <a:avLst/>
+          </a:prstGeom>
+          <a:solidFill>
+            <a:srgbClr val="FFFFFF"/>
+          </a:solidFill>
+          <a:ln>
+            <a:noFill/>
+          </a:ln>
+          <a:effectLst/>
+        </p:spPr>
+        <p:style>
+          <a:lnRef idx="1">
+            <a:schemeClr val="accent1"/>
+          </a:lnRef>
+          <a:fillRef idx="3">
+            <a:schemeClr val="accent1"/>
+          </a:fillRef>
+          <a:effectRef idx="2">
+            <a:schemeClr val="accent1"/>
+          </a:effectRef>
+          <a:fontRef idx="minor">
+            <a:schemeClr val="lt1"/>
+          </a:fontRef>
+        </p:style>
+        <p:txBody>
+          <a:bodyPr rtlCol="0" anchor="ctr"/>
+          <a:lstStyle/>
+          <a:p>
+            <a:pPr algn="ctr"/>
+          </a:p>
+        </p:txBody>
+      </p:sp>
+      <p:sp>
+        <p:nvSpPr>
+          <p:cNvPr id="17" name="Rectangle 16"/>
+          <p:cNvSpPr/>
+          <p:nvPr/>
+        </p:nvSpPr>
+        <p:spPr>
+          <a:xfrm>
+            <a:off x="7955279" y="1645920"/>
+            <a:ext cx="82296" cy="1920240"/>
+          </a:xfrm>
+          <a:prstGeom prst="rect">
+            <a:avLst/>
+          </a:prstGeom>
+          <a:solidFill>
+            <a:srgbClr val="F2B418"/>
+          </a:solidFill>
+          <a:ln>
+            <a:noFill/>
+          </a:ln>
+          <a:effectLst/>
+        </p:spPr>
+        <p:style>
+          <a:lnRef idx="1">
+            <a:schemeClr val="accent1"/>
+          </a:lnRef>
+          <a:fillRef idx="3">
+            <a:schemeClr val="accent1"/>
+          </a:fillRef>
+          <a:effectRef idx="2">
+            <a:schemeClr val="accent1"/>
+          </a:effectRef>
+          <a:fontRef idx="minor">
+            <a:schemeClr val="lt1"/>
+          </a:fontRef>
+        </p:style>
+        <p:txBody>
+          <a:bodyPr rtlCol="0" anchor="ctr"/>
+          <a:lstStyle/>
+          <a:p>
+            <a:pPr algn="ctr"/>
+          </a:p>
+        </p:txBody>
+      </p:sp>
+      <p:sp>
+        <p:nvSpPr>
+          <p:cNvPr id="18" name="TextBox 17"/>
+          <p:cNvSpPr txBox="1"/>
+          <p:nvPr/>
+        </p:nvSpPr>
+        <p:spPr>
+          <a:xfrm>
+            <a:off x="8229599" y="1755648"/>
+            <a:ext cx="2834640" cy="411480"/>
+          </a:xfrm>
+          <a:prstGeom prst="rect">
+            <a:avLst/>
+          </a:prstGeom>
+          <a:noFill/>
+        </p:spPr>
+        <p:txBody>
+          <a:bodyPr wrap="square" anchor="ctr" lIns="0" rIns="0" tIns="0" bIns="0">
+            <a:spAutoFit/>
+          </a:bodyPr>
+          <a:lstStyle/>
+          <a:p>
+            <a:pPr algn="l"/>
+            <a:r>
+              <a:rPr sz="1500" b="1">
+                <a:solidFill>
+                  <a:srgbClr val="0F2A4C"/>
+                </a:solidFill>
+                <a:latin typeface="Calibri"/>
+              </a:rPr>
+              <a:t>Office-Controlled Passwords</a:t>
+            </a:r>
+          </a:p>
+        </p:txBody>
+      </p:sp>
+      <p:sp>
+        <p:nvSpPr>
+          <p:cNvPr id="19" name="TextBox 18"/>
+          <p:cNvSpPr txBox="1"/>
+          <p:nvPr/>
+        </p:nvSpPr>
+        <p:spPr>
+          <a:xfrm>
+            <a:off x="8229599" y="2121408"/>
+            <a:ext cx="2834640" cy="1371600"/>
+          </a:xfrm>
+          <a:prstGeom prst="rect">
+            <a:avLst/>
+          </a:prstGeom>
+          <a:noFill/>
+        </p:spPr>
+        <p:txBody>
+          <a:bodyPr wrap="square" anchor="t" lIns="0" rIns="0" tIns="0" bIns="0">
+            <a:spAutoFit/>
+          </a:bodyPr>
+          <a:lstStyle/>
+          <a:p>
+            <a:pPr algn="l">
+              <a:lnSpc>
+                <a:spcPct val="110000"/>
+              </a:lnSpc>
+            </a:pPr>
+            <a:r>
+              <a:rPr sz="1500" b="0">
+                <a:solidFill>
+                  <a:srgbClr val="243244"/>
+                </a:solidFill>
+                <a:latin typeface="Calibri"/>
+              </a:rPr>
+              <a:t>Admin sets the initial password for each resident account.</a:t>
+            </a:r>
+          </a:p>
+        </p:txBody>
+      </p:sp>
+      <p:sp>
+        <p:nvSpPr>
+          <p:cNvPr id="20" name="Rounded Rectangle 19"/>
+          <p:cNvSpPr/>
+          <p:nvPr/>
+        </p:nvSpPr>
+        <p:spPr>
+          <a:xfrm>
+            <a:off x="731520" y="4206240"/>
+            <a:ext cx="3291840" cy="1920240"/>
+          </a:xfrm>
+          <a:prstGeom prst="roundRect">
+            <a:avLst/>
+          </a:prstGeom>
+          <a:solidFill>
+            <a:srgbClr val="FFFFFF"/>
+          </a:solidFill>
+          <a:ln>
+            <a:noFill/>
+          </a:ln>
+          <a:effectLst/>
+        </p:spPr>
+        <p:style>
+          <a:lnRef idx="1">
+            <a:schemeClr val="accent1"/>
+          </a:lnRef>
+          <a:fillRef idx="3">
+            <a:schemeClr val="accent1"/>
+          </a:fillRef>
+          <a:effectRef idx="2">
+            <a:schemeClr val="accent1"/>
+          </a:effectRef>
+          <a:fontRef idx="minor">
+            <a:schemeClr val="lt1"/>
+          </a:fontRef>
+        </p:style>
+        <p:txBody>
+          <a:bodyPr rtlCol="0" anchor="ctr"/>
+          <a:lstStyle/>
+          <a:p>
+            <a:pPr algn="ctr"/>
+          </a:p>
+        </p:txBody>
+      </p:sp>
+      <p:sp>
+        <p:nvSpPr>
+          <p:cNvPr id="21" name="Rectangle 20"/>
+          <p:cNvSpPr/>
+          <p:nvPr/>
+        </p:nvSpPr>
+        <p:spPr>
+          <a:xfrm>
+            <a:off x="731520" y="4206240"/>
+            <a:ext cx="82296" cy="1920240"/>
+          </a:xfrm>
+          <a:prstGeom prst="rect">
+            <a:avLst/>
+          </a:prstGeom>
+          <a:solidFill>
+            <a:srgbClr val="F2B418"/>
+          </a:solidFill>
+          <a:ln>
+            <a:noFill/>
+          </a:ln>
+          <a:effectLst/>
+        </p:spPr>
+        <p:style>
+          <a:lnRef idx="1">
+            <a:schemeClr val="accent1"/>
+          </a:lnRef>
+          <a:fillRef idx="3">
+            <a:schemeClr val="accent1"/>
+          </a:fillRef>
+          <a:effectRef idx="2">
+            <a:schemeClr val="accent1"/>
+          </a:effectRef>
+          <a:fontRef idx="minor">
+            <a:schemeClr val="lt1"/>
+          </a:fontRef>
+        </p:style>
+        <p:txBody>
+          <a:bodyPr rtlCol="0" anchor="ctr"/>
+          <a:lstStyle/>
+          <a:p>
+            <a:pPr algn="ctr"/>
+          </a:p>
+        </p:txBody>
+      </p:sp>
+      <p:sp>
+        <p:nvSpPr>
+          <p:cNvPr id="22" name="TextBox 21"/>
+          <p:cNvSpPr txBox="1"/>
+          <p:nvPr/>
+        </p:nvSpPr>
+        <p:spPr>
+          <a:xfrm>
+            <a:off x="1005840" y="4315968"/>
+            <a:ext cx="2834640" cy="411480"/>
+          </a:xfrm>
+          <a:prstGeom prst="rect">
+            <a:avLst/>
+          </a:prstGeom>
+          <a:noFill/>
+        </p:spPr>
+        <p:txBody>
+          <a:bodyPr wrap="square" anchor="ctr" lIns="0" rIns="0" tIns="0" bIns="0">
+            <a:spAutoFit/>
+          </a:bodyPr>
+          <a:lstStyle/>
+          <a:p>
+            <a:pPr algn="l"/>
+            <a:r>
+              <a:rPr sz="1500" b="1">
+                <a:solidFill>
+                  <a:srgbClr val="0F2A4C"/>
+                </a:solidFill>
+                <a:latin typeface="Calibri"/>
+              </a:rPr>
+              <a:t>Active Immediately</a:t>
+            </a:r>
+          </a:p>
+        </p:txBody>
+      </p:sp>
+      <p:sp>
+        <p:nvSpPr>
+          <p:cNvPr id="23" name="TextBox 22"/>
+          <p:cNvSpPr txBox="1"/>
+          <p:nvPr/>
+        </p:nvSpPr>
+        <p:spPr>
+          <a:xfrm>
+            <a:off x="1005840" y="4681728"/>
+            <a:ext cx="2834640" cy="1371600"/>
+          </a:xfrm>
+          <a:prstGeom prst="rect">
+            <a:avLst/>
+          </a:prstGeom>
+          <a:noFill/>
+        </p:spPr>
+        <p:txBody>
+          <a:bodyPr wrap="square" anchor="t" lIns="0" rIns="0" tIns="0" bIns="0">
+            <a:spAutoFit/>
+          </a:bodyPr>
+          <a:lstStyle/>
+          <a:p>
+            <a:pPr algn="l">
+              <a:lnSpc>
+                <a:spcPct val="110000"/>
+              </a:lnSpc>
+            </a:pPr>
+            <a:r>
+              <a:rPr sz="1500" b="0">
+                <a:solidFill>
+                  <a:srgbClr val="243244"/>
+                </a:solidFill>
+                <a:latin typeface="Calibri"/>
+              </a:rPr>
+              <a:t>No verification email, no approval queue - ready at once.</a:t>
+            </a:r>
+          </a:p>
+        </p:txBody>
+      </p:sp>
+      <p:sp>
+        <p:nvSpPr>
+          <p:cNvPr id="24" name="Rounded Rectangle 23"/>
+          <p:cNvSpPr/>
+          <p:nvPr/>
+        </p:nvSpPr>
+        <p:spPr>
+          <a:xfrm>
+            <a:off x="4343400" y="4206240"/>
+            <a:ext cx="3291840" cy="1920240"/>
+          </a:xfrm>
+          <a:prstGeom prst="roundRect">
+            <a:avLst/>
+          </a:prstGeom>
+          <a:solidFill>
+            <a:srgbClr val="FFFFFF"/>
+          </a:solidFill>
+          <a:ln>
+            <a:noFill/>
+          </a:ln>
+          <a:effectLst/>
+        </p:spPr>
+        <p:style>
+          <a:lnRef idx="1">
+            <a:schemeClr val="accent1"/>
+          </a:lnRef>
+          <a:fillRef idx="3">
+            <a:schemeClr val="accent1"/>
+          </a:fillRef>
+          <a:effectRef idx="2">
+            <a:schemeClr val="accent1"/>
+          </a:effectRef>
+          <a:fontRef idx="minor">
+            <a:schemeClr val="lt1"/>
+          </a:fontRef>
+        </p:style>
+        <p:txBody>
+          <a:bodyPr rtlCol="0" anchor="ctr"/>
+          <a:lstStyle/>
+          <a:p>
+            <a:pPr algn="ctr"/>
+          </a:p>
+        </p:txBody>
+      </p:sp>
+      <p:sp>
+        <p:nvSpPr>
+          <p:cNvPr id="25" name="Rectangle 24"/>
+          <p:cNvSpPr/>
+          <p:nvPr/>
+        </p:nvSpPr>
+        <p:spPr>
+          <a:xfrm>
+            <a:off x="4343400" y="4206240"/>
+            <a:ext cx="82296" cy="1920240"/>
+          </a:xfrm>
+          <a:prstGeom prst="rect">
+            <a:avLst/>
+          </a:prstGeom>
+          <a:solidFill>
+            <a:srgbClr val="F2B418"/>
+          </a:solidFill>
+          <a:ln>
+            <a:noFill/>
+          </a:ln>
+          <a:effectLst/>
+        </p:spPr>
+        <p:style>
+          <a:lnRef idx="1">
+            <a:schemeClr val="accent1"/>
+          </a:lnRef>
+          <a:fillRef idx="3">
+            <a:schemeClr val="accent1"/>
+          </a:fillRef>
+          <a:effectRef idx="2">
+            <a:schemeClr val="accent1"/>
+          </a:effectRef>
+          <a:fontRef idx="minor">
+            <a:schemeClr val="lt1"/>
+          </a:fontRef>
+        </p:style>
+        <p:txBody>
+          <a:bodyPr rtlCol="0" anchor="ctr"/>
+          <a:lstStyle/>
+          <a:p>
+            <a:pPr algn="ctr"/>
+          </a:p>
+        </p:txBody>
+      </p:sp>
+      <p:sp>
+        <p:nvSpPr>
+          <p:cNvPr id="26" name="TextBox 25"/>
+          <p:cNvSpPr txBox="1"/>
+          <p:nvPr/>
+        </p:nvSpPr>
+        <p:spPr>
+          <a:xfrm>
+            <a:off x="4617720" y="4315968"/>
+            <a:ext cx="2834640" cy="411480"/>
+          </a:xfrm>
+          <a:prstGeom prst="rect">
+            <a:avLst/>
+          </a:prstGeom>
+          <a:noFill/>
+        </p:spPr>
+        <p:txBody>
+          <a:bodyPr wrap="square" anchor="ctr" lIns="0" rIns="0" tIns="0" bIns="0">
+            <a:spAutoFit/>
+          </a:bodyPr>
+          <a:lstStyle/>
+          <a:p>
+            <a:pPr algn="l"/>
+            <a:r>
+              <a:rPr sz="1500" b="1">
+                <a:solidFill>
+                  <a:srgbClr val="0F2A4C"/>
+                </a:solidFill>
+                <a:latin typeface="Calibri"/>
+              </a:rPr>
+              <a:t>No Public Signup</a:t>
+            </a:r>
+          </a:p>
+        </p:txBody>
+      </p:sp>
+      <p:sp>
+        <p:nvSpPr>
+          <p:cNvPr id="27" name="TextBox 26"/>
+          <p:cNvSpPr txBox="1"/>
+          <p:nvPr/>
+        </p:nvSpPr>
+        <p:spPr>
+          <a:xfrm>
+            <a:off x="4617720" y="4681728"/>
+            <a:ext cx="2834640" cy="1371600"/>
+          </a:xfrm>
+          <a:prstGeom prst="rect">
+            <a:avLst/>
+          </a:prstGeom>
+          <a:noFill/>
+        </p:spPr>
+        <p:txBody>
+          <a:bodyPr wrap="square" anchor="t" lIns="0" rIns="0" tIns="0" bIns="0">
+            <a:spAutoFit/>
+          </a:bodyPr>
+          <a:lstStyle/>
+          <a:p>
+            <a:pPr algn="l">
+              <a:lnSpc>
+                <a:spcPct val="110000"/>
+              </a:lnSpc>
+            </a:pPr>
+            <a:r>
+              <a:rPr sz="1500" b="0">
+                <a:solidFill>
+                  <a:srgbClr val="243244"/>
+                </a:solidFill>
+                <a:latin typeface="Calibri"/>
+              </a:rPr>
+              <a:t>Self-signup and email OTP were removed from the portal.</a:t>
+            </a:r>
+          </a:p>
+        </p:txBody>
+      </p:sp>
+      <p:sp>
+        <p:nvSpPr>
+          <p:cNvPr id="28" name="Rounded Rectangle 27"/>
+          <p:cNvSpPr/>
+          <p:nvPr/>
+        </p:nvSpPr>
+        <p:spPr>
+          <a:xfrm>
+            <a:off x="7955279" y="4206240"/>
+            <a:ext cx="3291840" cy="1920240"/>
+          </a:xfrm>
+          <a:prstGeom prst="roundRect">
+            <a:avLst/>
+          </a:prstGeom>
+          <a:solidFill>
+            <a:srgbClr val="FFFFFF"/>
+          </a:solidFill>
+          <a:ln>
+            <a:noFill/>
+          </a:ln>
+          <a:effectLst/>
+        </p:spPr>
+        <p:style>
+          <a:lnRef idx="1">
+            <a:schemeClr val="accent1"/>
+          </a:lnRef>
+          <a:fillRef idx="3">
+            <a:schemeClr val="accent1"/>
+          </a:fillRef>
+          <a:effectRef idx="2">
+            <a:schemeClr val="accent1"/>
+          </a:effectRef>
+          <a:fontRef idx="minor">
+            <a:schemeClr val="lt1"/>
+          </a:fontRef>
+        </p:style>
+        <p:txBody>
+          <a:bodyPr rtlCol="0" anchor="ctr"/>
+          <a:lstStyle/>
+          <a:p>
+            <a:pPr algn="ctr"/>
+          </a:p>
+        </p:txBody>
+      </p:sp>
+      <p:sp>
+        <p:nvSpPr>
+          <p:cNvPr id="29" name="Rectangle 28"/>
+          <p:cNvSpPr/>
+          <p:nvPr/>
+        </p:nvSpPr>
+        <p:spPr>
+          <a:xfrm>
+            <a:off x="7955279" y="4206240"/>
+            <a:ext cx="82296" cy="1920240"/>
+          </a:xfrm>
+          <a:prstGeom prst="rect">
+            <a:avLst/>
+          </a:prstGeom>
+          <a:solidFill>
+            <a:srgbClr val="F2B418"/>
+          </a:solidFill>
+          <a:ln>
+            <a:noFill/>
+          </a:ln>
+          <a:effectLst/>
+        </p:spPr>
+        <p:style>
+          <a:lnRef idx="1">
+            <a:schemeClr val="accent1"/>
+          </a:lnRef>
+          <a:fillRef idx="3">
+            <a:schemeClr val="accent1"/>
+          </a:fillRef>
+          <a:effectRef idx="2">
+            <a:schemeClr val="accent1"/>
+          </a:effectRef>
+          <a:fontRef idx="minor">
+            <a:schemeClr val="lt1"/>
+          </a:fontRef>
+        </p:style>
+        <p:txBody>
+          <a:bodyPr rtlCol="0" anchor="ctr"/>
+          <a:lstStyle/>
+          <a:p>
+            <a:pPr algn="ctr"/>
+          </a:p>
+        </p:txBody>
+      </p:sp>
+      <p:sp>
+        <p:nvSpPr>
+          <p:cNvPr id="30" name="TextBox 29"/>
+          <p:cNvSpPr txBox="1"/>
+          <p:nvPr/>
+        </p:nvSpPr>
+        <p:spPr>
+          <a:xfrm>
+            <a:off x="8229599" y="4315968"/>
+            <a:ext cx="2834640" cy="411480"/>
+          </a:xfrm>
+          <a:prstGeom prst="rect">
+            <a:avLst/>
+          </a:prstGeom>
+          <a:noFill/>
+        </p:spPr>
+        <p:txBody>
+          <a:bodyPr wrap="square" anchor="ctr" lIns="0" rIns="0" tIns="0" bIns="0">
+            <a:spAutoFit/>
+          </a:bodyPr>
+          <a:lstStyle/>
+          <a:p>
+            <a:pPr algn="l"/>
+            <a:r>
+              <a:rPr sz="1500" b="1">
+                <a:solidFill>
+                  <a:srgbClr val="0F2A4C"/>
+                </a:solidFill>
+                <a:latin typeface="Calibri"/>
+              </a:rPr>
+              <a:t>Secure Defaults</a:t>
+            </a:r>
+          </a:p>
+        </p:txBody>
+      </p:sp>
+      <p:sp>
+        <p:nvSpPr>
+          <p:cNvPr id="31" name="TextBox 30"/>
+          <p:cNvSpPr txBox="1"/>
+          <p:nvPr/>
+        </p:nvSpPr>
+        <p:spPr>
+          <a:xfrm>
+            <a:off x="8229599" y="4681728"/>
+            <a:ext cx="2834640" cy="1371600"/>
+          </a:xfrm>
+          <a:prstGeom prst="rect">
+            <a:avLst/>
+          </a:prstGeom>
+          <a:noFill/>
+        </p:spPr>
+        <p:txBody>
+          <a:bodyPr wrap="square" anchor="t" lIns="0" rIns="0" tIns="0" bIns="0">
+            <a:spAutoFit/>
+          </a:bodyPr>
+          <a:lstStyle/>
+          <a:p>
+            <a:pPr algn="l">
+              <a:lnSpc>
+                <a:spcPct val="110000"/>
+              </a:lnSpc>
+            </a:pPr>
+            <a:r>
+              <a:rPr sz="1500" b="0">
+                <a:solidFill>
+                  <a:srgbClr val="243244"/>
+                </a:solidFill>
+                <a:latin typeface="Calibri"/>
+              </a:rPr>
+              <a:t>Common default passwords are refused and bcrypt-hashed.</a:t>
             </a:r>
           </a:p>
         </p:txBody>
